--- a/Bushee/Bushee基金分类与股票持仓结构分析.pptx
+++ b/Bushee/Bushee基金分类与股票持仓结构分析.pptx
@@ -143,19 +143,101 @@
     </mc:Fallback>
   </mc:AlternateContent>
   <c:chart>
-    <c:autoTitleDeleted val="1"/>
+    <c:title>
+      <c:tx>
+        <c:rich>
+          <a:bodyPr rot="0" spcFirstLastPara="1" vertOverflow="ellipsis" vert="horz" wrap="square" anchor="ctr" anchorCtr="1"/>
+          <a:lstStyle/>
+          <a:p>
+            <a:pPr>
+              <a:defRPr sz="1800" b="1" i="0" u="none" strike="noStrike" kern="1200" baseline="0">
+                <a:solidFill>
+                  <a:schemeClr val="dk1">
+                    <a:lumMod val="75000"/>
+                    <a:lumOff val="25000"/>
+                  </a:schemeClr>
+                </a:solidFill>
+                <a:latin typeface="+mn-lt"/>
+                <a:ea typeface="+mn-ea"/>
+                <a:cs typeface="+mn-cs"/>
+              </a:defRPr>
+            </a:pPr>
+            <a:r>
+              <a:rPr lang="zh-CN" altLang="zh-CN" sz="1800" b="1" i="0" u="none" strike="noStrike" kern="1200" baseline="0">
+                <a:solidFill>
+                  <a:sysClr val="windowText" lastClr="000000">
+                    <a:lumMod val="75000"/>
+                    <a:lumOff val="25000"/>
+                  </a:sysClr>
+                </a:solidFill>
+              </a:rPr>
+              <a:t>基金分类结果（</a:t>
+            </a:r>
+            <a:r>
+              <a:rPr lang="en-US" altLang="zh-CN" sz="1800" b="1" i="0" u="none" strike="noStrike" kern="1200" baseline="0">
+                <a:solidFill>
+                  <a:sysClr val="windowText" lastClr="000000">
+                    <a:lumMod val="75000"/>
+                    <a:lumOff val="25000"/>
+                  </a:sysClr>
+                </a:solidFill>
+              </a:rPr>
+              <a:t>2021-2025</a:t>
+            </a:r>
+            <a:r>
+              <a:rPr lang="zh-CN" altLang="en-US" sz="1800" b="1" i="0" u="none" strike="noStrike" kern="1200" baseline="0">
+                <a:solidFill>
+                  <a:sysClr val="windowText" lastClr="000000">
+                    <a:lumMod val="75000"/>
+                    <a:lumOff val="25000"/>
+                  </a:sysClr>
+                </a:solidFill>
+              </a:rPr>
+              <a:t>）</a:t>
+            </a:r>
+            <a:endParaRPr lang="zh-CN" altLang="zh-CN" sz="1800" b="1" i="0" u="none" strike="noStrike" kern="1200" baseline="0">
+              <a:solidFill>
+                <a:sysClr val="windowText" lastClr="000000">
+                  <a:lumMod val="75000"/>
+                  <a:lumOff val="25000"/>
+                </a:sysClr>
+              </a:solidFill>
+            </a:endParaRPr>
+          </a:p>
+        </c:rich>
+      </c:tx>
+      <c:overlay val="0"/>
+      <c:spPr>
+        <a:noFill/>
+        <a:ln>
+          <a:noFill/>
+        </a:ln>
+        <a:effectLst/>
+      </c:spPr>
+      <c:txPr>
+        <a:bodyPr rot="0" spcFirstLastPara="1" vertOverflow="ellipsis" vert="horz" wrap="square" anchor="ctr" anchorCtr="1"/>
+        <a:lstStyle/>
+        <a:p>
+          <a:pPr>
+            <a:defRPr sz="1800" b="1" i="0" u="none" strike="noStrike" kern="1200" baseline="0">
+              <a:solidFill>
+                <a:schemeClr val="dk1">
+                  <a:lumMod val="75000"/>
+                  <a:lumOff val="25000"/>
+                </a:schemeClr>
+              </a:solidFill>
+              <a:latin typeface="+mn-lt"/>
+              <a:ea typeface="+mn-ea"/>
+              <a:cs typeface="+mn-cs"/>
+            </a:defRPr>
+          </a:pPr>
+          <a:endParaRPr lang="zh-CN" altLang="zh-CN"/>
+        </a:p>
+      </c:txPr>
+    </c:title>
+    <c:autoTitleDeleted val="0"/>
     <c:plotArea>
-      <c:layout>
-        <c:manualLayout>
-          <c:layoutTarget val="inner"/>
-          <c:xMode val="edge"/>
-          <c:yMode val="edge"/>
-          <c:x val="2.8458854435806837E-3"/>
-          <c:y val="1.6312459379407254E-2"/>
-          <c:w val="0.66706387640941223"/>
-          <c:h val="0.91028147341326016"/>
-        </c:manualLayout>
-      </c:layout>
+      <c:layout/>
       <c:pieChart>
         <c:varyColors val="1"/>
         <c:ser>
@@ -181,7 +263,7 @@
             </c:spPr>
             <c:extLst>
               <c:ext xmlns:c16="http://schemas.microsoft.com/office/drawing/2014/chart" uri="{C3380CC4-5D6E-409C-BE32-E72D297353CC}">
-                <c16:uniqueId val="{00000001-40C0-423C-8787-D4FC85AF9FFF}"/>
+                <c16:uniqueId val="{00000001-9D27-4BC5-96E1-248609008266}"/>
               </c:ext>
             </c:extLst>
           </c:dPt>
@@ -205,7 +287,7 @@
             </c:spPr>
             <c:extLst>
               <c:ext xmlns:c16="http://schemas.microsoft.com/office/drawing/2014/chart" uri="{C3380CC4-5D6E-409C-BE32-E72D297353CC}">
-                <c16:uniqueId val="{00000003-40C0-423C-8787-D4FC85AF9FFF}"/>
+                <c16:uniqueId val="{00000003-9D27-4BC5-96E1-248609008266}"/>
               </c:ext>
             </c:extLst>
           </c:dPt>
@@ -229,11 +311,119 @@
             </c:spPr>
             <c:extLst>
               <c:ext xmlns:c16="http://schemas.microsoft.com/office/drawing/2014/chart" uri="{C3380CC4-5D6E-409C-BE32-E72D297353CC}">
-                <c16:uniqueId val="{00000005-40C0-423C-8787-D4FC85AF9FFF}"/>
+                <c16:uniqueId val="{00000005-9D27-4BC5-96E1-248609008266}"/>
               </c:ext>
             </c:extLst>
           </c:dPt>
           <c:dLbls>
+            <c:dLbl>
+              <c:idx val="0"/>
+              <c:layout>
+                <c:manualLayout>
+                  <c:x val="-2.0479221347331582E-2"/>
+                  <c:y val="0.11341608340624085"/>
+                </c:manualLayout>
+              </c:layout>
+              <c:tx>
+                <c:rich>
+                  <a:bodyPr/>
+                  <a:lstStyle/>
+                  <a:p>
+                    <a:r>
+                      <a:rPr lang="en-US" altLang="zh-CN" dirty="0"/>
+                      <a:t>1.37%</a:t>
+                    </a:r>
+                  </a:p>
+                </c:rich>
+              </c:tx>
+              <c:dLblPos val="bestFit"/>
+              <c:showLegendKey val="0"/>
+              <c:showVal val="0"/>
+              <c:showCatName val="0"/>
+              <c:showSerName val="0"/>
+              <c:showPercent val="1"/>
+              <c:showBubbleSize val="0"/>
+              <c:extLst>
+                <c:ext xmlns:c15="http://schemas.microsoft.com/office/drawing/2012/chart" uri="{CE6537A1-D6FC-4f65-9D91-7224C49458BB}">
+                  <c15:showDataLabelsRange val="0"/>
+                </c:ext>
+                <c:ext xmlns:c16="http://schemas.microsoft.com/office/drawing/2014/chart" uri="{C3380CC4-5D6E-409C-BE32-E72D297353CC}">
+                  <c16:uniqueId val="{00000001-9D27-4BC5-96E1-248609008266}"/>
+                </c:ext>
+              </c:extLst>
+            </c:dLbl>
+            <c:dLbl>
+              <c:idx val="1"/>
+              <c:layout>
+                <c:manualLayout>
+                  <c:x val="-0.18153915135608048"/>
+                  <c:y val="1.8535651793525725E-2"/>
+                </c:manualLayout>
+              </c:layout>
+              <c:tx>
+                <c:rich>
+                  <a:bodyPr/>
+                  <a:lstStyle/>
+                  <a:p>
+                    <a:r>
+                      <a:rPr lang="en-US" altLang="zh-CN" dirty="0"/>
+                      <a:t>29.01</a:t>
+                    </a:r>
+                  </a:p>
+                </c:rich>
+              </c:tx>
+              <c:dLblPos val="bestFit"/>
+              <c:showLegendKey val="0"/>
+              <c:showVal val="0"/>
+              <c:showCatName val="0"/>
+              <c:showSerName val="0"/>
+              <c:showPercent val="1"/>
+              <c:showBubbleSize val="0"/>
+              <c:extLst>
+                <c:ext xmlns:c15="http://schemas.microsoft.com/office/drawing/2012/chart" uri="{CE6537A1-D6FC-4f65-9D91-7224C49458BB}">
+                  <c15:showDataLabelsRange val="0"/>
+                </c:ext>
+                <c:ext xmlns:c16="http://schemas.microsoft.com/office/drawing/2014/chart" uri="{C3380CC4-5D6E-409C-BE32-E72D297353CC}">
+                  <c16:uniqueId val="{00000003-9D27-4BC5-96E1-248609008266}"/>
+                </c:ext>
+              </c:extLst>
+            </c:dLbl>
+            <c:dLbl>
+              <c:idx val="2"/>
+              <c:layout>
+                <c:manualLayout>
+                  <c:x val="0.12677930883639543"/>
+                  <c:y val="0.11932997958588501"/>
+                </c:manualLayout>
+              </c:layout>
+              <c:tx>
+                <c:rich>
+                  <a:bodyPr/>
+                  <a:lstStyle/>
+                  <a:p>
+                    <a:r>
+                      <a:rPr lang="en-US" altLang="zh-CN" dirty="0"/>
+                      <a:t>69.62</a:t>
+                    </a:r>
+                  </a:p>
+                </c:rich>
+              </c:tx>
+              <c:dLblPos val="bestFit"/>
+              <c:showLegendKey val="0"/>
+              <c:showVal val="0"/>
+              <c:showCatName val="0"/>
+              <c:showSerName val="0"/>
+              <c:showPercent val="1"/>
+              <c:showBubbleSize val="0"/>
+              <c:extLst>
+                <c:ext xmlns:c15="http://schemas.microsoft.com/office/drawing/2012/chart" uri="{CE6537A1-D6FC-4f65-9D91-7224C49458BB}">
+                  <c15:showDataLabelsRange val="0"/>
+                </c:ext>
+                <c:ext xmlns:c16="http://schemas.microsoft.com/office/drawing/2014/chart" uri="{C3380CC4-5D6E-409C-BE32-E72D297353CC}">
+                  <c16:uniqueId val="{00000005-9D27-4BC5-96E1-248609008266}"/>
+                </c:ext>
+              </c:extLst>
+            </c:dLbl>
             <c:spPr>
               <a:pattFill prst="pct75">
                 <a:fgClr>
@@ -306,29 +496,29 @@
           </c:dLbls>
           <c:cat>
             <c:multiLvlStrRef>
-              <c:f>Sheet1!$I$2:$J$4</c:f>
+              <c:f>Sheet2!$E$8:$F$10</c:f>
               <c:multiLvlStrCache>
                 <c:ptCount val="3"/>
                 <c:lvl>
                   <c:pt idx="0">
-                    <c:v>Quasi-index</c:v>
+                    <c:v>Dedicated</c:v>
                   </c:pt>
                   <c:pt idx="1">
                     <c:v>Transient</c:v>
                   </c:pt>
                   <c:pt idx="2">
-                    <c:v>Dedicated</c:v>
+                    <c:v>Quasi-index</c:v>
                   </c:pt>
                 </c:lvl>
                 <c:lvl>
                   <c:pt idx="0">
-                    <c:v>4302</c:v>
+                    <c:v>1.37%</c:v>
                   </c:pt>
                   <c:pt idx="1">
-                    <c:v>4700</c:v>
+                    <c:v>29.01%</c:v>
                   </c:pt>
                   <c:pt idx="2">
-                    <c:v>169</c:v>
+                    <c:v>69.62%</c:v>
                   </c:pt>
                 </c:lvl>
               </c:multiLvlStrCache>
@@ -336,25 +526,25 @@
           </c:cat>
           <c:val>
             <c:numRef>
-              <c:f>Sheet1!$K$2:$K$4</c:f>
+              <c:f>Sheet2!$G$8:$G$10</c:f>
               <c:numCache>
-                <c:formatCode>0.00%</c:formatCode>
+                <c:formatCode>General</c:formatCode>
                 <c:ptCount val="3"/>
                 <c:pt idx="0">
-                  <c:v>0.46908734052993128</c:v>
+                  <c:v>102</c:v>
                 </c:pt>
                 <c:pt idx="1">
-                  <c:v>0.51248500708755862</c:v>
+                  <c:v>2155</c:v>
                 </c:pt>
                 <c:pt idx="2">
-                  <c:v>1.8427652382510085E-2</c:v>
+                  <c:v>5172</c:v>
                 </c:pt>
               </c:numCache>
             </c:numRef>
           </c:val>
           <c:extLst>
             <c:ext xmlns:c16="http://schemas.microsoft.com/office/drawing/2014/chart" uri="{C3380CC4-5D6E-409C-BE32-E72D297353CC}">
-              <c16:uniqueId val="{00000006-40C0-423C-8787-D4FC85AF9FFF}"/>
+              <c16:uniqueId val="{00000006-9D27-4BC5-96E1-248609008266}"/>
             </c:ext>
           </c:extLst>
         </c:ser>
@@ -493,6 +683,509 @@
           <a:lstStyle/>
           <a:p>
             <a:pPr>
+              <a:defRPr sz="1800" b="1" i="0" u="none" strike="noStrike" kern="1200" baseline="0">
+                <a:solidFill>
+                  <a:schemeClr val="dk1">
+                    <a:lumMod val="75000"/>
+                    <a:lumOff val="25000"/>
+                  </a:schemeClr>
+                </a:solidFill>
+                <a:latin typeface="+mn-lt"/>
+                <a:ea typeface="+mn-ea"/>
+                <a:cs typeface="+mn-cs"/>
+              </a:defRPr>
+            </a:pPr>
+            <a:r>
+              <a:rPr lang="zh-CN"/>
+              <a:t>基金分类结果（</a:t>
+            </a:r>
+            <a:r>
+              <a:rPr lang="en-US"/>
+              <a:t>2023-2025</a:t>
+            </a:r>
+            <a:r>
+              <a:rPr lang="zh-CN"/>
+              <a:t>）</a:t>
+            </a:r>
+          </a:p>
+        </c:rich>
+      </c:tx>
+      <c:overlay val="0"/>
+      <c:spPr>
+        <a:noFill/>
+        <a:ln>
+          <a:noFill/>
+        </a:ln>
+        <a:effectLst/>
+      </c:spPr>
+      <c:txPr>
+        <a:bodyPr rot="0" spcFirstLastPara="1" vertOverflow="ellipsis" vert="horz" wrap="square" anchor="ctr" anchorCtr="1"/>
+        <a:lstStyle/>
+        <a:p>
+          <a:pPr>
+            <a:defRPr sz="1800" b="1" i="0" u="none" strike="noStrike" kern="1200" baseline="0">
+              <a:solidFill>
+                <a:schemeClr val="dk1">
+                  <a:lumMod val="75000"/>
+                  <a:lumOff val="25000"/>
+                </a:schemeClr>
+              </a:solidFill>
+              <a:latin typeface="+mn-lt"/>
+              <a:ea typeface="+mn-ea"/>
+              <a:cs typeface="+mn-cs"/>
+            </a:defRPr>
+          </a:pPr>
+          <a:endParaRPr lang="zh-CN"/>
+        </a:p>
+      </c:txPr>
+    </c:title>
+    <c:autoTitleDeleted val="0"/>
+    <c:plotArea>
+      <c:layout>
+        <c:manualLayout>
+          <c:layoutTarget val="inner"/>
+          <c:xMode val="edge"/>
+          <c:yMode val="edge"/>
+          <c:x val="0.15026837270341206"/>
+          <c:y val="0.20555555555555555"/>
+          <c:w val="0.44888888888888889"/>
+          <c:h val="0.74814814814814812"/>
+        </c:manualLayout>
+      </c:layout>
+      <c:pieChart>
+        <c:varyColors val="1"/>
+        <c:ser>
+          <c:idx val="0"/>
+          <c:order val="0"/>
+          <c:dPt>
+            <c:idx val="0"/>
+            <c:bubble3D val="0"/>
+            <c:spPr>
+              <a:solidFill>
+                <a:schemeClr val="accent1"/>
+              </a:solidFill>
+              <a:ln>
+                <a:noFill/>
+              </a:ln>
+              <a:effectLst>
+                <a:outerShdw blurRad="254000" sx="102000" sy="102000" algn="ctr" rotWithShape="0">
+                  <a:prstClr val="black">
+                    <a:alpha val="20000"/>
+                  </a:prstClr>
+                </a:outerShdw>
+              </a:effectLst>
+            </c:spPr>
+            <c:extLst>
+              <c:ext xmlns:c16="http://schemas.microsoft.com/office/drawing/2014/chart" uri="{C3380CC4-5D6E-409C-BE32-E72D297353CC}">
+                <c16:uniqueId val="{00000001-2E0D-4946-8745-1A17B3C3BC64}"/>
+              </c:ext>
+            </c:extLst>
+          </c:dPt>
+          <c:dPt>
+            <c:idx val="1"/>
+            <c:bubble3D val="0"/>
+            <c:spPr>
+              <a:solidFill>
+                <a:schemeClr val="accent3"/>
+              </a:solidFill>
+              <a:ln>
+                <a:noFill/>
+              </a:ln>
+              <a:effectLst>
+                <a:outerShdw blurRad="254000" sx="102000" sy="102000" algn="ctr" rotWithShape="0">
+                  <a:prstClr val="black">
+                    <a:alpha val="20000"/>
+                  </a:prstClr>
+                </a:outerShdw>
+              </a:effectLst>
+            </c:spPr>
+            <c:extLst>
+              <c:ext xmlns:c16="http://schemas.microsoft.com/office/drawing/2014/chart" uri="{C3380CC4-5D6E-409C-BE32-E72D297353CC}">
+                <c16:uniqueId val="{00000003-2E0D-4946-8745-1A17B3C3BC64}"/>
+              </c:ext>
+            </c:extLst>
+          </c:dPt>
+          <c:dPt>
+            <c:idx val="2"/>
+            <c:bubble3D val="0"/>
+            <c:spPr>
+              <a:solidFill>
+                <a:schemeClr val="accent5"/>
+              </a:solidFill>
+              <a:ln>
+                <a:noFill/>
+              </a:ln>
+              <a:effectLst>
+                <a:outerShdw blurRad="254000" sx="102000" sy="102000" algn="ctr" rotWithShape="0">
+                  <a:prstClr val="black">
+                    <a:alpha val="20000"/>
+                  </a:prstClr>
+                </a:outerShdw>
+              </a:effectLst>
+            </c:spPr>
+            <c:extLst>
+              <c:ext xmlns:c16="http://schemas.microsoft.com/office/drawing/2014/chart" uri="{C3380CC4-5D6E-409C-BE32-E72D297353CC}">
+                <c16:uniqueId val="{00000005-2E0D-4946-8745-1A17B3C3BC64}"/>
+              </c:ext>
+            </c:extLst>
+          </c:dPt>
+          <c:dLbls>
+            <c:dLbl>
+              <c:idx val="0"/>
+              <c:layout>
+                <c:manualLayout>
+                  <c:x val="-3.5618766404199524E-2"/>
+                  <c:y val="0.1088644648585593"/>
+                </c:manualLayout>
+              </c:layout>
+              <c:tx>
+                <c:rich>
+                  <a:bodyPr/>
+                  <a:lstStyle/>
+                  <a:p>
+                    <a:r>
+                      <a:rPr lang="en-US" altLang="zh-CN" dirty="0"/>
+                      <a:t>2.50</a:t>
+                    </a:r>
+                  </a:p>
+                </c:rich>
+              </c:tx>
+              <c:dLblPos val="bestFit"/>
+              <c:showLegendKey val="0"/>
+              <c:showVal val="0"/>
+              <c:showCatName val="1"/>
+              <c:showSerName val="0"/>
+              <c:showPercent val="1"/>
+              <c:showBubbleSize val="0"/>
+              <c:extLst>
+                <c:ext xmlns:c15="http://schemas.microsoft.com/office/drawing/2012/chart" uri="{CE6537A1-D6FC-4f65-9D91-7224C49458BB}">
+                  <c15:showDataLabelsRange val="0"/>
+                </c:ext>
+                <c:ext xmlns:c16="http://schemas.microsoft.com/office/drawing/2014/chart" uri="{C3380CC4-5D6E-409C-BE32-E72D297353CC}">
+                  <c16:uniqueId val="{00000001-2E0D-4946-8745-1A17B3C3BC64}"/>
+                </c:ext>
+              </c:extLst>
+            </c:dLbl>
+            <c:dLbl>
+              <c:idx val="1"/>
+              <c:tx>
+                <c:rich>
+                  <a:bodyPr/>
+                  <a:lstStyle/>
+                  <a:p>
+                    <a:r>
+                      <a:rPr lang="en-US" altLang="zh-CN" baseline="0" dirty="0"/>
+                      <a:t>27.66</a:t>
+                    </a:r>
+                    <a:endParaRPr lang="en-US" altLang="zh-CN" dirty="0"/>
+                  </a:p>
+                </c:rich>
+              </c:tx>
+              <c:dLblPos val="ctr"/>
+              <c:showLegendKey val="0"/>
+              <c:showVal val="0"/>
+              <c:showCatName val="1"/>
+              <c:showSerName val="0"/>
+              <c:showPercent val="1"/>
+              <c:showBubbleSize val="0"/>
+              <c:extLst>
+                <c:ext xmlns:c15="http://schemas.microsoft.com/office/drawing/2012/chart" uri="{CE6537A1-D6FC-4f65-9D91-7224C49458BB}">
+                  <c15:showDataLabelsRange val="0"/>
+                </c:ext>
+                <c:ext xmlns:c16="http://schemas.microsoft.com/office/drawing/2014/chart" uri="{C3380CC4-5D6E-409C-BE32-E72D297353CC}">
+                  <c16:uniqueId val="{00000003-2E0D-4946-8745-1A17B3C3BC64}"/>
+                </c:ext>
+              </c:extLst>
+            </c:dLbl>
+            <c:dLbl>
+              <c:idx val="2"/>
+              <c:tx>
+                <c:rich>
+                  <a:bodyPr/>
+                  <a:lstStyle/>
+                  <a:p>
+                    <a:r>
+                      <a:rPr lang="en-US" altLang="zh-CN" dirty="0"/>
+                      <a:t>69.85</a:t>
+                    </a:r>
+                  </a:p>
+                </c:rich>
+              </c:tx>
+              <c:dLblPos val="ctr"/>
+              <c:showLegendKey val="0"/>
+              <c:showVal val="0"/>
+              <c:showCatName val="1"/>
+              <c:showSerName val="0"/>
+              <c:showPercent val="1"/>
+              <c:showBubbleSize val="0"/>
+              <c:extLst>
+                <c:ext xmlns:c15="http://schemas.microsoft.com/office/drawing/2012/chart" uri="{CE6537A1-D6FC-4f65-9D91-7224C49458BB}">
+                  <c15:showDataLabelsRange val="0"/>
+                </c:ext>
+                <c:ext xmlns:c16="http://schemas.microsoft.com/office/drawing/2014/chart" uri="{C3380CC4-5D6E-409C-BE32-E72D297353CC}">
+                  <c16:uniqueId val="{00000005-2E0D-4946-8745-1A17B3C3BC64}"/>
+                </c:ext>
+              </c:extLst>
+            </c:dLbl>
+            <c:spPr>
+              <a:pattFill prst="pct75">
+                <a:fgClr>
+                  <a:schemeClr val="dk1">
+                    <a:lumMod val="75000"/>
+                    <a:lumOff val="25000"/>
+                  </a:schemeClr>
+                </a:fgClr>
+                <a:bgClr>
+                  <a:schemeClr val="dk1">
+                    <a:lumMod val="65000"/>
+                    <a:lumOff val="35000"/>
+                  </a:schemeClr>
+                </a:bgClr>
+              </a:pattFill>
+              <a:ln>
+                <a:noFill/>
+              </a:ln>
+              <a:effectLst>
+                <a:outerShdw blurRad="50800" dist="38100" dir="2700000" algn="tl" rotWithShape="0">
+                  <a:prstClr val="black">
+                    <a:alpha val="40000"/>
+                  </a:prstClr>
+                </a:outerShdw>
+              </a:effectLst>
+            </c:spPr>
+            <c:txPr>
+              <a:bodyPr rot="0" spcFirstLastPara="1" vertOverflow="ellipsis" vert="horz" wrap="square" lIns="38100" tIns="19050" rIns="38100" bIns="19050" anchor="ctr" anchorCtr="1">
+                <a:spAutoFit/>
+              </a:bodyPr>
+              <a:lstStyle/>
+              <a:p>
+                <a:pPr>
+                  <a:defRPr sz="1000" b="1" i="0" u="none" strike="noStrike" kern="1200" baseline="0">
+                    <a:solidFill>
+                      <a:schemeClr val="lt1"/>
+                    </a:solidFill>
+                    <a:latin typeface="+mn-lt"/>
+                    <a:ea typeface="+mn-ea"/>
+                    <a:cs typeface="+mn-cs"/>
+                  </a:defRPr>
+                </a:pPr>
+                <a:endParaRPr lang="zh-CN"/>
+              </a:p>
+            </c:txPr>
+            <c:dLblPos val="ctr"/>
+            <c:showLegendKey val="0"/>
+            <c:showVal val="0"/>
+            <c:showCatName val="1"/>
+            <c:showSerName val="0"/>
+            <c:showPercent val="1"/>
+            <c:showBubbleSize val="0"/>
+            <c:showLeaderLines val="1"/>
+            <c:leaderLines>
+              <c:spPr>
+                <a:ln w="9525">
+                  <a:solidFill>
+                    <a:schemeClr val="dk1">
+                      <a:lumMod val="50000"/>
+                      <a:lumOff val="50000"/>
+                    </a:schemeClr>
+                  </a:solidFill>
+                </a:ln>
+                <a:effectLst/>
+              </c:spPr>
+            </c:leaderLines>
+            <c:extLst>
+              <c:ext xmlns:c15="http://schemas.microsoft.com/office/drawing/2012/chart" uri="{CE6537A1-D6FC-4f65-9D91-7224C49458BB}"/>
+            </c:extLst>
+          </c:dLbls>
+          <c:cat>
+            <c:multiLvlStrRef>
+              <c:f>Sheet2!$E$5:$F$7</c:f>
+              <c:multiLvlStrCache>
+                <c:ptCount val="3"/>
+                <c:lvl>
+                  <c:pt idx="0">
+                    <c:v>Dedicated</c:v>
+                  </c:pt>
+                  <c:pt idx="1">
+                    <c:v>Transient</c:v>
+                  </c:pt>
+                  <c:pt idx="2">
+                    <c:v>Quasi-index</c:v>
+                  </c:pt>
+                </c:lvl>
+                <c:lvl>
+                  <c:pt idx="0">
+                    <c:v>2.50%</c:v>
+                  </c:pt>
+                  <c:pt idx="1">
+                    <c:v>27.66%</c:v>
+                  </c:pt>
+                  <c:pt idx="2">
+                    <c:v>69.85%</c:v>
+                  </c:pt>
+                </c:lvl>
+              </c:multiLvlStrCache>
+            </c:multiLvlStrRef>
+          </c:cat>
+          <c:val>
+            <c:numRef>
+              <c:f>Sheet2!$G$5:$G$7</c:f>
+              <c:numCache>
+                <c:formatCode>General</c:formatCode>
+                <c:ptCount val="3"/>
+                <c:pt idx="0">
+                  <c:v>231</c:v>
+                </c:pt>
+                <c:pt idx="1">
+                  <c:v>2559</c:v>
+                </c:pt>
+                <c:pt idx="2">
+                  <c:v>6463</c:v>
+                </c:pt>
+              </c:numCache>
+            </c:numRef>
+          </c:val>
+          <c:extLst>
+            <c:ext xmlns:c16="http://schemas.microsoft.com/office/drawing/2014/chart" uri="{C3380CC4-5D6E-409C-BE32-E72D297353CC}">
+              <c16:uniqueId val="{00000006-2E0D-4946-8745-1A17B3C3BC64}"/>
+            </c:ext>
+          </c:extLst>
+        </c:ser>
+        <c:dLbls>
+          <c:dLblPos val="ctr"/>
+          <c:showLegendKey val="0"/>
+          <c:showVal val="0"/>
+          <c:showCatName val="1"/>
+          <c:showSerName val="0"/>
+          <c:showPercent val="0"/>
+          <c:showBubbleSize val="0"/>
+          <c:showLeaderLines val="1"/>
+        </c:dLbls>
+        <c:firstSliceAng val="0"/>
+      </c:pieChart>
+      <c:spPr>
+        <a:noFill/>
+        <a:ln>
+          <a:noFill/>
+        </a:ln>
+        <a:effectLst/>
+      </c:spPr>
+    </c:plotArea>
+    <c:legend>
+      <c:legendPos val="r"/>
+      <c:overlay val="0"/>
+      <c:spPr>
+        <a:solidFill>
+          <a:schemeClr val="lt1">
+            <a:lumMod val="95000"/>
+            <a:alpha val="39000"/>
+          </a:schemeClr>
+        </a:solidFill>
+        <a:ln>
+          <a:noFill/>
+        </a:ln>
+        <a:effectLst/>
+      </c:spPr>
+      <c:txPr>
+        <a:bodyPr rot="0" spcFirstLastPara="1" vertOverflow="ellipsis" vert="horz" wrap="square" anchor="ctr" anchorCtr="1"/>
+        <a:lstStyle/>
+        <a:p>
+          <a:pPr>
+            <a:defRPr sz="900" b="0" i="0" u="none" strike="noStrike" kern="1200" baseline="0">
+              <a:solidFill>
+                <a:schemeClr val="dk1">
+                  <a:lumMod val="75000"/>
+                  <a:lumOff val="25000"/>
+                </a:schemeClr>
+              </a:solidFill>
+              <a:latin typeface="+mn-lt"/>
+              <a:ea typeface="+mn-ea"/>
+              <a:cs typeface="+mn-cs"/>
+            </a:defRPr>
+          </a:pPr>
+          <a:endParaRPr lang="zh-CN"/>
+        </a:p>
+      </c:txPr>
+    </c:legend>
+    <c:plotVisOnly val="1"/>
+    <c:dispBlanksAs val="gap"/>
+    <c:showDLblsOverMax val="0"/>
+    <c:extLst>
+      <c:ext xmlns:c16r3="http://schemas.microsoft.com/office/drawing/2017/03/chart" uri="{56B9EC1D-385E-4148-901F-78D8002777C0}">
+        <c16r3:dataDisplayOptions16>
+          <c16r3:dispNaAsBlank val="1"/>
+        </c16r3:dataDisplayOptions16>
+      </c:ext>
+    </c:extLst>
+  </c:chart>
+  <c:spPr>
+    <a:gradFill flip="none" rotWithShape="1">
+      <a:gsLst>
+        <a:gs pos="0">
+          <a:schemeClr val="lt1"/>
+        </a:gs>
+        <a:gs pos="39000">
+          <a:schemeClr val="lt1"/>
+        </a:gs>
+        <a:gs pos="100000">
+          <a:schemeClr val="lt1">
+            <a:lumMod val="75000"/>
+          </a:schemeClr>
+        </a:gs>
+      </a:gsLst>
+      <a:path path="circle">
+        <a:fillToRect l="50000" t="-80000" r="50000" b="180000"/>
+      </a:path>
+      <a:tileRect/>
+    </a:gradFill>
+    <a:ln w="9525" cap="flat" cmpd="sng" algn="ctr">
+      <a:solidFill>
+        <a:schemeClr val="dk1">
+          <a:lumMod val="25000"/>
+          <a:lumOff val="75000"/>
+        </a:schemeClr>
+      </a:solidFill>
+      <a:round/>
+    </a:ln>
+    <a:effectLst/>
+  </c:spPr>
+  <c:txPr>
+    <a:bodyPr/>
+    <a:lstStyle/>
+    <a:p>
+      <a:pPr>
+        <a:defRPr/>
+      </a:pPr>
+      <a:endParaRPr lang="zh-CN"/>
+    </a:p>
+  </c:txPr>
+  <c:externalData r:id="rId3">
+    <c:autoUpdate val="0"/>
+  </c:externalData>
+</c:chartSpace>
+</file>
+
+<file path=ppt/charts/chart3.xml><?xml version="1.0" encoding="utf-8"?>
+<c:chartSpace xmlns:c="http://schemas.openxmlformats.org/drawingml/2006/chart" xmlns:a="http://schemas.openxmlformats.org/drawingml/2006/main" xmlns:r="http://schemas.openxmlformats.org/officeDocument/2006/relationships" xmlns:c16r2="http://schemas.microsoft.com/office/drawing/2015/06/chart">
+  <c:date1904 val="0"/>
+  <c:lang val="zh-CN"/>
+  <c:roundedCorners val="0"/>
+  <mc:AlternateContent xmlns:mc="http://schemas.openxmlformats.org/markup-compatibility/2006">
+    <mc:Choice xmlns:c14="http://schemas.microsoft.com/office/drawing/2007/8/2/chart" Requires="c14">
+      <c14:style val="102"/>
+    </mc:Choice>
+    <mc:Fallback>
+      <c:style val="2"/>
+    </mc:Fallback>
+  </mc:AlternateContent>
+  <c:chart>
+    <c:title>
+      <c:tx>
+        <c:rich>
+          <a:bodyPr rot="0" spcFirstLastPara="1" vertOverflow="ellipsis" vert="horz" wrap="square" anchor="ctr" anchorCtr="1"/>
+          <a:lstStyle/>
+          <a:p>
+            <a:pPr>
               <a:defRPr sz="1400" b="0" i="0" u="none" strike="noStrike" kern="1200" spc="0" baseline="0">
                 <a:solidFill>
                   <a:schemeClr val="tx1">
@@ -634,13 +1327,13 @@
               <c:strCache>
                 <c:ptCount val="3"/>
                 <c:pt idx="0">
-                  <c:v>Dedicated_Ratio</c:v>
+                  <c:v>Dedicated</c:v>
                 </c:pt>
                 <c:pt idx="1">
-                  <c:v>QuasiIndex_Ratio</c:v>
+                  <c:v>QuasiIndex</c:v>
                 </c:pt>
                 <c:pt idx="2">
-                  <c:v>Transient_Ratio</c:v>
+                  <c:v>Transient</c:v>
                 </c:pt>
               </c:strCache>
             </c:strRef>
@@ -649,23 +1342,23 @@
             <c:numRef>
               <c:f>Sheet2!$B$2:$D$2</c:f>
               <c:numCache>
-                <c:formatCode>0.000%</c:formatCode>
+                <c:formatCode>0.0000%</c:formatCode>
                 <c:ptCount val="3"/>
                 <c:pt idx="0">
-                  <c:v>7.932712884074776E-4</c:v>
+                  <c:v>8.0723000000000004E-4</c:v>
                 </c:pt>
                 <c:pt idx="1">
-                  <c:v>1.7533429828462656E-2</c:v>
+                  <c:v>1.2361373E-2</c:v>
                 </c:pt>
                 <c:pt idx="2">
-                  <c:v>6.2480868690845629E-3</c:v>
+                  <c:v>3.8818049999999999E-3</c:v>
                 </c:pt>
               </c:numCache>
             </c:numRef>
           </c:val>
           <c:extLst>
             <c:ext xmlns:c16="http://schemas.microsoft.com/office/drawing/2014/chart" uri="{C3380CC4-5D6E-409C-BE32-E72D297353CC}">
-              <c16:uniqueId val="{00000000-19F3-4C25-B5C0-11BF0C2FEF49}"/>
+              <c16:uniqueId val="{00000000-6813-4105-9C63-A5610164A76A}"/>
             </c:ext>
           </c:extLst>
         </c:ser>
@@ -755,7 +1448,7 @@
             <a:effectLst/>
           </c:spPr>
         </c:majorGridlines>
-        <c:numFmt formatCode="0.000%" sourceLinked="1"/>
+        <c:numFmt formatCode="0.0000%" sourceLinked="1"/>
         <c:majorTickMark val="none"/>
         <c:minorTickMark val="none"/>
         <c:tickLblPos val="nextTo"/>
@@ -832,7 +1525,7 @@
 </c:chartSpace>
 </file>
 
-<file path=ppt/charts/chart3.xml><?xml version="1.0" encoding="utf-8"?>
+<file path=ppt/charts/chart4.xml><?xml version="1.0" encoding="utf-8"?>
 <c:chartSpace xmlns:c="http://schemas.openxmlformats.org/drawingml/2006/chart" xmlns:a="http://schemas.openxmlformats.org/drawingml/2006/main" xmlns:r="http://schemas.openxmlformats.org/officeDocument/2006/relationships" xmlns:c16r2="http://schemas.microsoft.com/office/drawing/2015/06/chart">
   <c:date1904 val="0"/>
   <c:lang val="zh-CN"/>
@@ -1012,20 +1705,20 @@
                 <c:formatCode>0.0000%</c:formatCode>
                 <c:ptCount val="3"/>
                 <c:pt idx="0">
-                  <c:v>7.9427199999999995E-4</c:v>
+                  <c:v>7.5672386364911528E-4</c:v>
                 </c:pt>
                 <c:pt idx="1">
-                  <c:v>1.8164996999999999E-2</c:v>
+                  <c:v>9.9389256459626284E-3</c:v>
                 </c:pt>
                 <c:pt idx="2">
-                  <c:v>7.4735089999999997E-3</c:v>
+                  <c:v>5.589517483886787E-3</c:v>
                 </c:pt>
               </c:numCache>
             </c:numRef>
           </c:val>
           <c:extLst>
             <c:ext xmlns:c16="http://schemas.microsoft.com/office/drawing/2014/chart" uri="{C3380CC4-5D6E-409C-BE32-E72D297353CC}">
-              <c16:uniqueId val="{00000000-8480-4E1D-8491-7BF1129CBABD}"/>
+              <c16:uniqueId val="{00000000-CEFE-421D-8C92-D9DD6D4A40B9}"/>
             </c:ext>
           </c:extLst>
         </c:ser>
@@ -1230,6 +1923,43 @@
 </file>
 
 <file path=ppt/charts/colors2.xml><?xml version="1.0" encoding="utf-8"?>
+<cs:colorStyle xmlns:cs="http://schemas.microsoft.com/office/drawing/2012/chartStyle" xmlns:a="http://schemas.openxmlformats.org/drawingml/2006/main" meth="cycle" id="11">
+  <a:schemeClr val="accent1"/>
+  <a:schemeClr val="accent3"/>
+  <a:schemeClr val="accent5"/>
+  <cs:variation/>
+  <cs:variation>
+    <a:lumMod val="60000"/>
+  </cs:variation>
+  <cs:variation>
+    <a:lumMod val="80000"/>
+    <a:lumOff val="20000"/>
+  </cs:variation>
+  <cs:variation>
+    <a:lumMod val="80000"/>
+  </cs:variation>
+  <cs:variation>
+    <a:lumMod val="60000"/>
+    <a:lumOff val="40000"/>
+  </cs:variation>
+  <cs:variation>
+    <a:lumMod val="50000"/>
+  </cs:variation>
+  <cs:variation>
+    <a:lumMod val="70000"/>
+    <a:lumOff val="30000"/>
+  </cs:variation>
+  <cs:variation>
+    <a:lumMod val="70000"/>
+  </cs:variation>
+  <cs:variation>
+    <a:lumMod val="50000"/>
+    <a:lumOff val="50000"/>
+  </cs:variation>
+</cs:colorStyle>
+</file>
+
+<file path=ppt/charts/colors3.xml><?xml version="1.0" encoding="utf-8"?>
 <cs:colorStyle xmlns:cs="http://schemas.microsoft.com/office/drawing/2012/chartStyle" xmlns:a="http://schemas.openxmlformats.org/drawingml/2006/main" meth="cycle" id="10">
   <a:schemeClr val="accent1"/>
   <a:schemeClr val="accent2"/>
@@ -1269,7 +1999,7 @@
 </cs:colorStyle>
 </file>
 
-<file path=ppt/charts/colors3.xml><?xml version="1.0" encoding="utf-8"?>
+<file path=ppt/charts/colors4.xml><?xml version="1.0" encoding="utf-8"?>
 <cs:colorStyle xmlns:cs="http://schemas.microsoft.com/office/drawing/2012/chartStyle" xmlns:a="http://schemas.openxmlformats.org/drawingml/2006/main" meth="cycle" id="10">
   <a:schemeClr val="accent1"/>
   <a:schemeClr val="accent2"/>
@@ -1911,6 +2641,607 @@
 </file>
 
 <file path=ppt/charts/style2.xml><?xml version="1.0" encoding="utf-8"?>
+<cs:chartStyle xmlns:cs="http://schemas.microsoft.com/office/drawing/2012/chartStyle" xmlns:a="http://schemas.openxmlformats.org/drawingml/2006/main" id="253">
+  <cs:axisTitle>
+    <cs:lnRef idx="0"/>
+    <cs:fillRef idx="0"/>
+    <cs:effectRef idx="0"/>
+    <cs:fontRef idx="minor">
+      <a:schemeClr val="dk1">
+        <a:lumMod val="75000"/>
+        <a:lumOff val="25000"/>
+      </a:schemeClr>
+    </cs:fontRef>
+    <cs:defRPr sz="900" b="1" kern="1200"/>
+  </cs:axisTitle>
+  <cs:categoryAxis>
+    <cs:lnRef idx="0"/>
+    <cs:fillRef idx="0"/>
+    <cs:effectRef idx="0"/>
+    <cs:fontRef idx="minor">
+      <a:schemeClr val="dk1">
+        <a:lumMod val="75000"/>
+        <a:lumOff val="25000"/>
+      </a:schemeClr>
+    </cs:fontRef>
+    <cs:spPr>
+      <a:ln w="19050" cap="flat" cmpd="sng" algn="ctr">
+        <a:solidFill>
+          <a:schemeClr val="dk1">
+            <a:lumMod val="75000"/>
+            <a:lumOff val="25000"/>
+          </a:schemeClr>
+        </a:solidFill>
+        <a:round/>
+      </a:ln>
+    </cs:spPr>
+    <cs:defRPr sz="900" kern="1200" cap="all" baseline="0"/>
+  </cs:categoryAxis>
+  <cs:chartArea>
+    <cs:lnRef idx="0"/>
+    <cs:fillRef idx="0"/>
+    <cs:effectRef idx="0"/>
+    <cs:fontRef idx="minor">
+      <a:schemeClr val="dk1"/>
+    </cs:fontRef>
+    <cs:spPr>
+      <a:gradFill flip="none" rotWithShape="1">
+        <a:gsLst>
+          <a:gs pos="0">
+            <a:schemeClr val="lt1"/>
+          </a:gs>
+          <a:gs pos="39000">
+            <a:schemeClr val="lt1"/>
+          </a:gs>
+          <a:gs pos="100000">
+            <a:schemeClr val="lt1">
+              <a:lumMod val="75000"/>
+            </a:schemeClr>
+          </a:gs>
+        </a:gsLst>
+        <a:path path="circle">
+          <a:fillToRect l="50000" t="-80000" r="50000" b="180000"/>
+        </a:path>
+        <a:tileRect/>
+      </a:gradFill>
+      <a:ln w="9525" cap="flat" cmpd="sng" algn="ctr">
+        <a:solidFill>
+          <a:schemeClr val="dk1">
+            <a:lumMod val="25000"/>
+            <a:lumOff val="75000"/>
+          </a:schemeClr>
+        </a:solidFill>
+        <a:round/>
+      </a:ln>
+    </cs:spPr>
+    <cs:defRPr sz="900" kern="1200"/>
+  </cs:chartArea>
+  <cs:dataLabel>
+    <cs:lnRef idx="0"/>
+    <cs:fillRef idx="0"/>
+    <cs:effectRef idx="0"/>
+    <cs:fontRef idx="minor">
+      <a:schemeClr val="lt1"/>
+    </cs:fontRef>
+    <cs:spPr>
+      <a:pattFill prst="pct75">
+        <a:fgClr>
+          <a:schemeClr val="dk1">
+            <a:lumMod val="75000"/>
+            <a:lumOff val="25000"/>
+          </a:schemeClr>
+        </a:fgClr>
+        <a:bgClr>
+          <a:schemeClr val="dk1">
+            <a:lumMod val="65000"/>
+            <a:lumOff val="35000"/>
+          </a:schemeClr>
+        </a:bgClr>
+      </a:pattFill>
+      <a:effectLst>
+        <a:outerShdw blurRad="50800" dist="38100" dir="2700000" algn="tl" rotWithShape="0">
+          <a:prstClr val="black">
+            <a:alpha val="40000"/>
+          </a:prstClr>
+        </a:outerShdw>
+      </a:effectLst>
+    </cs:spPr>
+    <cs:defRPr sz="1000" b="1" i="0" u="none" strike="noStrike" kern="1200" baseline="0"/>
+  </cs:dataLabel>
+  <cs:dataLabelCallout>
+    <cs:lnRef idx="0"/>
+    <cs:fillRef idx="0"/>
+    <cs:effectRef idx="0"/>
+    <cs:fontRef idx="minor">
+      <a:schemeClr val="lt1"/>
+    </cs:fontRef>
+    <cs:spPr>
+      <a:pattFill prst="pct75">
+        <a:fgClr>
+          <a:schemeClr val="dk1">
+            <a:lumMod val="75000"/>
+            <a:lumOff val="25000"/>
+          </a:schemeClr>
+        </a:fgClr>
+        <a:bgClr>
+          <a:schemeClr val="dk1">
+            <a:lumMod val="65000"/>
+            <a:lumOff val="35000"/>
+          </a:schemeClr>
+        </a:bgClr>
+      </a:pattFill>
+      <a:effectLst>
+        <a:outerShdw blurRad="50800" dist="38100" dir="2700000" algn="tl" rotWithShape="0">
+          <a:prstClr val="black">
+            <a:alpha val="40000"/>
+          </a:prstClr>
+        </a:outerShdw>
+      </a:effectLst>
+    </cs:spPr>
+    <cs:defRPr sz="1000" b="1" i="0" u="none" strike="noStrike" kern="1200" baseline="0"/>
+    <cs:bodyPr rot="0" spcFirstLastPara="1" vertOverflow="clip" horzOverflow="clip" vert="horz" wrap="square" lIns="36576" tIns="18288" rIns="36576" bIns="18288" anchor="ctr" anchorCtr="1">
+      <a:spAutoFit/>
+    </cs:bodyPr>
+  </cs:dataLabelCallout>
+  <cs:dataPoint>
+    <cs:lnRef idx="0"/>
+    <cs:fillRef idx="0">
+      <cs:styleClr val="auto"/>
+    </cs:fillRef>
+    <cs:effectRef idx="0"/>
+    <cs:fontRef idx="minor">
+      <a:schemeClr val="dk1"/>
+    </cs:fontRef>
+    <cs:spPr>
+      <a:solidFill>
+        <a:schemeClr val="phClr"/>
+      </a:solidFill>
+      <a:effectLst>
+        <a:outerShdw blurRad="254000" sx="102000" sy="102000" algn="ctr" rotWithShape="0">
+          <a:prstClr val="black">
+            <a:alpha val="20000"/>
+          </a:prstClr>
+        </a:outerShdw>
+      </a:effectLst>
+    </cs:spPr>
+  </cs:dataPoint>
+  <cs:dataPoint3D>
+    <cs:lnRef idx="0"/>
+    <cs:fillRef idx="0">
+      <cs:styleClr val="auto"/>
+    </cs:fillRef>
+    <cs:effectRef idx="0"/>
+    <cs:fontRef idx="minor">
+      <a:schemeClr val="dk1"/>
+    </cs:fontRef>
+    <cs:spPr>
+      <a:solidFill>
+        <a:schemeClr val="phClr"/>
+      </a:solidFill>
+      <a:effectLst>
+        <a:outerShdw blurRad="254000" sx="102000" sy="102000" algn="ctr" rotWithShape="0">
+          <a:prstClr val="black">
+            <a:alpha val="20000"/>
+          </a:prstClr>
+        </a:outerShdw>
+      </a:effectLst>
+    </cs:spPr>
+  </cs:dataPoint3D>
+  <cs:dataPointLine>
+    <cs:lnRef idx="0">
+      <cs:styleClr val="auto"/>
+    </cs:lnRef>
+    <cs:fillRef idx="0"/>
+    <cs:effectRef idx="0"/>
+    <cs:fontRef idx="minor">
+      <a:schemeClr val="dk1"/>
+    </cs:fontRef>
+    <cs:spPr>
+      <a:ln w="31750" cap="rnd">
+        <a:solidFill>
+          <a:schemeClr val="phClr">
+            <a:alpha val="85000"/>
+          </a:schemeClr>
+        </a:solidFill>
+        <a:round/>
+      </a:ln>
+    </cs:spPr>
+  </cs:dataPointLine>
+  <cs:dataPointMarker>
+    <cs:lnRef idx="0"/>
+    <cs:fillRef idx="0">
+      <cs:styleClr val="auto"/>
+    </cs:fillRef>
+    <cs:effectRef idx="0"/>
+    <cs:fontRef idx="minor">
+      <a:schemeClr val="dk1"/>
+    </cs:fontRef>
+    <cs:spPr>
+      <a:solidFill>
+        <a:schemeClr val="phClr">
+          <a:alpha val="85000"/>
+        </a:schemeClr>
+      </a:solidFill>
+    </cs:spPr>
+  </cs:dataPointMarker>
+  <cs:dataPointMarkerLayout symbol="circle" size="6"/>
+  <cs:dataPointWireframe>
+    <cs:lnRef idx="0">
+      <cs:styleClr val="auto"/>
+    </cs:lnRef>
+    <cs:fillRef idx="0"/>
+    <cs:effectRef idx="0"/>
+    <cs:fontRef idx="minor">
+      <a:schemeClr val="dk1"/>
+    </cs:fontRef>
+    <cs:spPr>
+      <a:ln w="9525" cap="rnd">
+        <a:solidFill>
+          <a:schemeClr val="phClr"/>
+        </a:solidFill>
+        <a:round/>
+      </a:ln>
+    </cs:spPr>
+  </cs:dataPointWireframe>
+  <cs:dataTable>
+    <cs:lnRef idx="0"/>
+    <cs:fillRef idx="0"/>
+    <cs:effectRef idx="0"/>
+    <cs:fontRef idx="minor">
+      <a:schemeClr val="dk1">
+        <a:lumMod val="75000"/>
+        <a:lumOff val="25000"/>
+      </a:schemeClr>
+    </cs:fontRef>
+    <cs:spPr>
+      <a:ln w="9525">
+        <a:solidFill>
+          <a:schemeClr val="dk1">
+            <a:lumMod val="35000"/>
+            <a:lumOff val="65000"/>
+          </a:schemeClr>
+        </a:solidFill>
+      </a:ln>
+    </cs:spPr>
+    <cs:defRPr sz="900" kern="1200"/>
+  </cs:dataTable>
+  <cs:downBar>
+    <cs:lnRef idx="0"/>
+    <cs:fillRef idx="0"/>
+    <cs:effectRef idx="0"/>
+    <cs:fontRef idx="minor">
+      <a:schemeClr val="dk1"/>
+    </cs:fontRef>
+    <cs:spPr>
+      <a:solidFill>
+        <a:schemeClr val="dk1">
+          <a:lumMod val="50000"/>
+          <a:lumOff val="50000"/>
+        </a:schemeClr>
+      </a:solidFill>
+      <a:ln w="9525">
+        <a:solidFill>
+          <a:schemeClr val="dk1">
+            <a:lumMod val="65000"/>
+            <a:lumOff val="35000"/>
+          </a:schemeClr>
+        </a:solidFill>
+      </a:ln>
+    </cs:spPr>
+  </cs:downBar>
+  <cs:dropLine>
+    <cs:lnRef idx="0"/>
+    <cs:fillRef idx="0"/>
+    <cs:effectRef idx="0"/>
+    <cs:fontRef idx="minor">
+      <a:schemeClr val="dk1"/>
+    </cs:fontRef>
+    <cs:spPr>
+      <a:ln w="9525">
+        <a:solidFill>
+          <a:schemeClr val="dk1">
+            <a:lumMod val="35000"/>
+            <a:lumOff val="65000"/>
+          </a:schemeClr>
+        </a:solidFill>
+        <a:prstDash val="dash"/>
+      </a:ln>
+    </cs:spPr>
+  </cs:dropLine>
+  <cs:errorBar>
+    <cs:lnRef idx="0"/>
+    <cs:fillRef idx="0"/>
+    <cs:effectRef idx="0"/>
+    <cs:fontRef idx="minor">
+      <a:schemeClr val="dk1"/>
+    </cs:fontRef>
+    <cs:spPr>
+      <a:ln w="9525">
+        <a:solidFill>
+          <a:schemeClr val="dk1">
+            <a:lumMod val="65000"/>
+            <a:lumOff val="35000"/>
+          </a:schemeClr>
+        </a:solidFill>
+        <a:round/>
+      </a:ln>
+    </cs:spPr>
+  </cs:errorBar>
+  <cs:floor>
+    <cs:lnRef idx="0"/>
+    <cs:fillRef idx="0"/>
+    <cs:effectRef idx="0"/>
+    <cs:fontRef idx="minor">
+      <a:schemeClr val="dk1"/>
+    </cs:fontRef>
+  </cs:floor>
+  <cs:gridlineMajor>
+    <cs:lnRef idx="0"/>
+    <cs:fillRef idx="0"/>
+    <cs:effectRef idx="0"/>
+    <cs:fontRef idx="minor">
+      <a:schemeClr val="dk1"/>
+    </cs:fontRef>
+    <cs:spPr>
+      <a:ln w="9525" cap="flat" cmpd="sng" algn="ctr">
+        <a:gradFill>
+          <a:gsLst>
+            <a:gs pos="100000">
+              <a:schemeClr val="dk1">
+                <a:lumMod val="95000"/>
+                <a:lumOff val="5000"/>
+                <a:alpha val="42000"/>
+              </a:schemeClr>
+            </a:gs>
+            <a:gs pos="0">
+              <a:schemeClr val="lt1">
+                <a:lumMod val="75000"/>
+                <a:alpha val="36000"/>
+              </a:schemeClr>
+            </a:gs>
+          </a:gsLst>
+          <a:lin ang="5400000" scaled="0"/>
+        </a:gradFill>
+        <a:round/>
+      </a:ln>
+    </cs:spPr>
+  </cs:gridlineMajor>
+  <cs:gridlineMinor>
+    <cs:lnRef idx="0"/>
+    <cs:fillRef idx="0"/>
+    <cs:effectRef idx="0"/>
+    <cs:fontRef idx="minor">
+      <a:schemeClr val="dk1"/>
+    </cs:fontRef>
+    <cs:spPr>
+      <a:ln>
+        <a:gradFill>
+          <a:gsLst>
+            <a:gs pos="100000">
+              <a:schemeClr val="dk1">
+                <a:lumMod val="95000"/>
+                <a:lumOff val="5000"/>
+                <a:alpha val="42000"/>
+              </a:schemeClr>
+            </a:gs>
+            <a:gs pos="0">
+              <a:schemeClr val="lt1">
+                <a:lumMod val="75000"/>
+                <a:alpha val="36000"/>
+              </a:schemeClr>
+            </a:gs>
+          </a:gsLst>
+          <a:lin ang="5400000" scaled="0"/>
+        </a:gradFill>
+      </a:ln>
+    </cs:spPr>
+  </cs:gridlineMinor>
+  <cs:hiLoLine>
+    <cs:lnRef idx="0"/>
+    <cs:fillRef idx="0"/>
+    <cs:effectRef idx="0"/>
+    <cs:fontRef idx="minor">
+      <a:schemeClr val="dk1"/>
+    </cs:fontRef>
+    <cs:spPr>
+      <a:ln w="9525">
+        <a:solidFill>
+          <a:schemeClr val="dk1">
+            <a:lumMod val="35000"/>
+            <a:lumOff val="65000"/>
+          </a:schemeClr>
+        </a:solidFill>
+        <a:prstDash val="dash"/>
+      </a:ln>
+    </cs:spPr>
+  </cs:hiLoLine>
+  <cs:leaderLine>
+    <cs:lnRef idx="0"/>
+    <cs:fillRef idx="0"/>
+    <cs:effectRef idx="0"/>
+    <cs:fontRef idx="minor">
+      <a:schemeClr val="dk1"/>
+    </cs:fontRef>
+    <cs:spPr>
+      <a:ln w="9525">
+        <a:solidFill>
+          <a:schemeClr val="dk1">
+            <a:lumMod val="50000"/>
+            <a:lumOff val="50000"/>
+          </a:schemeClr>
+        </a:solidFill>
+      </a:ln>
+    </cs:spPr>
+  </cs:leaderLine>
+  <cs:legend>
+    <cs:lnRef idx="0"/>
+    <cs:fillRef idx="0"/>
+    <cs:effectRef idx="0"/>
+    <cs:fontRef idx="minor">
+      <a:schemeClr val="dk1">
+        <a:lumMod val="75000"/>
+        <a:lumOff val="25000"/>
+      </a:schemeClr>
+    </cs:fontRef>
+    <cs:spPr>
+      <a:solidFill>
+        <a:schemeClr val="lt1">
+          <a:lumMod val="95000"/>
+          <a:alpha val="39000"/>
+        </a:schemeClr>
+      </a:solidFill>
+    </cs:spPr>
+    <cs:defRPr sz="900" kern="1200"/>
+  </cs:legend>
+  <cs:plotArea>
+    <cs:lnRef idx="0"/>
+    <cs:fillRef idx="0"/>
+    <cs:effectRef idx="0"/>
+    <cs:fontRef idx="minor">
+      <a:schemeClr val="dk1"/>
+    </cs:fontRef>
+  </cs:plotArea>
+  <cs:plotArea3D>
+    <cs:lnRef idx="0"/>
+    <cs:fillRef idx="0"/>
+    <cs:effectRef idx="0"/>
+    <cs:fontRef idx="minor">
+      <a:schemeClr val="dk1"/>
+    </cs:fontRef>
+  </cs:plotArea3D>
+  <cs:seriesAxis>
+    <cs:lnRef idx="0"/>
+    <cs:fillRef idx="0"/>
+    <cs:effectRef idx="0"/>
+    <cs:fontRef idx="minor">
+      <a:schemeClr val="dk1">
+        <a:lumMod val="75000"/>
+        <a:lumOff val="25000"/>
+      </a:schemeClr>
+    </cs:fontRef>
+    <cs:spPr>
+      <a:ln w="31750" cap="flat" cmpd="sng" algn="ctr">
+        <a:solidFill>
+          <a:schemeClr val="dk1">
+            <a:lumMod val="75000"/>
+            <a:lumOff val="25000"/>
+          </a:schemeClr>
+        </a:solidFill>
+        <a:round/>
+      </a:ln>
+    </cs:spPr>
+    <cs:defRPr sz="900" kern="1200"/>
+  </cs:seriesAxis>
+  <cs:seriesLine>
+    <cs:lnRef idx="0"/>
+    <cs:fillRef idx="0"/>
+    <cs:effectRef idx="0"/>
+    <cs:fontRef idx="minor">
+      <a:schemeClr val="dk1"/>
+    </cs:fontRef>
+    <cs:spPr>
+      <a:ln w="9525">
+        <a:solidFill>
+          <a:schemeClr val="dk1">
+            <a:lumMod val="50000"/>
+            <a:lumOff val="50000"/>
+          </a:schemeClr>
+        </a:solidFill>
+        <a:round/>
+      </a:ln>
+    </cs:spPr>
+  </cs:seriesLine>
+  <cs:title>
+    <cs:lnRef idx="0"/>
+    <cs:fillRef idx="0"/>
+    <cs:effectRef idx="0"/>
+    <cs:fontRef idx="minor">
+      <a:schemeClr val="dk1">
+        <a:lumMod val="75000"/>
+        <a:lumOff val="25000"/>
+      </a:schemeClr>
+    </cs:fontRef>
+    <cs:defRPr sz="1800" b="1" kern="1200" baseline="0"/>
+  </cs:title>
+  <cs:trendline>
+    <cs:lnRef idx="0">
+      <cs:styleClr val="auto"/>
+    </cs:lnRef>
+    <cs:fillRef idx="0"/>
+    <cs:effectRef idx="0"/>
+    <cs:fontRef idx="minor">
+      <a:schemeClr val="dk1"/>
+    </cs:fontRef>
+    <cs:spPr>
+      <a:ln w="19050" cap="rnd">
+        <a:solidFill>
+          <a:schemeClr val="phClr"/>
+        </a:solidFill>
+      </a:ln>
+    </cs:spPr>
+  </cs:trendline>
+  <cs:trendlineLabel>
+    <cs:lnRef idx="0"/>
+    <cs:fillRef idx="0"/>
+    <cs:effectRef idx="0"/>
+    <cs:fontRef idx="minor">
+      <a:schemeClr val="dk1">
+        <a:lumMod val="75000"/>
+        <a:lumOff val="25000"/>
+      </a:schemeClr>
+    </cs:fontRef>
+    <cs:defRPr sz="900" kern="1200"/>
+  </cs:trendlineLabel>
+  <cs:upBar>
+    <cs:lnRef idx="0"/>
+    <cs:fillRef idx="0"/>
+    <cs:effectRef idx="0"/>
+    <cs:fontRef idx="minor">
+      <a:schemeClr val="dk1"/>
+    </cs:fontRef>
+    <cs:spPr>
+      <a:solidFill>
+        <a:schemeClr val="lt1"/>
+      </a:solidFill>
+      <a:ln w="9525">
+        <a:solidFill>
+          <a:schemeClr val="dk1">
+            <a:lumMod val="65000"/>
+            <a:lumOff val="35000"/>
+          </a:schemeClr>
+        </a:solidFill>
+      </a:ln>
+    </cs:spPr>
+  </cs:upBar>
+  <cs:valueAxis>
+    <cs:lnRef idx="0"/>
+    <cs:fillRef idx="0"/>
+    <cs:effectRef idx="0"/>
+    <cs:fontRef idx="minor">
+      <a:schemeClr val="dk1">
+        <a:lumMod val="75000"/>
+        <a:lumOff val="25000"/>
+      </a:schemeClr>
+    </cs:fontRef>
+    <cs:spPr>
+      <a:ln>
+        <a:noFill/>
+      </a:ln>
+    </cs:spPr>
+    <cs:defRPr sz="900" kern="1200"/>
+  </cs:valueAxis>
+  <cs:wall>
+    <cs:lnRef idx="0"/>
+    <cs:fillRef idx="0"/>
+    <cs:effectRef idx="0"/>
+    <cs:fontRef idx="minor">
+      <a:schemeClr val="dk1"/>
+    </cs:fontRef>
+  </cs:wall>
+</cs:chartStyle>
+</file>
+
+<file path=ppt/charts/style3.xml><?xml version="1.0" encoding="utf-8"?>
 <cs:chartStyle xmlns:cs="http://schemas.microsoft.com/office/drawing/2012/chartStyle" xmlns:a="http://schemas.openxmlformats.org/drawingml/2006/main" id="201">
   <cs:axisTitle>
     <cs:lnRef idx="0"/>
@@ -2413,7 +3744,7 @@
 </cs:chartStyle>
 </file>
 
-<file path=ppt/charts/style3.xml><?xml version="1.0" encoding="utf-8"?>
+<file path=ppt/charts/style4.xml><?xml version="1.0" encoding="utf-8"?>
 <cs:chartStyle xmlns:cs="http://schemas.microsoft.com/office/drawing/2012/chartStyle" xmlns:a="http://schemas.openxmlformats.org/drawingml/2006/main" id="201">
   <cs:axisTitle>
     <cs:lnRef idx="0"/>
@@ -5004,7 +6335,7 @@
               </a:lnSpc>
             </a:pPr>
             <a:r>
-              <a:rPr lang="en-US" sz="2000" dirty="0" err="1">
+              <a:rPr lang="zh-CN" altLang="en-US" sz="2000" dirty="0">
                 <a:solidFill>
                   <a:srgbClr val="232323"/>
                 </a:solidFill>
@@ -5466,17 +6797,17 @@
                 <a:latin typeface="宋体" panose="02010600030101010101" pitchFamily="2" charset="-122"/>
                 <a:ea typeface="宋体" panose="02010600030101010101" pitchFamily="2" charset="-122"/>
               </a:rPr>
-              <a:t>、交易型和专注型较为稳定。</a:t>
+              <a:t>、交易型和专注型：投资占比较为稳定。</a:t>
             </a:r>
           </a:p>
         </p:txBody>
       </p:sp>
       <p:pic>
         <p:nvPicPr>
-          <p:cNvPr id="8" name="图片 7">
+          <p:cNvPr id="3" name="图片 2">
             <a:extLst>
               <a:ext uri="{FF2B5EF4-FFF2-40B4-BE49-F238E27FC236}">
-                <a16:creationId xmlns:a16="http://schemas.microsoft.com/office/drawing/2014/main" id="{890BAB9A-4DB2-603A-074C-757096B102E6}"/>
+                <a16:creationId xmlns:a16="http://schemas.microsoft.com/office/drawing/2014/main" id="{7DAF68B2-96F7-E94C-F1C0-1333A1E5E56A}"/>
               </a:ext>
             </a:extLst>
           </p:cNvPr>
@@ -5493,8 +6824,8 @@
         </p:blipFill>
         <p:spPr>
           <a:xfrm>
-            <a:off x="2052918" y="1469004"/>
-            <a:ext cx="7171764" cy="3556631"/>
+            <a:off x="2707341" y="1476804"/>
+            <a:ext cx="6777318" cy="3361017"/>
           </a:xfrm>
           <a:prstGeom prst="rect">
             <a:avLst/>
@@ -5618,139 +6949,6 @@
           </a:prstGeom>
         </p:spPr>
       </p:pic>
-      <p:graphicFrame>
-        <p:nvGraphicFramePr>
-          <p:cNvPr id="16" name="图表 15">
-            <a:extLst>
-              <a:ext uri="{FF2B5EF4-FFF2-40B4-BE49-F238E27FC236}">
-                <a16:creationId xmlns:a16="http://schemas.microsoft.com/office/drawing/2014/main" id="{0D07F7D4-D027-114C-0C8D-044DBAD3DD96}"/>
-              </a:ext>
-            </a:extLst>
-          </p:cNvPr>
-          <p:cNvGraphicFramePr>
-            <a:graphicFrameLocks/>
-          </p:cNvGraphicFramePr>
-          <p:nvPr>
-            <p:extLst>
-              <p:ext uri="{D42A27DB-BD31-4B8C-83A1-F6EECF244321}">
-                <p14:modId xmlns:p14="http://schemas.microsoft.com/office/powerpoint/2010/main" val="1010152314"/>
-              </p:ext>
-            </p:extLst>
-          </p:nvPr>
-        </p:nvGraphicFramePr>
-        <p:xfrm>
-          <a:off x="6096000" y="3410585"/>
-          <a:ext cx="4572000" cy="2743200"/>
-        </p:xfrm>
-        <a:graphic>
-          <a:graphicData uri="http://schemas.openxmlformats.org/drawingml/2006/chart">
-            <c:chart xmlns:c="http://schemas.openxmlformats.org/drawingml/2006/chart" xmlns:r="http://schemas.openxmlformats.org/officeDocument/2006/relationships" r:id="rId4"/>
-          </a:graphicData>
-        </a:graphic>
-      </p:graphicFrame>
-      <p:sp>
-        <p:nvSpPr>
-          <p:cNvPr id="17" name="文本框 16">
-            <a:extLst>
-              <a:ext uri="{FF2B5EF4-FFF2-40B4-BE49-F238E27FC236}">
-                <a16:creationId xmlns:a16="http://schemas.microsoft.com/office/drawing/2014/main" id="{B5B2F039-50EA-ED27-6EFB-DE6E315F8C77}"/>
-              </a:ext>
-            </a:extLst>
-          </p:cNvPr>
-          <p:cNvSpPr txBox="1"/>
-          <p:nvPr/>
-        </p:nvSpPr>
-        <p:spPr>
-          <a:xfrm>
-            <a:off x="853590" y="3915765"/>
-            <a:ext cx="4292152" cy="1908215"/>
-          </a:xfrm>
-          <a:prstGeom prst="rect">
-            <a:avLst/>
-          </a:prstGeom>
-          <a:noFill/>
-        </p:spPr>
-        <p:txBody>
-          <a:bodyPr wrap="square">
-            <a:spAutoFit/>
-          </a:bodyPr>
-          <a:lstStyle/>
-          <a:p>
-            <a:r>
-              <a:rPr lang="en-US" altLang="zh-CN" sz="2000" dirty="0">
-                <a:latin typeface="宋体" panose="02010600030101010101" pitchFamily="2" charset="-122"/>
-                <a:ea typeface="宋体" panose="02010600030101010101" pitchFamily="2" charset="-122"/>
-              </a:rPr>
-              <a:t>Quasi-index </a:t>
-            </a:r>
-            <a:r>
-              <a:rPr lang="zh-CN" altLang="zh-CN" dirty="0">
-                <a:latin typeface="宋体" panose="02010600030101010101" pitchFamily="2" charset="-122"/>
-                <a:ea typeface="宋体" panose="02010600030101010101" pitchFamily="2" charset="-122"/>
-              </a:rPr>
-              <a:t>平均持股占比最高</a:t>
-            </a:r>
-            <a:r>
-              <a:rPr lang="zh-CN" altLang="en-US" dirty="0">
-                <a:latin typeface="宋体" panose="02010600030101010101" pitchFamily="2" charset="-122"/>
-                <a:ea typeface="宋体" panose="02010600030101010101" pitchFamily="2" charset="-122"/>
-              </a:rPr>
-              <a:t>，</a:t>
-            </a:r>
-            <a:r>
-              <a:rPr lang="zh-CN" altLang="zh-CN" dirty="0">
-                <a:latin typeface="宋体" panose="02010600030101010101" pitchFamily="2" charset="-122"/>
-                <a:ea typeface="宋体" panose="02010600030101010101" pitchFamily="2" charset="-122"/>
-              </a:rPr>
-              <a:t>对多数股票均保持一定比例的配置。</a:t>
-            </a:r>
-            <a:endParaRPr lang="en-US" altLang="zh-CN" dirty="0">
-              <a:latin typeface="宋体" panose="02010600030101010101" pitchFamily="2" charset="-122"/>
-              <a:ea typeface="宋体" panose="02010600030101010101" pitchFamily="2" charset="-122"/>
-            </a:endParaRPr>
-          </a:p>
-          <a:p>
-            <a:r>
-              <a:rPr lang="en-US" altLang="zh-CN" sz="2000" dirty="0">
-                <a:latin typeface="宋体" panose="02010600030101010101" pitchFamily="2" charset="-122"/>
-                <a:ea typeface="宋体" panose="02010600030101010101" pitchFamily="2" charset="-122"/>
-              </a:rPr>
-              <a:t>Transient </a:t>
-            </a:r>
-            <a:r>
-              <a:rPr lang="zh-CN" altLang="en-US" sz="2000" dirty="0">
-                <a:latin typeface="宋体" panose="02010600030101010101" pitchFamily="2" charset="-122"/>
-                <a:ea typeface="宋体" panose="02010600030101010101" pitchFamily="2" charset="-122"/>
-              </a:rPr>
-              <a:t>次之；而</a:t>
-            </a:r>
-            <a:r>
-              <a:rPr lang="en-US" altLang="zh-CN" sz="2000" dirty="0">
-                <a:latin typeface="宋体" panose="02010600030101010101" pitchFamily="2" charset="-122"/>
-                <a:ea typeface="宋体" panose="02010600030101010101" pitchFamily="2" charset="-122"/>
-              </a:rPr>
-              <a:t>Dedicated </a:t>
-            </a:r>
-            <a:r>
-              <a:rPr lang="zh-CN" altLang="en-US" sz="2000" dirty="0">
-                <a:latin typeface="宋体" panose="02010600030101010101" pitchFamily="2" charset="-122"/>
-                <a:ea typeface="宋体" panose="02010600030101010101" pitchFamily="2" charset="-122"/>
-              </a:rPr>
-              <a:t>最低，呈现出明显的“高集中、低覆盖”特征。</a:t>
-            </a:r>
-            <a:endParaRPr lang="en-US" altLang="zh-CN" sz="2000" dirty="0">
-              <a:latin typeface="宋体" panose="02010600030101010101" pitchFamily="2" charset="-122"/>
-              <a:ea typeface="宋体" panose="02010600030101010101" pitchFamily="2" charset="-122"/>
-            </a:endParaRPr>
-          </a:p>
-          <a:p>
-            <a:endParaRPr lang="zh-CN" altLang="en-US" sz="2000" dirty="0">
-              <a:latin typeface="宋体" panose="02010600030101010101" pitchFamily="2" charset="-122"/>
-              <a:ea typeface="宋体" panose="02010600030101010101" pitchFamily="2" charset="-122"/>
-            </a:endParaRPr>
-          </a:p>
-        </p:txBody>
-      </p:sp>
       <p:sp>
         <p:nvSpPr>
           <p:cNvPr id="2" name="文本框 1">
@@ -5765,8 +6963,8 @@
         </p:nvSpPr>
         <p:spPr>
           <a:xfrm>
-            <a:off x="1057835" y="2116140"/>
-            <a:ext cx="2761129" cy="646331"/>
+            <a:off x="428943" y="1939355"/>
+            <a:ext cx="3829292" cy="646331"/>
           </a:xfrm>
           <a:prstGeom prst="rect">
             <a:avLst/>
@@ -5781,17 +6979,17 @@
           <a:p>
             <a:r>
               <a:rPr lang="zh-CN" altLang="en-US" dirty="0"/>
-              <a:t>总的来看，平均每只股票被三类基金的持有结构：</a:t>
+              <a:t>总的来看，平均每只股票被三类基金的持有结构如下表所示：</a:t>
             </a:r>
           </a:p>
         </p:txBody>
       </p:sp>
       <p:graphicFrame>
         <p:nvGraphicFramePr>
-          <p:cNvPr id="8" name="表格 7">
+          <p:cNvPr id="3" name="表格 2">
             <a:extLst>
               <a:ext uri="{FF2B5EF4-FFF2-40B4-BE49-F238E27FC236}">
-                <a16:creationId xmlns:a16="http://schemas.microsoft.com/office/drawing/2014/main" id="{F195266B-60E0-2DC4-E009-2863B38157E7}"/>
+                <a16:creationId xmlns:a16="http://schemas.microsoft.com/office/drawing/2014/main" id="{2ACC65F1-09AA-24F6-03CD-1D2A127A97BE}"/>
               </a:ext>
             </a:extLst>
           </p:cNvPr>
@@ -5801,14 +6999,14 @@
           <p:nvPr>
             <p:extLst>
               <p:ext uri="{D42A27DB-BD31-4B8C-83A1-F6EECF244321}">
-                <p14:modId xmlns:p14="http://schemas.microsoft.com/office/powerpoint/2010/main" val="2137520424"/>
+                <p14:modId xmlns:p14="http://schemas.microsoft.com/office/powerpoint/2010/main" val="2800858174"/>
               </p:ext>
             </p:extLst>
           </p:nvPr>
         </p:nvGraphicFramePr>
         <p:xfrm>
-          <a:off x="4347883" y="1676870"/>
-          <a:ext cx="7100046" cy="1300268"/>
+          <a:off x="4258235" y="1518683"/>
+          <a:ext cx="6875929" cy="1423551"/>
         </p:xfrm>
         <a:graphic>
           <a:graphicData uri="http://schemas.openxmlformats.org/drawingml/2006/table">
@@ -5817,43 +7015,43 @@
                 <a:tableStyleId>{5C22544A-7EE6-4342-B048-85BDC9FD1C3A}</a:tableStyleId>
               </a:tblPr>
               <a:tblGrid>
-                <a:gridCol w="1301290">
+                <a:gridCol w="1024295">
                   <a:extLst>
                     <a:ext uri="{9D8B030D-6E8A-4147-A177-3AD203B41FA5}">
-                      <a16:colId xmlns:a16="http://schemas.microsoft.com/office/drawing/2014/main" val="198671809"/>
+                      <a16:colId xmlns:a16="http://schemas.microsoft.com/office/drawing/2014/main" val="4147369901"/>
                     </a:ext>
                   </a:extLst>
                 </a:gridCol>
-                <a:gridCol w="1341793">
+                <a:gridCol w="1535358">
                   <a:extLst>
                     <a:ext uri="{9D8B030D-6E8A-4147-A177-3AD203B41FA5}">
-                      <a16:colId xmlns:a16="http://schemas.microsoft.com/office/drawing/2014/main" val="3021609108"/>
+                      <a16:colId xmlns:a16="http://schemas.microsoft.com/office/drawing/2014/main" val="4064289998"/>
                     </a:ext>
                   </a:extLst>
                 </a:gridCol>
-                <a:gridCol w="1882981">
+                <a:gridCol w="1823543">
                   <a:extLst>
                     <a:ext uri="{9D8B030D-6E8A-4147-A177-3AD203B41FA5}">
-                      <a16:colId xmlns:a16="http://schemas.microsoft.com/office/drawing/2014/main" val="4193822126"/>
+                      <a16:colId xmlns:a16="http://schemas.microsoft.com/office/drawing/2014/main" val="4172579252"/>
                     </a:ext>
                   </a:extLst>
                 </a:gridCol>
-                <a:gridCol w="1779330">
+                <a:gridCol w="1723165">
                   <a:extLst>
                     <a:ext uri="{9D8B030D-6E8A-4147-A177-3AD203B41FA5}">
-                      <a16:colId xmlns:a16="http://schemas.microsoft.com/office/drawing/2014/main" val="1050994404"/>
+                      <a16:colId xmlns:a16="http://schemas.microsoft.com/office/drawing/2014/main" val="4027170687"/>
                     </a:ext>
                   </a:extLst>
                 </a:gridCol>
-                <a:gridCol w="794652">
+                <a:gridCol w="769568">
                   <a:extLst>
                     <a:ext uri="{9D8B030D-6E8A-4147-A177-3AD203B41FA5}">
-                      <a16:colId xmlns:a16="http://schemas.microsoft.com/office/drawing/2014/main" val="1584139975"/>
+                      <a16:colId xmlns:a16="http://schemas.microsoft.com/office/drawing/2014/main" val="2475131576"/>
                     </a:ext>
                   </a:extLst>
                 </a:gridCol>
               </a:tblGrid>
-              <a:tr h="439270">
+              <a:tr h="474517">
                 <a:tc>
                   <a:txBody>
                     <a:bodyPr/>
@@ -5863,7 +7061,7 @@
                         <a:buNone/>
                       </a:pPr>
                       <a:r>
-                        <a:rPr lang="en-US" sz="1600" b="1" u="none" strike="noStrike" dirty="0">
+                        <a:rPr lang="en-US" sz="1600" u="none" strike="noStrike" dirty="0">
                           <a:effectLst/>
                         </a:rPr>
                         <a:t>Year</a:t>
@@ -5878,7 +7076,13 @@
                       </a:endParaRPr>
                     </a:p>
                   </a:txBody>
-                  <a:tcPr marL="7620" marR="7620" marT="7620" marB="0"/>
+                  <a:tcPr marL="7620" marR="7620" marT="7620" marB="0">
+                    <a:solidFill>
+                      <a:schemeClr val="accent5">
+                        <a:lumMod val="75000"/>
+                      </a:schemeClr>
+                    </a:solidFill>
+                  </a:tcPr>
                 </a:tc>
                 <a:tc>
                   <a:txBody>
@@ -5889,7 +7093,7 @@
                         <a:buNone/>
                       </a:pPr>
                       <a:r>
-                        <a:rPr lang="en-US" sz="1600" b="1" u="none" strike="noStrike" dirty="0">
+                        <a:rPr lang="en-US" sz="1600" u="none" strike="noStrike" dirty="0">
                           <a:effectLst/>
                         </a:rPr>
                         <a:t>Dedicated</a:t>
@@ -5904,7 +7108,13 @@
                       </a:endParaRPr>
                     </a:p>
                   </a:txBody>
-                  <a:tcPr marL="7620" marR="7620" marT="7620" marB="0"/>
+                  <a:tcPr marL="7620" marR="7620" marT="7620" marB="0">
+                    <a:solidFill>
+                      <a:schemeClr val="accent5">
+                        <a:lumMod val="75000"/>
+                      </a:schemeClr>
+                    </a:solidFill>
+                  </a:tcPr>
                 </a:tc>
                 <a:tc>
                   <a:txBody>
@@ -5915,7 +7125,7 @@
                         <a:buNone/>
                       </a:pPr>
                       <a:r>
-                        <a:rPr lang="en-US" sz="1600" b="1" u="none" strike="noStrike">
+                        <a:rPr lang="en-US" sz="1600" u="none" strike="noStrike" dirty="0">
                           <a:effectLst/>
                         </a:rPr>
                         <a:t>Quasi-Index</a:t>
@@ -5930,7 +7140,13 @@
                       </a:endParaRPr>
                     </a:p>
                   </a:txBody>
-                  <a:tcPr marL="7620" marR="7620" marT="7620" marB="0"/>
+                  <a:tcPr marL="7620" marR="7620" marT="7620" marB="0">
+                    <a:solidFill>
+                      <a:schemeClr val="accent5">
+                        <a:lumMod val="75000"/>
+                      </a:schemeClr>
+                    </a:solidFill>
+                  </a:tcPr>
                 </a:tc>
                 <a:tc>
                   <a:txBody>
@@ -5941,7 +7157,7 @@
                         <a:buNone/>
                       </a:pPr>
                       <a:r>
-                        <a:rPr lang="en-US" sz="1600" b="1" u="none" strike="noStrike">
+                        <a:rPr lang="en-US" sz="1600" u="none" strike="noStrike" dirty="0">
                           <a:effectLst/>
                         </a:rPr>
                         <a:t>Transient</a:t>
@@ -5956,7 +7172,13 @@
                       </a:endParaRPr>
                     </a:p>
                   </a:txBody>
-                  <a:tcPr marL="7620" marR="7620" marT="7620" marB="0"/>
+                  <a:tcPr marL="7620" marR="7620" marT="7620" marB="0">
+                    <a:solidFill>
+                      <a:schemeClr val="accent5">
+                        <a:lumMod val="75000"/>
+                      </a:schemeClr>
+                    </a:solidFill>
+                  </a:tcPr>
                 </a:tc>
                 <a:tc>
                   <a:txBody>
@@ -5967,7 +7189,7 @@
                         <a:buNone/>
                       </a:pPr>
                       <a:r>
-                        <a:rPr lang="en-US" sz="1600" b="1" u="none" strike="noStrike">
+                        <a:rPr lang="en-US" sz="1600" u="none" strike="noStrike" dirty="0">
                           <a:effectLst/>
                         </a:rPr>
                         <a:t>Total</a:t>
@@ -5982,15 +7204,21 @@
                       </a:endParaRPr>
                     </a:p>
                   </a:txBody>
-                  <a:tcPr marL="7620" marR="7620" marT="7620" marB="0"/>
+                  <a:tcPr marL="7620" marR="7620" marT="7620" marB="0">
+                    <a:solidFill>
+                      <a:schemeClr val="accent5">
+                        <a:lumMod val="75000"/>
+                      </a:schemeClr>
+                    </a:solidFill>
+                  </a:tcPr>
                 </a:tc>
                 <a:extLst>
                   <a:ext uri="{0D108BD9-81ED-4DB2-BD59-A6C34878D82A}">
-                    <a16:rowId xmlns:a16="http://schemas.microsoft.com/office/drawing/2014/main" val="1895694085"/>
+                    <a16:rowId xmlns:a16="http://schemas.microsoft.com/office/drawing/2014/main" val="544962356"/>
                   </a:ext>
                 </a:extLst>
               </a:tr>
-              <a:tr h="430499">
+              <a:tr h="474517">
                 <a:tc>
                   <a:txBody>
                     <a:bodyPr/>
@@ -6000,12 +7228,12 @@
                         <a:buNone/>
                       </a:pPr>
                       <a:r>
-                        <a:rPr lang="en-US" altLang="zh-CN" sz="1600" b="1" u="none" strike="noStrike">
+                        <a:rPr lang="en-US" altLang="zh-CN" sz="1600" u="none" strike="noStrike">
                           <a:effectLst/>
                         </a:rPr>
                         <a:t>2023-2025</a:t>
                       </a:r>
-                      <a:endParaRPr lang="en-US" altLang="zh-CN" sz="1600" b="1" i="0" u="none" strike="noStrike" dirty="0">
+                      <a:endParaRPr lang="en-US" altLang="zh-CN" sz="1600" b="0" i="0" u="none" strike="noStrike">
                         <a:solidFill>
                           <a:srgbClr val="000000"/>
                         </a:solidFill>
@@ -6026,12 +7254,12 @@
                         <a:buNone/>
                       </a:pPr>
                       <a:r>
-                        <a:rPr lang="en-US" altLang="zh-CN" sz="1400" u="none" strike="noStrike" dirty="0">
+                        <a:rPr lang="en-US" altLang="zh-CN" sz="1600" u="none" strike="noStrike" dirty="0">
                           <a:effectLst/>
                         </a:rPr>
-                        <a:t>0.079%</a:t>
+                        <a:t>0.0807%</a:t>
                       </a:r>
-                      <a:endParaRPr lang="en-US" altLang="zh-CN" sz="1400" b="0" i="0" u="none" strike="noStrike" dirty="0">
+                      <a:endParaRPr lang="en-US" altLang="zh-CN" sz="1600" b="0" i="0" u="none" strike="noStrike" dirty="0">
                         <a:solidFill>
                           <a:srgbClr val="000000"/>
                         </a:solidFill>
@@ -6052,12 +7280,12 @@
                         <a:buNone/>
                       </a:pPr>
                       <a:r>
-                        <a:rPr lang="en-US" altLang="zh-CN" sz="1400" u="none" strike="noStrike">
+                        <a:rPr lang="en-US" altLang="zh-CN" sz="1600" u="none" strike="noStrike">
                           <a:effectLst/>
                         </a:rPr>
-                        <a:t>1.753%</a:t>
+                        <a:t>1.2361%</a:t>
                       </a:r>
-                      <a:endParaRPr lang="en-US" altLang="zh-CN" sz="1400" b="0" i="0" u="none" strike="noStrike" dirty="0">
+                      <a:endParaRPr lang="en-US" altLang="zh-CN" sz="1600" b="0" i="0" u="none" strike="noStrike">
                         <a:solidFill>
                           <a:srgbClr val="000000"/>
                         </a:solidFill>
@@ -6078,12 +7306,12 @@
                         <a:buNone/>
                       </a:pPr>
                       <a:r>
-                        <a:rPr lang="en-US" altLang="zh-CN" sz="1400" u="none" strike="noStrike">
+                        <a:rPr lang="en-US" altLang="zh-CN" sz="1600" u="none" strike="noStrike">
                           <a:effectLst/>
                         </a:rPr>
-                        <a:t>0.625%</a:t>
+                        <a:t>0.3882%</a:t>
                       </a:r>
-                      <a:endParaRPr lang="en-US" altLang="zh-CN" sz="1400" b="0" i="0" u="none" strike="noStrike">
+                      <a:endParaRPr lang="en-US" altLang="zh-CN" sz="1600" b="0" i="0" u="none" strike="noStrike">
                         <a:solidFill>
                           <a:srgbClr val="000000"/>
                         </a:solidFill>
@@ -6104,12 +7332,12 @@
                         <a:buNone/>
                       </a:pPr>
                       <a:r>
-                        <a:rPr lang="en-US" altLang="zh-CN" sz="1400" u="none" strike="noStrike">
+                        <a:rPr lang="en-US" altLang="zh-CN" sz="1600" u="none" strike="noStrike">
                           <a:effectLst/>
                         </a:rPr>
-                        <a:t>2.457%</a:t>
+                        <a:t>1.705%</a:t>
                       </a:r>
-                      <a:endParaRPr lang="en-US" altLang="zh-CN" sz="1400" b="0" i="0" u="none" strike="noStrike">
+                      <a:endParaRPr lang="en-US" altLang="zh-CN" sz="1600" b="0" i="0" u="none" strike="noStrike">
                         <a:solidFill>
                           <a:srgbClr val="000000"/>
                         </a:solidFill>
@@ -6123,11 +7351,11 @@
                 </a:tc>
                 <a:extLst>
                   <a:ext uri="{0D108BD9-81ED-4DB2-BD59-A6C34878D82A}">
-                    <a16:rowId xmlns:a16="http://schemas.microsoft.com/office/drawing/2014/main" val="348522597"/>
+                    <a16:rowId xmlns:a16="http://schemas.microsoft.com/office/drawing/2014/main" val="2705413454"/>
                   </a:ext>
                 </a:extLst>
               </a:tr>
-              <a:tr h="430499">
+              <a:tr h="474517">
                 <a:tc>
                   <a:txBody>
                     <a:bodyPr/>
@@ -6137,12 +7365,12 @@
                         <a:buNone/>
                       </a:pPr>
                       <a:r>
-                        <a:rPr lang="en-US" altLang="zh-CN" sz="1600" b="1" u="none" strike="noStrike">
+                        <a:rPr lang="en-US" altLang="zh-CN" sz="1600" u="none" strike="noStrike">
                           <a:effectLst/>
                         </a:rPr>
                         <a:t>2021-2025</a:t>
                       </a:r>
-                      <a:endParaRPr lang="en-US" altLang="zh-CN" sz="1600" b="1" i="0" u="none" strike="noStrike" dirty="0">
+                      <a:endParaRPr lang="en-US" altLang="zh-CN" sz="1600" b="0" i="0" u="none" strike="noStrike">
                         <a:solidFill>
                           <a:srgbClr val="000000"/>
                         </a:solidFill>
@@ -6163,12 +7391,12 @@
                         <a:buNone/>
                       </a:pPr>
                       <a:r>
-                        <a:rPr lang="en-US" altLang="zh-CN" sz="1400" u="none" strike="noStrike" dirty="0">
+                        <a:rPr lang="en-US" altLang="zh-CN" sz="1600" u="none" strike="noStrike" dirty="0">
                           <a:effectLst/>
                         </a:rPr>
-                        <a:t>0.0794%</a:t>
+                        <a:t>0.0757%</a:t>
                       </a:r>
-                      <a:endParaRPr lang="en-US" altLang="zh-CN" sz="1400" b="0" i="0" u="none" strike="noStrike" dirty="0">
+                      <a:endParaRPr lang="en-US" altLang="zh-CN" sz="1600" b="0" i="0" u="none" strike="noStrike" dirty="0">
                         <a:solidFill>
                           <a:srgbClr val="000000"/>
                         </a:solidFill>
@@ -6189,12 +7417,12 @@
                         <a:buNone/>
                       </a:pPr>
                       <a:r>
-                        <a:rPr lang="en-US" altLang="zh-CN" sz="1400" u="none" strike="noStrike" dirty="0">
+                        <a:rPr lang="en-US" altLang="zh-CN" sz="1600" u="none" strike="noStrike">
                           <a:effectLst/>
                         </a:rPr>
-                        <a:t>1.8165%</a:t>
+                        <a:t>0.9939%</a:t>
                       </a:r>
-                      <a:endParaRPr lang="en-US" altLang="zh-CN" sz="1400" b="0" i="0" u="none" strike="noStrike" dirty="0">
+                      <a:endParaRPr lang="en-US" altLang="zh-CN" sz="1600" b="0" i="0" u="none" strike="noStrike">
                         <a:solidFill>
                           <a:srgbClr val="000000"/>
                         </a:solidFill>
@@ -6215,12 +7443,12 @@
                         <a:buNone/>
                       </a:pPr>
                       <a:r>
-                        <a:rPr lang="en-US" altLang="zh-CN" sz="1400" u="none" strike="noStrike" dirty="0">
+                        <a:rPr lang="en-US" altLang="zh-CN" sz="1600" u="none" strike="noStrike">
                           <a:effectLst/>
                         </a:rPr>
-                        <a:t>0.7474%</a:t>
+                        <a:t>0.5590%</a:t>
                       </a:r>
-                      <a:endParaRPr lang="en-US" altLang="zh-CN" sz="1400" b="0" i="0" u="none" strike="noStrike" dirty="0">
+                      <a:endParaRPr lang="en-US" altLang="zh-CN" sz="1600" b="0" i="0" u="none" strike="noStrike">
                         <a:solidFill>
                           <a:srgbClr val="000000"/>
                         </a:solidFill>
@@ -6241,12 +7469,12 @@
                         <a:buNone/>
                       </a:pPr>
                       <a:r>
-                        <a:rPr lang="en-US" altLang="zh-CN" sz="1400" u="none" strike="noStrike" dirty="0">
+                        <a:rPr lang="en-US" altLang="zh-CN" sz="1600" u="none" strike="noStrike" dirty="0">
                           <a:effectLst/>
                         </a:rPr>
-                        <a:t>2.643%</a:t>
+                        <a:t>1.629%</a:t>
                       </a:r>
-                      <a:endParaRPr lang="en-US" altLang="zh-CN" sz="1400" b="0" i="0" u="none" strike="noStrike" dirty="0">
+                      <a:endParaRPr lang="en-US" altLang="zh-CN" sz="1600" b="0" i="0" u="none" strike="noStrike" dirty="0">
                         <a:solidFill>
                           <a:srgbClr val="000000"/>
                         </a:solidFill>
@@ -6260,7 +7488,7 @@
                 </a:tc>
                 <a:extLst>
                   <a:ext uri="{0D108BD9-81ED-4DB2-BD59-A6C34878D82A}">
-                    <a16:rowId xmlns:a16="http://schemas.microsoft.com/office/drawing/2014/main" val="120891426"/>
+                    <a16:rowId xmlns:a16="http://schemas.microsoft.com/office/drawing/2014/main" val="3072325110"/>
                   </a:ext>
                 </a:extLst>
               </a:tr>
@@ -6268,6 +7496,311 @@
           </a:graphicData>
         </a:graphic>
       </p:graphicFrame>
+      <p:graphicFrame>
+        <p:nvGraphicFramePr>
+          <p:cNvPr id="6" name="图表 5">
+            <a:extLst>
+              <a:ext uri="{FF2B5EF4-FFF2-40B4-BE49-F238E27FC236}">
+                <a16:creationId xmlns:a16="http://schemas.microsoft.com/office/drawing/2014/main" id="{0D07F7D4-D027-114C-0C8D-044DBAD3DD96}"/>
+              </a:ext>
+            </a:extLst>
+          </p:cNvPr>
+          <p:cNvGraphicFramePr>
+            <a:graphicFrameLocks/>
+          </p:cNvGraphicFramePr>
+          <p:nvPr>
+            <p:extLst>
+              <p:ext uri="{D42A27DB-BD31-4B8C-83A1-F6EECF244321}">
+                <p14:modId xmlns:p14="http://schemas.microsoft.com/office/powerpoint/2010/main" val="3784342500"/>
+              </p:ext>
+            </p:extLst>
+          </p:nvPr>
+        </p:nvGraphicFramePr>
+        <p:xfrm>
+          <a:off x="6705450" y="3525315"/>
+          <a:ext cx="4632960" cy="2743200"/>
+        </p:xfrm>
+        <a:graphic>
+          <a:graphicData uri="http://schemas.openxmlformats.org/drawingml/2006/chart">
+            <c:chart xmlns:c="http://schemas.openxmlformats.org/drawingml/2006/chart" xmlns:r="http://schemas.openxmlformats.org/officeDocument/2006/relationships" r:id="rId4"/>
+          </a:graphicData>
+        </a:graphic>
+      </p:graphicFrame>
+      <p:sp>
+        <p:nvSpPr>
+          <p:cNvPr id="7" name="AutoShape 6">
+            <a:extLst>
+              <a:ext uri="{FF2B5EF4-FFF2-40B4-BE49-F238E27FC236}">
+                <a16:creationId xmlns:a16="http://schemas.microsoft.com/office/drawing/2014/main" id="{7DE193C4-AB98-8D90-6075-96C26CAD8FE8}"/>
+              </a:ext>
+            </a:extLst>
+          </p:cNvPr>
+          <p:cNvSpPr/>
+          <p:nvPr/>
+        </p:nvSpPr>
+        <p:spPr>
+          <a:xfrm>
+            <a:off x="428943" y="3742869"/>
+            <a:ext cx="5951876" cy="2410916"/>
+          </a:xfrm>
+          <a:prstGeom prst="roundRect">
+            <a:avLst>
+              <a:gd name="adj" fmla="val 8333"/>
+            </a:avLst>
+          </a:prstGeom>
+          <a:solidFill>
+            <a:srgbClr val="F5F5F5">
+              <a:alpha val="100000"/>
+            </a:srgbClr>
+          </a:solidFill>
+          <a:ln w="12700" cap="flat" cmpd="sng">
+            <a:solidFill>
+              <a:srgbClr val="DCDCDC">
+                <a:alpha val="100000"/>
+              </a:srgbClr>
+            </a:solidFill>
+            <a:prstDash val="solid"/>
+            <a:round/>
+          </a:ln>
+        </p:spPr>
+        <p:txBody>
+          <a:bodyPr vert="horz" wrap="square" lIns="63500" tIns="63500" rIns="63500" bIns="63500" rtlCol="0" anchor="ctr"/>
+          <a:lstStyle/>
+          <a:p>
+            <a:pPr algn="ctr">
+              <a:defRPr/>
+            </a:pPr>
+            <a:endParaRPr/>
+          </a:p>
+        </p:txBody>
+      </p:sp>
+      <p:sp>
+        <p:nvSpPr>
+          <p:cNvPr id="8" name="AutoShape 7">
+            <a:extLst>
+              <a:ext uri="{FF2B5EF4-FFF2-40B4-BE49-F238E27FC236}">
+                <a16:creationId xmlns:a16="http://schemas.microsoft.com/office/drawing/2014/main" id="{8F80D3B5-2EAB-C55A-3938-0DE28F26A1DB}"/>
+              </a:ext>
+            </a:extLst>
+          </p:cNvPr>
+          <p:cNvSpPr/>
+          <p:nvPr/>
+        </p:nvSpPr>
+        <p:spPr>
+          <a:xfrm>
+            <a:off x="646694" y="4489520"/>
+            <a:ext cx="5734125" cy="1345097"/>
+          </a:xfrm>
+          <a:prstGeom prst="rect">
+            <a:avLst/>
+          </a:prstGeom>
+          <a:noFill/>
+          <a:ln w="12700" cap="flat" cmpd="sng">
+            <a:noFill/>
+            <a:prstDash val="solid"/>
+            <a:round/>
+          </a:ln>
+        </p:spPr>
+        <p:txBody>
+          <a:bodyPr vert="horz" wrap="square" lIns="127000" tIns="101600" rIns="127000" bIns="101600" rtlCol="0" anchor="ctr" anchorCtr="0"/>
+          <a:lstStyle/>
+          <a:p>
+            <a:pPr>
+              <a:lnSpc>
+                <a:spcPct val="116666"/>
+              </a:lnSpc>
+            </a:pPr>
+            <a:r>
+              <a:rPr lang="zh-CN" altLang="en-US" sz="1300" dirty="0">
+                <a:solidFill>
+                  <a:srgbClr val="505050"/>
+                </a:solidFill>
+                <a:latin typeface="Noto Sans SC"/>
+                <a:ea typeface="Noto Sans SC"/>
+                <a:cs typeface="Noto Sans SC"/>
+                <a:sym typeface="Noto Sans SC"/>
+              </a:rPr>
+              <a:t>数据表明：</a:t>
+            </a:r>
+            <a:r>
+              <a:rPr lang="en-US" sz="1300" b="1" dirty="0">
+                <a:solidFill>
+                  <a:srgbClr val="AA744A"/>
+                </a:solidFill>
+                <a:latin typeface="Noto Sans SC"/>
+                <a:ea typeface="Noto Sans SC"/>
+                <a:sym typeface="Noto Sans SC"/>
+              </a:rPr>
+              <a:t>Quasi-index</a:t>
+            </a:r>
+            <a:r>
+              <a:rPr lang="zh-CN" altLang="en-US" sz="1300" b="1" dirty="0">
+                <a:solidFill>
+                  <a:srgbClr val="AA744A"/>
+                </a:solidFill>
+                <a:latin typeface="Noto Sans SC"/>
+                <a:ea typeface="Noto Sans SC"/>
+                <a:sym typeface="Noto Sans SC"/>
+              </a:rPr>
+              <a:t>（准指数型）</a:t>
+            </a:r>
+            <a:r>
+              <a:rPr lang="en-US" sz="1300" b="1" dirty="0">
+                <a:solidFill>
+                  <a:srgbClr val="AA744A"/>
+                </a:solidFill>
+                <a:latin typeface="Noto Sans SC"/>
+                <a:ea typeface="Noto Sans SC"/>
+                <a:sym typeface="Noto Sans SC"/>
+              </a:rPr>
+              <a:t> </a:t>
+            </a:r>
+            <a:r>
+              <a:rPr lang="zh-CN" altLang="en-US" sz="1300" b="0" i="0" u="none" strike="noStrike" dirty="0">
+                <a:solidFill>
+                  <a:srgbClr val="505050"/>
+                </a:solidFill>
+                <a:latin typeface="Noto Sans SC"/>
+                <a:ea typeface="Noto Sans SC"/>
+                <a:cs typeface="Noto Sans SC"/>
+                <a:sym typeface="Noto Sans SC"/>
+              </a:rPr>
+              <a:t>基金的平均持股占比最高，对多数股票均保持一定比例的配置。</a:t>
+            </a:r>
+          </a:p>
+          <a:p>
+            <a:pPr indent="0" algn="l">
+              <a:lnSpc>
+                <a:spcPct val="116666"/>
+              </a:lnSpc>
+            </a:pPr>
+            <a:r>
+              <a:rPr lang="en-US" sz="1300" b="1" dirty="0">
+                <a:solidFill>
+                  <a:srgbClr val="AA744A"/>
+                </a:solidFill>
+                <a:latin typeface="Noto Sans SC"/>
+                <a:ea typeface="Noto Sans SC"/>
+                <a:sym typeface="Noto Sans SC"/>
+              </a:rPr>
+              <a:t>Transient</a:t>
+            </a:r>
+            <a:r>
+              <a:rPr lang="zh-CN" altLang="en-US" sz="1300" b="1" dirty="0">
+                <a:solidFill>
+                  <a:srgbClr val="AA744A"/>
+                </a:solidFill>
+                <a:latin typeface="Noto Sans SC"/>
+                <a:ea typeface="Noto Sans SC"/>
+                <a:sym typeface="Noto Sans SC"/>
+              </a:rPr>
+              <a:t>（交易型）</a:t>
+            </a:r>
+            <a:r>
+              <a:rPr lang="en-US" sz="1300" b="0" i="0" u="none" strike="noStrike" dirty="0">
+                <a:solidFill>
+                  <a:srgbClr val="505050"/>
+                </a:solidFill>
+                <a:latin typeface="Noto Sans SC"/>
+                <a:ea typeface="Noto Sans SC"/>
+                <a:cs typeface="Noto Sans SC"/>
+                <a:sym typeface="Noto Sans SC"/>
+              </a:rPr>
+              <a:t> </a:t>
+            </a:r>
+            <a:r>
+              <a:rPr lang="zh-CN" altLang="en-US" sz="1300" b="0" i="0" u="none" strike="noStrike" dirty="0">
+                <a:solidFill>
+                  <a:srgbClr val="505050"/>
+                </a:solidFill>
+                <a:latin typeface="Noto Sans SC"/>
+                <a:ea typeface="Noto Sans SC"/>
+                <a:cs typeface="Noto Sans SC"/>
+                <a:sym typeface="Noto Sans SC"/>
+              </a:rPr>
+              <a:t>次之；而</a:t>
+            </a:r>
+            <a:r>
+              <a:rPr lang="en-US" sz="1300" b="1" dirty="0">
+                <a:solidFill>
+                  <a:srgbClr val="AA744A"/>
+                </a:solidFill>
+                <a:latin typeface="Noto Sans SC"/>
+                <a:ea typeface="Noto Sans SC"/>
+                <a:sym typeface="Noto Sans SC"/>
+              </a:rPr>
+              <a:t>Dedicated</a:t>
+            </a:r>
+            <a:r>
+              <a:rPr lang="zh-CN" altLang="en-US" sz="1300" b="1" dirty="0">
+                <a:solidFill>
+                  <a:srgbClr val="AA744A"/>
+                </a:solidFill>
+                <a:latin typeface="Noto Sans SC"/>
+                <a:ea typeface="Noto Sans SC"/>
+                <a:sym typeface="Noto Sans SC"/>
+              </a:rPr>
+              <a:t>（专注型）</a:t>
+            </a:r>
+            <a:r>
+              <a:rPr lang="en-US" sz="1300" b="0" i="0" u="none" strike="noStrike" dirty="0">
+                <a:solidFill>
+                  <a:srgbClr val="505050"/>
+                </a:solidFill>
+                <a:latin typeface="Noto Sans SC"/>
+                <a:ea typeface="Noto Sans SC"/>
+                <a:cs typeface="Noto Sans SC"/>
+                <a:sym typeface="Noto Sans SC"/>
+              </a:rPr>
+              <a:t> </a:t>
+            </a:r>
+            <a:r>
+              <a:rPr lang="zh-CN" altLang="en-US" sz="1300" b="0" i="0" u="none" strike="noStrike" dirty="0">
+                <a:solidFill>
+                  <a:srgbClr val="505050"/>
+                </a:solidFill>
+                <a:latin typeface="Noto Sans SC"/>
+                <a:ea typeface="Noto Sans SC"/>
+                <a:cs typeface="Noto Sans SC"/>
+                <a:sym typeface="Noto Sans SC"/>
+              </a:rPr>
+              <a:t>最低，呈现出明显的“高集中、低覆盖”特征。</a:t>
+            </a:r>
+          </a:p>
+          <a:p>
+            <a:pPr indent="0" algn="l">
+              <a:lnSpc>
+                <a:spcPct val="116666"/>
+              </a:lnSpc>
+            </a:pPr>
+            <a:endParaRPr lang="zh-CN" altLang="en-US" sz="1300" b="0" i="0" u="none" strike="noStrike" dirty="0">
+              <a:solidFill>
+                <a:srgbClr val="505050"/>
+              </a:solidFill>
+              <a:latin typeface="Noto Sans SC"/>
+              <a:ea typeface="Noto Sans SC"/>
+              <a:cs typeface="Noto Sans SC"/>
+              <a:sym typeface="Noto Sans SC"/>
+            </a:endParaRPr>
+          </a:p>
+          <a:p>
+            <a:pPr indent="0" algn="l">
+              <a:lnSpc>
+                <a:spcPct val="116666"/>
+              </a:lnSpc>
+            </a:pPr>
+            <a:endParaRPr lang="en-US" sz="1300" b="0" i="0" u="none" strike="noStrike" dirty="0">
+              <a:solidFill>
+                <a:srgbClr val="505050"/>
+              </a:solidFill>
+              <a:latin typeface="Noto Sans SC"/>
+              <a:ea typeface="Noto Sans SC"/>
+              <a:cs typeface="Noto Sans SC"/>
+              <a:sym typeface="Noto Sans SC"/>
+            </a:endParaRPr>
+          </a:p>
+        </p:txBody>
+      </p:sp>
     </p:spTree>
     <p:extLst>
       <p:ext uri="{BB962C8B-B14F-4D97-AF65-F5344CB8AC3E}">
@@ -6691,10 +8224,40 @@
       </p:sp>
       <p:graphicFrame>
         <p:nvGraphicFramePr>
-          <p:cNvPr id="10" name="表格 9">
+          <p:cNvPr id="9" name="图表 8">
             <a:extLst>
               <a:ext uri="{FF2B5EF4-FFF2-40B4-BE49-F238E27FC236}">
-                <a16:creationId xmlns:a16="http://schemas.microsoft.com/office/drawing/2014/main" id="{81419149-8BB0-1392-A605-A4A0C53C444A}"/>
+                <a16:creationId xmlns:a16="http://schemas.microsoft.com/office/drawing/2014/main" id="{6138E9A8-4596-4E6F-BA44-88FE9C217150}"/>
+              </a:ext>
+            </a:extLst>
+          </p:cNvPr>
+          <p:cNvGraphicFramePr>
+            <a:graphicFrameLocks/>
+          </p:cNvGraphicFramePr>
+          <p:nvPr>
+            <p:extLst>
+              <p:ext uri="{D42A27DB-BD31-4B8C-83A1-F6EECF244321}">
+                <p14:modId xmlns:p14="http://schemas.microsoft.com/office/powerpoint/2010/main" val="150812472"/>
+              </p:ext>
+            </p:extLst>
+          </p:nvPr>
+        </p:nvGraphicFramePr>
+        <p:xfrm>
+          <a:off x="6289781" y="3429000"/>
+          <a:ext cx="4632960" cy="2743200"/>
+        </p:xfrm>
+        <a:graphic>
+          <a:graphicData uri="http://schemas.openxmlformats.org/drawingml/2006/chart">
+            <c:chart xmlns:c="http://schemas.openxmlformats.org/drawingml/2006/chart" xmlns:r="http://schemas.openxmlformats.org/officeDocument/2006/relationships" r:id="rId4"/>
+          </a:graphicData>
+        </a:graphic>
+      </p:graphicFrame>
+      <p:graphicFrame>
+        <p:nvGraphicFramePr>
+          <p:cNvPr id="14" name="表格 13">
+            <a:extLst>
+              <a:ext uri="{FF2B5EF4-FFF2-40B4-BE49-F238E27FC236}">
+                <a16:creationId xmlns:a16="http://schemas.microsoft.com/office/drawing/2014/main" id="{EF77C719-9711-00C3-4C3D-048CBE92ADBA}"/>
               </a:ext>
             </a:extLst>
           </p:cNvPr>
@@ -6704,14 +8267,14 @@
           <p:nvPr>
             <p:extLst>
               <p:ext uri="{D42A27DB-BD31-4B8C-83A1-F6EECF244321}">
-                <p14:modId xmlns:p14="http://schemas.microsoft.com/office/powerpoint/2010/main" val="1748155391"/>
+                <p14:modId xmlns:p14="http://schemas.microsoft.com/office/powerpoint/2010/main" val="3321287883"/>
               </p:ext>
             </p:extLst>
           </p:nvPr>
         </p:nvGraphicFramePr>
         <p:xfrm>
-          <a:off x="2653702" y="1594427"/>
-          <a:ext cx="7100046" cy="1300268"/>
+          <a:off x="2851816" y="1503101"/>
+          <a:ext cx="6875929" cy="1423551"/>
         </p:xfrm>
         <a:graphic>
           <a:graphicData uri="http://schemas.openxmlformats.org/drawingml/2006/table">
@@ -6720,43 +8283,43 @@
                 <a:tableStyleId>{5C22544A-7EE6-4342-B048-85BDC9FD1C3A}</a:tableStyleId>
               </a:tblPr>
               <a:tblGrid>
-                <a:gridCol w="1301290">
+                <a:gridCol w="1024295">
                   <a:extLst>
                     <a:ext uri="{9D8B030D-6E8A-4147-A177-3AD203B41FA5}">
-                      <a16:colId xmlns:a16="http://schemas.microsoft.com/office/drawing/2014/main" val="198671809"/>
+                      <a16:colId xmlns:a16="http://schemas.microsoft.com/office/drawing/2014/main" val="4147369901"/>
                     </a:ext>
                   </a:extLst>
                 </a:gridCol>
-                <a:gridCol w="1341793">
+                <a:gridCol w="1535358">
                   <a:extLst>
                     <a:ext uri="{9D8B030D-6E8A-4147-A177-3AD203B41FA5}">
-                      <a16:colId xmlns:a16="http://schemas.microsoft.com/office/drawing/2014/main" val="3021609108"/>
+                      <a16:colId xmlns:a16="http://schemas.microsoft.com/office/drawing/2014/main" val="4064289998"/>
                     </a:ext>
                   </a:extLst>
                 </a:gridCol>
-                <a:gridCol w="1882981">
+                <a:gridCol w="1823543">
                   <a:extLst>
                     <a:ext uri="{9D8B030D-6E8A-4147-A177-3AD203B41FA5}">
-                      <a16:colId xmlns:a16="http://schemas.microsoft.com/office/drawing/2014/main" val="4193822126"/>
+                      <a16:colId xmlns:a16="http://schemas.microsoft.com/office/drawing/2014/main" val="4172579252"/>
                     </a:ext>
                   </a:extLst>
                 </a:gridCol>
-                <a:gridCol w="1779330">
+                <a:gridCol w="1723165">
                   <a:extLst>
                     <a:ext uri="{9D8B030D-6E8A-4147-A177-3AD203B41FA5}">
-                      <a16:colId xmlns:a16="http://schemas.microsoft.com/office/drawing/2014/main" val="1050994404"/>
+                      <a16:colId xmlns:a16="http://schemas.microsoft.com/office/drawing/2014/main" val="4027170687"/>
                     </a:ext>
                   </a:extLst>
                 </a:gridCol>
-                <a:gridCol w="794652">
+                <a:gridCol w="769568">
                   <a:extLst>
                     <a:ext uri="{9D8B030D-6E8A-4147-A177-3AD203B41FA5}">
-                      <a16:colId xmlns:a16="http://schemas.microsoft.com/office/drawing/2014/main" val="1584139975"/>
+                      <a16:colId xmlns:a16="http://schemas.microsoft.com/office/drawing/2014/main" val="2475131576"/>
                     </a:ext>
                   </a:extLst>
                 </a:gridCol>
               </a:tblGrid>
-              <a:tr h="439270">
+              <a:tr h="474517">
                 <a:tc>
                   <a:txBody>
                     <a:bodyPr/>
@@ -6766,7 +8329,7 @@
                         <a:buNone/>
                       </a:pPr>
                       <a:r>
-                        <a:rPr lang="en-US" sz="1600" b="1" u="none" strike="noStrike" dirty="0">
+                        <a:rPr lang="en-US" sz="1600" u="none" strike="noStrike" dirty="0">
                           <a:effectLst/>
                         </a:rPr>
                         <a:t>Year</a:t>
@@ -6781,7 +8344,13 @@
                       </a:endParaRPr>
                     </a:p>
                   </a:txBody>
-                  <a:tcPr marL="7620" marR="7620" marT="7620" marB="0"/>
+                  <a:tcPr marL="7620" marR="7620" marT="7620" marB="0">
+                    <a:solidFill>
+                      <a:schemeClr val="accent5">
+                        <a:lumMod val="75000"/>
+                      </a:schemeClr>
+                    </a:solidFill>
+                  </a:tcPr>
                 </a:tc>
                 <a:tc>
                   <a:txBody>
@@ -6792,7 +8361,7 @@
                         <a:buNone/>
                       </a:pPr>
                       <a:r>
-                        <a:rPr lang="en-US" sz="1600" b="1" u="none" strike="noStrike" dirty="0">
+                        <a:rPr lang="en-US" sz="1600" u="none" strike="noStrike" dirty="0">
                           <a:effectLst/>
                         </a:rPr>
                         <a:t>Dedicated</a:t>
@@ -6807,7 +8376,13 @@
                       </a:endParaRPr>
                     </a:p>
                   </a:txBody>
-                  <a:tcPr marL="7620" marR="7620" marT="7620" marB="0"/>
+                  <a:tcPr marL="7620" marR="7620" marT="7620" marB="0">
+                    <a:solidFill>
+                      <a:schemeClr val="accent5">
+                        <a:lumMod val="75000"/>
+                      </a:schemeClr>
+                    </a:solidFill>
+                  </a:tcPr>
                 </a:tc>
                 <a:tc>
                   <a:txBody>
@@ -6818,7 +8393,7 @@
                         <a:buNone/>
                       </a:pPr>
                       <a:r>
-                        <a:rPr lang="en-US" sz="1600" b="1" u="none" strike="noStrike">
+                        <a:rPr lang="en-US" sz="1600" u="none" strike="noStrike" dirty="0">
                           <a:effectLst/>
                         </a:rPr>
                         <a:t>Quasi-Index</a:t>
@@ -6833,7 +8408,13 @@
                       </a:endParaRPr>
                     </a:p>
                   </a:txBody>
-                  <a:tcPr marL="7620" marR="7620" marT="7620" marB="0"/>
+                  <a:tcPr marL="7620" marR="7620" marT="7620" marB="0">
+                    <a:solidFill>
+                      <a:schemeClr val="accent5">
+                        <a:lumMod val="75000"/>
+                      </a:schemeClr>
+                    </a:solidFill>
+                  </a:tcPr>
                 </a:tc>
                 <a:tc>
                   <a:txBody>
@@ -6844,7 +8425,7 @@
                         <a:buNone/>
                       </a:pPr>
                       <a:r>
-                        <a:rPr lang="en-US" sz="1600" b="1" u="none" strike="noStrike">
+                        <a:rPr lang="en-US" sz="1600" u="none" strike="noStrike" dirty="0">
                           <a:effectLst/>
                         </a:rPr>
                         <a:t>Transient</a:t>
@@ -6859,7 +8440,13 @@
                       </a:endParaRPr>
                     </a:p>
                   </a:txBody>
-                  <a:tcPr marL="7620" marR="7620" marT="7620" marB="0"/>
+                  <a:tcPr marL="7620" marR="7620" marT="7620" marB="0">
+                    <a:solidFill>
+                      <a:schemeClr val="accent5">
+                        <a:lumMod val="75000"/>
+                      </a:schemeClr>
+                    </a:solidFill>
+                  </a:tcPr>
                 </a:tc>
                 <a:tc>
                   <a:txBody>
@@ -6870,7 +8457,7 @@
                         <a:buNone/>
                       </a:pPr>
                       <a:r>
-                        <a:rPr lang="en-US" sz="1600" b="1" u="none" strike="noStrike">
+                        <a:rPr lang="en-US" sz="1600" u="none" strike="noStrike" dirty="0">
                           <a:effectLst/>
                         </a:rPr>
                         <a:t>Total</a:t>
@@ -6885,15 +8472,21 @@
                       </a:endParaRPr>
                     </a:p>
                   </a:txBody>
-                  <a:tcPr marL="7620" marR="7620" marT="7620" marB="0"/>
+                  <a:tcPr marL="7620" marR="7620" marT="7620" marB="0">
+                    <a:solidFill>
+                      <a:schemeClr val="accent5">
+                        <a:lumMod val="75000"/>
+                      </a:schemeClr>
+                    </a:solidFill>
+                  </a:tcPr>
                 </a:tc>
                 <a:extLst>
                   <a:ext uri="{0D108BD9-81ED-4DB2-BD59-A6C34878D82A}">
-                    <a16:rowId xmlns:a16="http://schemas.microsoft.com/office/drawing/2014/main" val="1895694085"/>
+                    <a16:rowId xmlns:a16="http://schemas.microsoft.com/office/drawing/2014/main" val="544962356"/>
                   </a:ext>
                 </a:extLst>
               </a:tr>
-              <a:tr h="430499">
+              <a:tr h="474517">
                 <a:tc>
                   <a:txBody>
                     <a:bodyPr/>
@@ -6903,12 +8496,12 @@
                         <a:buNone/>
                       </a:pPr>
                       <a:r>
-                        <a:rPr lang="en-US" altLang="zh-CN" sz="1600" b="1" u="none" strike="noStrike">
+                        <a:rPr lang="en-US" altLang="zh-CN" sz="1600" u="none" strike="noStrike">
                           <a:effectLst/>
                         </a:rPr>
                         <a:t>2023-2025</a:t>
                       </a:r>
-                      <a:endParaRPr lang="en-US" altLang="zh-CN" sz="1600" b="1" i="0" u="none" strike="noStrike" dirty="0">
+                      <a:endParaRPr lang="en-US" altLang="zh-CN" sz="1600" b="0" i="0" u="none" strike="noStrike">
                         <a:solidFill>
                           <a:srgbClr val="000000"/>
                         </a:solidFill>
@@ -6929,12 +8522,12 @@
                         <a:buNone/>
                       </a:pPr>
                       <a:r>
-                        <a:rPr lang="en-US" altLang="zh-CN" sz="1400" u="none" strike="noStrike" dirty="0">
+                        <a:rPr lang="en-US" altLang="zh-CN" sz="1600" u="none" strike="noStrike" dirty="0">
                           <a:effectLst/>
                         </a:rPr>
-                        <a:t>0.079%</a:t>
+                        <a:t>0.0807%</a:t>
                       </a:r>
-                      <a:endParaRPr lang="en-US" altLang="zh-CN" sz="1400" b="0" i="0" u="none" strike="noStrike" dirty="0">
+                      <a:endParaRPr lang="en-US" altLang="zh-CN" sz="1600" b="0" i="0" u="none" strike="noStrike" dirty="0">
                         <a:solidFill>
                           <a:srgbClr val="000000"/>
                         </a:solidFill>
@@ -6955,12 +8548,12 @@
                         <a:buNone/>
                       </a:pPr>
                       <a:r>
-                        <a:rPr lang="en-US" altLang="zh-CN" sz="1400" u="none" strike="noStrike">
+                        <a:rPr lang="en-US" altLang="zh-CN" sz="1600" u="none" strike="noStrike">
                           <a:effectLst/>
                         </a:rPr>
-                        <a:t>1.753%</a:t>
+                        <a:t>1.2361%</a:t>
                       </a:r>
-                      <a:endParaRPr lang="en-US" altLang="zh-CN" sz="1400" b="0" i="0" u="none" strike="noStrike" dirty="0">
+                      <a:endParaRPr lang="en-US" altLang="zh-CN" sz="1600" b="0" i="0" u="none" strike="noStrike">
                         <a:solidFill>
                           <a:srgbClr val="000000"/>
                         </a:solidFill>
@@ -6981,12 +8574,12 @@
                         <a:buNone/>
                       </a:pPr>
                       <a:r>
-                        <a:rPr lang="en-US" altLang="zh-CN" sz="1400" u="none" strike="noStrike">
+                        <a:rPr lang="en-US" altLang="zh-CN" sz="1600" u="none" strike="noStrike">
                           <a:effectLst/>
                         </a:rPr>
-                        <a:t>0.625%</a:t>
+                        <a:t>0.3882%</a:t>
                       </a:r>
-                      <a:endParaRPr lang="en-US" altLang="zh-CN" sz="1400" b="0" i="0" u="none" strike="noStrike">
+                      <a:endParaRPr lang="en-US" altLang="zh-CN" sz="1600" b="0" i="0" u="none" strike="noStrike">
                         <a:solidFill>
                           <a:srgbClr val="000000"/>
                         </a:solidFill>
@@ -7007,12 +8600,12 @@
                         <a:buNone/>
                       </a:pPr>
                       <a:r>
-                        <a:rPr lang="en-US" altLang="zh-CN" sz="1400" u="none" strike="noStrike">
+                        <a:rPr lang="en-US" altLang="zh-CN" sz="1600" u="none" strike="noStrike">
                           <a:effectLst/>
                         </a:rPr>
-                        <a:t>2.457%</a:t>
+                        <a:t>1.705%</a:t>
                       </a:r>
-                      <a:endParaRPr lang="en-US" altLang="zh-CN" sz="1400" b="0" i="0" u="none" strike="noStrike">
+                      <a:endParaRPr lang="en-US" altLang="zh-CN" sz="1600" b="0" i="0" u="none" strike="noStrike">
                         <a:solidFill>
                           <a:srgbClr val="000000"/>
                         </a:solidFill>
@@ -7026,11 +8619,11 @@
                 </a:tc>
                 <a:extLst>
                   <a:ext uri="{0D108BD9-81ED-4DB2-BD59-A6C34878D82A}">
-                    <a16:rowId xmlns:a16="http://schemas.microsoft.com/office/drawing/2014/main" val="348522597"/>
+                    <a16:rowId xmlns:a16="http://schemas.microsoft.com/office/drawing/2014/main" val="2705413454"/>
                   </a:ext>
                 </a:extLst>
               </a:tr>
-              <a:tr h="430499">
+              <a:tr h="474517">
                 <a:tc>
                   <a:txBody>
                     <a:bodyPr/>
@@ -7040,12 +8633,12 @@
                         <a:buNone/>
                       </a:pPr>
                       <a:r>
-                        <a:rPr lang="en-US" altLang="zh-CN" sz="1600" b="1" u="none" strike="noStrike">
+                        <a:rPr lang="en-US" altLang="zh-CN" sz="1600" u="none" strike="noStrike">
                           <a:effectLst/>
                         </a:rPr>
                         <a:t>2021-2025</a:t>
                       </a:r>
-                      <a:endParaRPr lang="en-US" altLang="zh-CN" sz="1600" b="1" i="0" u="none" strike="noStrike" dirty="0">
+                      <a:endParaRPr lang="en-US" altLang="zh-CN" sz="1600" b="0" i="0" u="none" strike="noStrike">
                         <a:solidFill>
                           <a:srgbClr val="000000"/>
                         </a:solidFill>
@@ -7066,12 +8659,12 @@
                         <a:buNone/>
                       </a:pPr>
                       <a:r>
-                        <a:rPr lang="en-US" altLang="zh-CN" sz="1400" u="none" strike="noStrike" dirty="0">
+                        <a:rPr lang="en-US" altLang="zh-CN" sz="1600" u="none" strike="noStrike" dirty="0">
                           <a:effectLst/>
                         </a:rPr>
-                        <a:t>0.0794%</a:t>
+                        <a:t>0.0757%</a:t>
                       </a:r>
-                      <a:endParaRPr lang="en-US" altLang="zh-CN" sz="1400" b="0" i="0" u="none" strike="noStrike" dirty="0">
+                      <a:endParaRPr lang="en-US" altLang="zh-CN" sz="1600" b="0" i="0" u="none" strike="noStrike" dirty="0">
                         <a:solidFill>
                           <a:srgbClr val="000000"/>
                         </a:solidFill>
@@ -7092,12 +8685,12 @@
                         <a:buNone/>
                       </a:pPr>
                       <a:r>
-                        <a:rPr lang="en-US" altLang="zh-CN" sz="1400" u="none" strike="noStrike" dirty="0">
+                        <a:rPr lang="en-US" altLang="zh-CN" sz="1600" u="none" strike="noStrike">
                           <a:effectLst/>
                         </a:rPr>
-                        <a:t>1.8165%</a:t>
+                        <a:t>0.9939%</a:t>
                       </a:r>
-                      <a:endParaRPr lang="en-US" altLang="zh-CN" sz="1400" b="0" i="0" u="none" strike="noStrike" dirty="0">
+                      <a:endParaRPr lang="en-US" altLang="zh-CN" sz="1600" b="0" i="0" u="none" strike="noStrike">
                         <a:solidFill>
                           <a:srgbClr val="000000"/>
                         </a:solidFill>
@@ -7118,12 +8711,12 @@
                         <a:buNone/>
                       </a:pPr>
                       <a:r>
-                        <a:rPr lang="en-US" altLang="zh-CN" sz="1400" u="none" strike="noStrike" dirty="0">
+                        <a:rPr lang="en-US" altLang="zh-CN" sz="1600" u="none" strike="noStrike">
                           <a:effectLst/>
                         </a:rPr>
-                        <a:t>0.7474%</a:t>
+                        <a:t>0.5590%</a:t>
                       </a:r>
-                      <a:endParaRPr lang="en-US" altLang="zh-CN" sz="1400" b="0" i="0" u="none" strike="noStrike" dirty="0">
+                      <a:endParaRPr lang="en-US" altLang="zh-CN" sz="1600" b="0" i="0" u="none" strike="noStrike">
                         <a:solidFill>
                           <a:srgbClr val="000000"/>
                         </a:solidFill>
@@ -7144,12 +8737,12 @@
                         <a:buNone/>
                       </a:pPr>
                       <a:r>
-                        <a:rPr lang="en-US" altLang="zh-CN" sz="1400" u="none" strike="noStrike" dirty="0">
+                        <a:rPr lang="en-US" altLang="zh-CN" sz="1600" u="none" strike="noStrike" dirty="0">
                           <a:effectLst/>
                         </a:rPr>
-                        <a:t>2.643%</a:t>
+                        <a:t>1.629%</a:t>
                       </a:r>
-                      <a:endParaRPr lang="en-US" altLang="zh-CN" sz="1400" b="0" i="0" u="none" strike="noStrike" dirty="0">
+                      <a:endParaRPr lang="en-US" altLang="zh-CN" sz="1600" b="0" i="0" u="none" strike="noStrike" dirty="0">
                         <a:solidFill>
                           <a:srgbClr val="000000"/>
                         </a:solidFill>
@@ -7163,41 +8756,11 @@
                 </a:tc>
                 <a:extLst>
                   <a:ext uri="{0D108BD9-81ED-4DB2-BD59-A6C34878D82A}">
-                    <a16:rowId xmlns:a16="http://schemas.microsoft.com/office/drawing/2014/main" val="120891426"/>
+                    <a16:rowId xmlns:a16="http://schemas.microsoft.com/office/drawing/2014/main" val="3072325110"/>
                   </a:ext>
                 </a:extLst>
               </a:tr>
             </a:tbl>
-          </a:graphicData>
-        </a:graphic>
-      </p:graphicFrame>
-      <p:graphicFrame>
-        <p:nvGraphicFramePr>
-          <p:cNvPr id="13" name="图表 12">
-            <a:extLst>
-              <a:ext uri="{FF2B5EF4-FFF2-40B4-BE49-F238E27FC236}">
-                <a16:creationId xmlns:a16="http://schemas.microsoft.com/office/drawing/2014/main" id="{6138E9A8-4596-4E6F-BA44-88FE9C217150}"/>
-              </a:ext>
-            </a:extLst>
-          </p:cNvPr>
-          <p:cNvGraphicFramePr>
-            <a:graphicFrameLocks/>
-          </p:cNvGraphicFramePr>
-          <p:nvPr>
-            <p:extLst>
-              <p:ext uri="{D42A27DB-BD31-4B8C-83A1-F6EECF244321}">
-                <p14:modId xmlns:p14="http://schemas.microsoft.com/office/powerpoint/2010/main" val="3533333875"/>
-              </p:ext>
-            </p:extLst>
-          </p:nvPr>
-        </p:nvGraphicFramePr>
-        <p:xfrm>
-          <a:off x="6009563" y="3429000"/>
-          <a:ext cx="4632960" cy="2743200"/>
-        </p:xfrm>
-        <a:graphic>
-          <a:graphicData uri="http://schemas.openxmlformats.org/drawingml/2006/chart">
-            <c:chart xmlns:c="http://schemas.openxmlformats.org/drawingml/2006/chart" xmlns:r="http://schemas.openxmlformats.org/officeDocument/2006/relationships" r:id="rId4"/>
           </a:graphicData>
         </a:graphic>
       </p:graphicFrame>
@@ -7318,36 +8881,6 @@
           </a:prstGeom>
         </p:spPr>
       </p:pic>
-      <p:pic>
-        <p:nvPicPr>
-          <p:cNvPr id="3" name="图片 2">
-            <a:extLst>
-              <a:ext uri="{FF2B5EF4-FFF2-40B4-BE49-F238E27FC236}">
-                <a16:creationId xmlns:a16="http://schemas.microsoft.com/office/drawing/2014/main" id="{29742E3F-58F4-C6C6-1266-391ABF211BC0}"/>
-              </a:ext>
-            </a:extLst>
-          </p:cNvPr>
-          <p:cNvPicPr>
-            <a:picLocks noChangeAspect="1"/>
-          </p:cNvPicPr>
-          <p:nvPr/>
-        </p:nvPicPr>
-        <p:blipFill>
-          <a:blip r:embed="rId4"/>
-          <a:stretch>
-            <a:fillRect/>
-          </a:stretch>
-        </p:blipFill>
-        <p:spPr>
-          <a:xfrm>
-            <a:off x="845745" y="1676993"/>
-            <a:ext cx="10676965" cy="3504014"/>
-          </a:xfrm>
-          <a:prstGeom prst="rect">
-            <a:avLst/>
-          </a:prstGeom>
-        </p:spPr>
-      </p:pic>
       <p:sp>
         <p:nvSpPr>
           <p:cNvPr id="7" name="文本框 6">
@@ -7362,8 +8895,8 @@
         </p:nvSpPr>
         <p:spPr>
           <a:xfrm>
-            <a:off x="2608730" y="5257615"/>
-            <a:ext cx="6884894" cy="923330"/>
+            <a:off x="2093258" y="5257615"/>
+            <a:ext cx="8005483" cy="923330"/>
           </a:xfrm>
           <a:prstGeom prst="rect">
             <a:avLst/>
@@ -7407,6 +8940,36 @@
           </a:p>
         </p:txBody>
       </p:sp>
+      <p:pic>
+        <p:nvPicPr>
+          <p:cNvPr id="6" name="图片 5">
+            <a:extLst>
+              <a:ext uri="{FF2B5EF4-FFF2-40B4-BE49-F238E27FC236}">
+                <a16:creationId xmlns:a16="http://schemas.microsoft.com/office/drawing/2014/main" id="{36C44F81-75D1-6C09-5395-73A9354A60B9}"/>
+              </a:ext>
+            </a:extLst>
+          </p:cNvPr>
+          <p:cNvPicPr>
+            <a:picLocks noChangeAspect="1"/>
+          </p:cNvPicPr>
+          <p:nvPr/>
+        </p:nvPicPr>
+        <p:blipFill>
+          <a:blip r:embed="rId4"/>
+          <a:stretch>
+            <a:fillRect/>
+          </a:stretch>
+        </p:blipFill>
+        <p:spPr>
+          <a:xfrm>
+            <a:off x="479612" y="1450799"/>
+            <a:ext cx="11232776" cy="3686423"/>
+          </a:xfrm>
+          <a:prstGeom prst="rect">
+            <a:avLst/>
+          </a:prstGeom>
+        </p:spPr>
+      </p:pic>
     </p:spTree>
     <p:extLst>
       <p:ext uri="{BB962C8B-B14F-4D97-AF65-F5344CB8AC3E}">
@@ -7623,7 +9186,7 @@
         <p:spPr>
           <a:xfrm>
             <a:off x="962342" y="2480802"/>
-            <a:ext cx="5848350" cy="1841723"/>
+            <a:ext cx="5848350" cy="2201821"/>
           </a:xfrm>
           <a:prstGeom prst="rect">
             <a:avLst/>
@@ -7697,7 +9260,7 @@
                 <a:latin typeface="宋体" panose="02010600030101010101" pitchFamily="2" charset="-122"/>
                 <a:ea typeface="宋体" panose="02010600030101010101" pitchFamily="2" charset="-122"/>
               </a:rPr>
-              <a:t>不同类型机构在股票规模维度上具有系统性差异</a:t>
+              <a:t>不同类型机构在股票规模维度上具有系统性差异：均偏好大盘股，但专注型偏好最强，交易型相对分散。</a:t>
             </a:r>
             <a:endParaRPr lang="en-US" altLang="zh-CN" dirty="0">
               <a:latin typeface="宋体" panose="02010600030101010101" pitchFamily="2" charset="-122"/>
@@ -9376,7 +10939,7 @@
         <p:spPr>
           <a:xfrm>
             <a:off x="5440680" y="4464685"/>
-            <a:ext cx="5848350" cy="773289"/>
+            <a:ext cx="5848350" cy="1142620"/>
           </a:xfrm>
           <a:prstGeom prst="rect">
             <a:avLst/>
@@ -9396,14 +10959,24 @@
               </a:lnSpc>
             </a:pPr>
             <a:r>
-              <a:rPr lang="en-US" sz="1600" dirty="0">
+              <a:rPr lang="zh-CN" altLang="en-US" sz="1600" dirty="0">
                 <a:solidFill>
                   <a:srgbClr val="111111"/>
                 </a:solidFill>
                 <a:latin typeface="宋体" panose="02010600030101010101" pitchFamily="2" charset="-122"/>
                 <a:ea typeface="宋体" panose="02010600030101010101" pitchFamily="2" charset="-122"/>
               </a:rPr>
-              <a:t>样本涵盖9171只基金，</a:t>
+              <a:t>本研究的样本涵盖了</a:t>
+            </a:r>
+            <a:r>
+              <a:rPr lang="en-US" altLang="zh-CN" sz="1600" dirty="0">
+                <a:solidFill>
+                  <a:srgbClr val="111111"/>
+                </a:solidFill>
+                <a:latin typeface="宋体" panose="02010600030101010101" pitchFamily="2" charset="-122"/>
+                <a:ea typeface="宋体" panose="02010600030101010101" pitchFamily="2" charset="-122"/>
+              </a:rPr>
+              <a:t>9254</a:t>
             </a:r>
             <a:r>
               <a:rPr lang="zh-CN" altLang="en-US" sz="1600" dirty="0">
@@ -9413,7 +10986,7 @@
                 <a:latin typeface="宋体" panose="02010600030101010101" pitchFamily="2" charset="-122"/>
                 <a:ea typeface="宋体" panose="02010600030101010101" pitchFamily="2" charset="-122"/>
               </a:rPr>
-              <a:t>初步实验使用的的时间区间为</a:t>
+              <a:t>只基金。初步实验使用的时间区间为</a:t>
             </a:r>
             <a:r>
               <a:rPr lang="en-US" altLang="zh-CN" sz="1600" dirty="0">
@@ -9423,7 +10996,7 @@
                 <a:latin typeface="宋体" panose="02010600030101010101" pitchFamily="2" charset="-122"/>
                 <a:ea typeface="宋体" panose="02010600030101010101" pitchFamily="2" charset="-122"/>
               </a:rPr>
-              <a:t>2023-2025（9期） </a:t>
+              <a:t>2023-2025</a:t>
             </a:r>
             <a:r>
               <a:rPr lang="zh-CN" altLang="en-US" sz="1600" dirty="0">
@@ -9433,10 +11006,30 @@
                 <a:latin typeface="宋体" panose="02010600030101010101" pitchFamily="2" charset="-122"/>
                 <a:ea typeface="宋体" panose="02010600030101010101" pitchFamily="2" charset="-122"/>
               </a:rPr>
-              <a:t>，后续补充了从</a:t>
+              <a:t>年（</a:t>
             </a:r>
             <a:r>
-              <a:rPr lang="en-US" sz="1600" dirty="0">
+              <a:rPr lang="en-US" altLang="zh-CN" sz="1600" dirty="0">
+                <a:solidFill>
+                  <a:srgbClr val="111111"/>
+                </a:solidFill>
+                <a:latin typeface="宋体" panose="02010600030101010101" pitchFamily="2" charset="-122"/>
+                <a:ea typeface="宋体" panose="02010600030101010101" pitchFamily="2" charset="-122"/>
+              </a:rPr>
+              <a:t>9</a:t>
+            </a:r>
+            <a:r>
+              <a:rPr lang="zh-CN" altLang="en-US" sz="1600" dirty="0">
+                <a:solidFill>
+                  <a:srgbClr val="111111"/>
+                </a:solidFill>
+                <a:latin typeface="宋体" panose="02010600030101010101" pitchFamily="2" charset="-122"/>
+                <a:ea typeface="宋体" panose="02010600030101010101" pitchFamily="2" charset="-122"/>
+              </a:rPr>
+              <a:t>期），后续为了增强研究的稳健性，我们补充了从</a:t>
+            </a:r>
+            <a:r>
+              <a:rPr lang="en-US" altLang="zh-CN" sz="1600" dirty="0">
                 <a:solidFill>
                   <a:srgbClr val="111111"/>
                 </a:solidFill>
@@ -9453,10 +11046,10 @@
                 <a:latin typeface="宋体" panose="02010600030101010101" pitchFamily="2" charset="-122"/>
                 <a:ea typeface="宋体" panose="02010600030101010101" pitchFamily="2" charset="-122"/>
               </a:rPr>
-              <a:t>（</a:t>
+              <a:t>年的数据（共</a:t>
             </a:r>
             <a:r>
-              <a:rPr lang="en-US" sz="1600" dirty="0">
+              <a:rPr lang="en-US" altLang="zh-CN" sz="1600" dirty="0">
                 <a:solidFill>
                   <a:srgbClr val="111111"/>
                 </a:solidFill>
@@ -9473,32 +11066,8 @@
                 <a:latin typeface="宋体" panose="02010600030101010101" pitchFamily="2" charset="-122"/>
                 <a:ea typeface="宋体" panose="02010600030101010101" pitchFamily="2" charset="-122"/>
               </a:rPr>
-              <a:t>期）</a:t>
+              <a:t>期），并进行了对比分析。</a:t>
             </a:r>
-            <a:r>
-              <a:rPr lang="en-US" sz="1600" dirty="0">
-                <a:solidFill>
-                  <a:srgbClr val="111111"/>
-                </a:solidFill>
-                <a:latin typeface="宋体" panose="02010600030101010101" pitchFamily="2" charset="-122"/>
-                <a:ea typeface="宋体" panose="02010600030101010101" pitchFamily="2" charset="-122"/>
-              </a:rPr>
-              <a:t>，</a:t>
-            </a:r>
-            <a:r>
-              <a:rPr lang="zh-CN" altLang="en-US" sz="1600" dirty="0">
-                <a:solidFill>
-                  <a:srgbClr val="111111"/>
-                </a:solidFill>
-                <a:latin typeface="宋体" panose="02010600030101010101" pitchFamily="2" charset="-122"/>
-                <a:ea typeface="宋体" panose="02010600030101010101" pitchFamily="2" charset="-122"/>
-              </a:rPr>
-              <a:t>进行对比分析。</a:t>
-            </a:r>
-            <a:endParaRPr lang="en-US" sz="1600" dirty="0">
-              <a:latin typeface="宋体" panose="02010600030101010101" pitchFamily="2" charset="-122"/>
-              <a:ea typeface="宋体" panose="02010600030101010101" pitchFamily="2" charset="-122"/>
-            </a:endParaRPr>
           </a:p>
         </p:txBody>
       </p:sp>
@@ -9535,455 +11104,6 @@
           <a:chExt cx="0" cy="0"/>
         </a:xfrm>
       </p:grpSpPr>
-      <p:sp>
-        <p:nvSpPr>
-          <p:cNvPr id="4" name="Shape 0"/>
-          <p:cNvSpPr/>
-          <p:nvPr/>
-        </p:nvSpPr>
-        <p:spPr>
-          <a:xfrm>
-            <a:off x="10047478" y="4300770"/>
-            <a:ext cx="386080" cy="393065"/>
-          </a:xfrm>
-          <a:custGeom>
-            <a:avLst/>
-            <a:gdLst/>
-            <a:ahLst/>
-            <a:cxnLst/>
-            <a:rect l="l" t="t" r="r" b="b"/>
-            <a:pathLst>
-              <a:path w="386080" h="393065">
-                <a:moveTo>
-                  <a:pt x="215535" y="151783"/>
-                </a:moveTo>
-                <a:lnTo>
-                  <a:pt x="242350" y="178492"/>
-                </a:lnTo>
-                <a:cubicBezTo>
-                  <a:pt x="255477" y="191568"/>
-                  <a:pt x="262770" y="209002"/>
-                  <a:pt x="262770" y="227554"/>
-                </a:cubicBezTo>
-                <a:cubicBezTo>
-                  <a:pt x="262770" y="246217"/>
-                  <a:pt x="255477" y="263651"/>
-                  <a:pt x="242350" y="276726"/>
-                </a:cubicBezTo>
-                <a:lnTo>
-                  <a:pt x="145971" y="372837"/>
-                </a:lnTo>
-                <a:cubicBezTo>
-                  <a:pt x="132283" y="386360"/>
-                  <a:pt x="114443" y="393065"/>
-                  <a:pt x="96603" y="393065"/>
-                </a:cubicBezTo>
-                <a:cubicBezTo>
-                  <a:pt x="78651" y="393065"/>
-                  <a:pt x="60812" y="386360"/>
-                  <a:pt x="47235" y="372837"/>
-                </a:cubicBezTo>
-                <a:lnTo>
-                  <a:pt x="20420" y="346127"/>
-                </a:lnTo>
-                <a:cubicBezTo>
-                  <a:pt x="7293" y="333052"/>
-                  <a:pt x="0" y="315618"/>
-                  <a:pt x="0" y="296955"/>
-                </a:cubicBezTo>
-                <a:cubicBezTo>
-                  <a:pt x="0" y="278403"/>
-                  <a:pt x="7293" y="260969"/>
-                  <a:pt x="20533" y="247893"/>
-                </a:cubicBezTo>
-                <a:lnTo>
-                  <a:pt x="97052" y="171563"/>
-                </a:lnTo>
-                <a:lnTo>
-                  <a:pt x="126672" y="201179"/>
-                </a:lnTo>
-                <a:lnTo>
-                  <a:pt x="50153" y="277397"/>
-                </a:lnTo>
-                <a:cubicBezTo>
-                  <a:pt x="44880" y="282650"/>
-                  <a:pt x="41962" y="289579"/>
-                  <a:pt x="41962" y="296955"/>
-                </a:cubicBezTo>
-                <a:cubicBezTo>
-                  <a:pt x="41962" y="304442"/>
-                  <a:pt x="44880" y="311371"/>
-                  <a:pt x="50153" y="316623"/>
-                </a:cubicBezTo>
-                <a:lnTo>
-                  <a:pt x="76856" y="343222"/>
-                </a:lnTo>
-                <a:cubicBezTo>
-                  <a:pt x="87739" y="354062"/>
-                  <a:pt x="105355" y="354062"/>
-                  <a:pt x="116238" y="343222"/>
-                </a:cubicBezTo>
-                <a:lnTo>
-                  <a:pt x="212617" y="247223"/>
-                </a:lnTo>
-                <a:cubicBezTo>
-                  <a:pt x="217890" y="241970"/>
-                  <a:pt x="220808" y="235041"/>
-                  <a:pt x="220808" y="227554"/>
-                </a:cubicBezTo>
-                <a:cubicBezTo>
-                  <a:pt x="220808" y="220178"/>
-                  <a:pt x="217890" y="213249"/>
-                  <a:pt x="212617" y="207996"/>
-                </a:cubicBezTo>
-                <a:lnTo>
-                  <a:pt x="185914" y="181398"/>
-                </a:lnTo>
-                <a:close/>
-                <a:moveTo>
-                  <a:pt x="289589" y="0"/>
-                </a:moveTo>
-                <a:cubicBezTo>
-                  <a:pt x="308214" y="0"/>
-                  <a:pt x="325717" y="7265"/>
-                  <a:pt x="338957" y="20340"/>
-                </a:cubicBezTo>
-                <a:lnTo>
-                  <a:pt x="365660" y="47050"/>
-                </a:lnTo>
-                <a:cubicBezTo>
-                  <a:pt x="378787" y="60125"/>
-                  <a:pt x="386080" y="77559"/>
-                  <a:pt x="386080" y="96110"/>
-                </a:cubicBezTo>
-                <a:cubicBezTo>
-                  <a:pt x="386080" y="114662"/>
-                  <a:pt x="378787" y="132208"/>
-                  <a:pt x="365660" y="145284"/>
-                </a:cubicBezTo>
-                <a:lnTo>
-                  <a:pt x="289140" y="221502"/>
-                </a:lnTo>
-                <a:lnTo>
-                  <a:pt x="259408" y="191998"/>
-                </a:lnTo>
-                <a:lnTo>
-                  <a:pt x="335927" y="115780"/>
-                </a:lnTo>
-                <a:cubicBezTo>
-                  <a:pt x="341200" y="110527"/>
-                  <a:pt x="344118" y="103598"/>
-                  <a:pt x="344118" y="96110"/>
-                </a:cubicBezTo>
-                <a:cubicBezTo>
-                  <a:pt x="344118" y="88735"/>
-                  <a:pt x="341200" y="81806"/>
-                  <a:pt x="335927" y="76554"/>
-                </a:cubicBezTo>
-                <a:lnTo>
-                  <a:pt x="309224" y="49955"/>
-                </a:lnTo>
-                <a:cubicBezTo>
-                  <a:pt x="303950" y="44703"/>
-                  <a:pt x="296994" y="41797"/>
-                  <a:pt x="289589" y="41797"/>
-                </a:cubicBezTo>
-                <a:cubicBezTo>
-                  <a:pt x="282184" y="41797"/>
-                  <a:pt x="275115" y="44703"/>
-                  <a:pt x="269954" y="49955"/>
-                </a:cubicBezTo>
-                <a:lnTo>
-                  <a:pt x="173463" y="145954"/>
-                </a:lnTo>
-                <a:cubicBezTo>
-                  <a:pt x="168190" y="151206"/>
-                  <a:pt x="165385" y="158135"/>
-                  <a:pt x="165385" y="165511"/>
-                </a:cubicBezTo>
-                <a:cubicBezTo>
-                  <a:pt x="165385" y="172999"/>
-                  <a:pt x="168190" y="179928"/>
-                  <a:pt x="173463" y="185181"/>
-                </a:cubicBezTo>
-                <a:lnTo>
-                  <a:pt x="200278" y="211778"/>
-                </a:lnTo>
-                <a:lnTo>
-                  <a:pt x="170546" y="241282"/>
-                </a:lnTo>
-                <a:lnTo>
-                  <a:pt x="143843" y="214685"/>
-                </a:lnTo>
-                <a:cubicBezTo>
-                  <a:pt x="130603" y="201609"/>
-                  <a:pt x="123310" y="184175"/>
-                  <a:pt x="123310" y="165511"/>
-                </a:cubicBezTo>
-                <a:cubicBezTo>
-                  <a:pt x="123310" y="146960"/>
-                  <a:pt x="130603" y="129526"/>
-                  <a:pt x="143843" y="116339"/>
-                </a:cubicBezTo>
-                <a:lnTo>
-                  <a:pt x="240221" y="20340"/>
-                </a:lnTo>
-                <a:cubicBezTo>
-                  <a:pt x="253349" y="7265"/>
-                  <a:pt x="270964" y="0"/>
-                  <a:pt x="289589" y="0"/>
-                </a:cubicBezTo>
-                <a:close/>
-              </a:path>
-            </a:pathLst>
-          </a:custGeom>
-          <a:solidFill>
-            <a:srgbClr val="FFFFFF"/>
-          </a:solidFill>
-          <a:ln/>
-        </p:spPr>
-        <p:txBody>
-          <a:bodyPr/>
-          <a:lstStyle/>
-          <a:p>
-            <a:endParaRPr lang="zh-CN" altLang="en-US">
-              <a:latin typeface="宋体" panose="02010600030101010101" pitchFamily="2" charset="-122"/>
-              <a:ea typeface="宋体" panose="02010600030101010101" pitchFamily="2" charset="-122"/>
-            </a:endParaRPr>
-          </a:p>
-        </p:txBody>
-      </p:sp>
-      <p:sp>
-        <p:nvSpPr>
-          <p:cNvPr id="5" name="Shape 1"/>
-          <p:cNvSpPr/>
-          <p:nvPr/>
-        </p:nvSpPr>
-        <p:spPr>
-          <a:xfrm>
-            <a:off x="1928495" y="4044749"/>
-            <a:ext cx="386080" cy="393065"/>
-          </a:xfrm>
-          <a:custGeom>
-            <a:avLst/>
-            <a:gdLst/>
-            <a:ahLst/>
-            <a:cxnLst/>
-            <a:rect l="l" t="t" r="r" b="b"/>
-            <a:pathLst>
-              <a:path w="386080" h="393065">
-                <a:moveTo>
-                  <a:pt x="263970" y="158609"/>
-                </a:moveTo>
-                <a:cubicBezTo>
-                  <a:pt x="272951" y="158609"/>
-                  <a:pt x="280396" y="166129"/>
-                  <a:pt x="280396" y="175273"/>
-                </a:cubicBezTo>
-                <a:lnTo>
-                  <a:pt x="280396" y="247883"/>
-                </a:lnTo>
-                <a:cubicBezTo>
-                  <a:pt x="279569" y="257027"/>
-                  <a:pt x="272951" y="264547"/>
-                  <a:pt x="263970" y="264547"/>
-                </a:cubicBezTo>
-                <a:cubicBezTo>
-                  <a:pt x="254930" y="264547"/>
-                  <a:pt x="247603" y="257027"/>
-                  <a:pt x="247603" y="247883"/>
-                </a:cubicBezTo>
-                <a:lnTo>
-                  <a:pt x="247603" y="175273"/>
-                </a:lnTo>
-                <a:cubicBezTo>
-                  <a:pt x="247603" y="166129"/>
-                  <a:pt x="254989" y="158609"/>
-                  <a:pt x="263970" y="158609"/>
-                </a:cubicBezTo>
-                <a:close/>
-                <a:moveTo>
-                  <a:pt x="192695" y="108549"/>
-                </a:moveTo>
-                <a:cubicBezTo>
-                  <a:pt x="201676" y="108549"/>
-                  <a:pt x="209062" y="116069"/>
-                  <a:pt x="209062" y="125213"/>
-                </a:cubicBezTo>
-                <a:lnTo>
-                  <a:pt x="209062" y="247883"/>
-                </a:lnTo>
-                <a:cubicBezTo>
-                  <a:pt x="209062" y="257027"/>
-                  <a:pt x="201676" y="264547"/>
-                  <a:pt x="192695" y="264547"/>
-                </a:cubicBezTo>
-                <a:cubicBezTo>
-                  <a:pt x="183596" y="264547"/>
-                  <a:pt x="176270" y="257027"/>
-                  <a:pt x="176270" y="247883"/>
-                </a:cubicBezTo>
-                <a:lnTo>
-                  <a:pt x="176270" y="125213"/>
-                </a:lnTo>
-                <a:cubicBezTo>
-                  <a:pt x="176270" y="116069"/>
-                  <a:pt x="183714" y="108549"/>
-                  <a:pt x="192695" y="108549"/>
-                </a:cubicBezTo>
-                <a:close/>
-                <a:moveTo>
-                  <a:pt x="121353" y="70076"/>
-                </a:moveTo>
-                <a:cubicBezTo>
-                  <a:pt x="130338" y="70076"/>
-                  <a:pt x="137727" y="77657"/>
-                  <a:pt x="137727" y="86803"/>
-                </a:cubicBezTo>
-                <a:lnTo>
-                  <a:pt x="137727" y="247880"/>
-                </a:lnTo>
-                <a:cubicBezTo>
-                  <a:pt x="137727" y="257026"/>
-                  <a:pt x="130338" y="264547"/>
-                  <a:pt x="121353" y="264547"/>
-                </a:cubicBezTo>
-                <a:cubicBezTo>
-                  <a:pt x="112309" y="264547"/>
-                  <a:pt x="104980" y="257026"/>
-                  <a:pt x="104980" y="247880"/>
-                </a:cubicBezTo>
-                <a:lnTo>
-                  <a:pt x="104980" y="86803"/>
-                </a:lnTo>
-                <a:cubicBezTo>
-                  <a:pt x="104980" y="77657"/>
-                  <a:pt x="112369" y="70076"/>
-                  <a:pt x="121353" y="70076"/>
-                </a:cubicBezTo>
-                <a:close/>
-                <a:moveTo>
-                  <a:pt x="54909" y="33392"/>
-                </a:moveTo>
-                <a:lnTo>
-                  <a:pt x="54909" y="301312"/>
-                </a:lnTo>
-                <a:lnTo>
-                  <a:pt x="329575" y="301312"/>
-                </a:lnTo>
-                <a:lnTo>
-                  <a:pt x="329575" y="33392"/>
-                </a:lnTo>
-                <a:close/>
-                <a:moveTo>
-                  <a:pt x="16372" y="0"/>
-                </a:moveTo>
-                <a:lnTo>
-                  <a:pt x="369767" y="0"/>
-                </a:lnTo>
-                <a:cubicBezTo>
-                  <a:pt x="378751" y="0"/>
-                  <a:pt x="386139" y="7521"/>
-                  <a:pt x="386080" y="16666"/>
-                </a:cubicBezTo>
-                <a:cubicBezTo>
-                  <a:pt x="386080" y="25811"/>
-                  <a:pt x="377864" y="33392"/>
-                  <a:pt x="368880" y="33392"/>
-                </a:cubicBezTo>
-                <a:lnTo>
-                  <a:pt x="362319" y="33392"/>
-                </a:lnTo>
-                <a:lnTo>
-                  <a:pt x="362319" y="317135"/>
-                </a:lnTo>
-                <a:cubicBezTo>
-                  <a:pt x="362319" y="327123"/>
-                  <a:pt x="354931" y="333801"/>
-                  <a:pt x="345947" y="333801"/>
-                </a:cubicBezTo>
-                <a:lnTo>
-                  <a:pt x="303332" y="333801"/>
-                </a:lnTo>
-                <a:lnTo>
-                  <a:pt x="303332" y="376399"/>
-                </a:lnTo>
-                <a:cubicBezTo>
-                  <a:pt x="303332" y="385544"/>
-                  <a:pt x="295884" y="393065"/>
-                  <a:pt x="286900" y="393065"/>
-                </a:cubicBezTo>
-                <a:cubicBezTo>
-                  <a:pt x="277916" y="393065"/>
-                  <a:pt x="270528" y="385544"/>
-                  <a:pt x="270528" y="376399"/>
-                </a:cubicBezTo>
-                <a:lnTo>
-                  <a:pt x="270528" y="333801"/>
-                </a:lnTo>
-                <a:lnTo>
-                  <a:pt x="114725" y="333801"/>
-                </a:lnTo>
-                <a:lnTo>
-                  <a:pt x="114725" y="376399"/>
-                </a:lnTo>
-                <a:cubicBezTo>
-                  <a:pt x="114725" y="385544"/>
-                  <a:pt x="107336" y="393065"/>
-                  <a:pt x="98352" y="393065"/>
-                </a:cubicBezTo>
-                <a:cubicBezTo>
-                  <a:pt x="89368" y="393065"/>
-                  <a:pt x="81921" y="385544"/>
-                  <a:pt x="81921" y="376399"/>
-                </a:cubicBezTo>
-                <a:lnTo>
-                  <a:pt x="81921" y="333801"/>
-                </a:lnTo>
-                <a:lnTo>
-                  <a:pt x="39305" y="333801"/>
-                </a:lnTo>
-                <a:cubicBezTo>
-                  <a:pt x="30321" y="333801"/>
-                  <a:pt x="22933" y="326281"/>
-                  <a:pt x="22933" y="317135"/>
-                </a:cubicBezTo>
-                <a:lnTo>
-                  <a:pt x="22933" y="33392"/>
-                </a:lnTo>
-                <a:lnTo>
-                  <a:pt x="16372" y="33392"/>
-                </a:lnTo>
-                <a:cubicBezTo>
-                  <a:pt x="7388" y="33392"/>
-                  <a:pt x="0" y="25811"/>
-                  <a:pt x="0" y="16666"/>
-                </a:cubicBezTo>
-                <a:cubicBezTo>
-                  <a:pt x="0" y="7521"/>
-                  <a:pt x="7388" y="0"/>
-                  <a:pt x="16372" y="0"/>
-                </a:cubicBezTo>
-                <a:close/>
-              </a:path>
-            </a:pathLst>
-          </a:custGeom>
-          <a:solidFill>
-            <a:srgbClr val="FFFFFF"/>
-          </a:solidFill>
-          <a:ln/>
-        </p:spPr>
-        <p:txBody>
-          <a:bodyPr/>
-          <a:lstStyle/>
-          <a:p>
-            <a:endParaRPr lang="zh-CN" altLang="en-US">
-              <a:latin typeface="宋体" panose="02010600030101010101" pitchFamily="2" charset="-122"/>
-              <a:ea typeface="宋体" panose="02010600030101010101" pitchFamily="2" charset="-122"/>
-            </a:endParaRPr>
-          </a:p>
-        </p:txBody>
-      </p:sp>
       <p:pic>
         <p:nvPicPr>
           <p:cNvPr id="6" name="Image 2" descr="https://kimi-img.moonshot.cn/pub/slides/slides_tmpl/image/25-09-04-16:27:03-d2skqlu1bb2p4onbqhlg.svg"/>
@@ -10038,8 +11158,8 @@
           <a:lstStyle/>
           <a:p>
             <a:endParaRPr lang="zh-CN" altLang="en-US">
-              <a:latin typeface="宋体" panose="02010600030101010101" pitchFamily="2" charset="-122"/>
-              <a:ea typeface="宋体" panose="02010600030101010101" pitchFamily="2" charset="-122"/>
+              <a:latin typeface="黑体" panose="02010609060101010101" pitchFamily="49" charset="-122"/>
+              <a:ea typeface="黑体" panose="02010609060101010101" pitchFamily="49" charset="-122"/>
             </a:endParaRPr>
           </a:p>
         </p:txBody>
@@ -10103,7 +11223,7 @@
               </a:lnSpc>
             </a:pPr>
             <a:r>
-              <a:rPr lang="en-US" sz="3200" b="1" dirty="0" err="1">
+              <a:rPr lang="zh-CN" altLang="en-US" sz="3200" b="1">
                 <a:solidFill>
                   <a:srgbClr val="111111"/>
                 </a:solidFill>
@@ -10111,29 +11231,7 @@
                 <a:ea typeface="黑体" panose="02010609060101010101" pitchFamily="49" charset="-122"/>
                 <a:cs typeface="MiSans" pitchFamily="34" charset="-120"/>
               </a:rPr>
-              <a:t>指标</a:t>
-            </a:r>
-            <a:r>
-              <a:rPr lang="zh-CN" altLang="en-US" sz="3200" b="1" dirty="0">
-                <a:solidFill>
-                  <a:srgbClr val="111111"/>
-                </a:solidFill>
-                <a:latin typeface="黑体" panose="02010609060101010101" pitchFamily="49" charset="-122"/>
-                <a:ea typeface="黑体" panose="02010609060101010101" pitchFamily="49" charset="-122"/>
-                <a:cs typeface="MiSans" pitchFamily="34" charset="-120"/>
-              </a:rPr>
-              <a:t>构建问题与</a:t>
-            </a:r>
-            <a:r>
-              <a:rPr lang="en-US" sz="3200" b="1" dirty="0" err="1">
-                <a:solidFill>
-                  <a:srgbClr val="111111"/>
-                </a:solidFill>
-                <a:latin typeface="黑体" panose="02010609060101010101" pitchFamily="49" charset="-122"/>
-                <a:ea typeface="黑体" panose="02010609060101010101" pitchFamily="49" charset="-122"/>
-                <a:cs typeface="MiSans" pitchFamily="34" charset="-120"/>
-              </a:rPr>
-              <a:t>调整</a:t>
+              <a:t>指标构建</a:t>
             </a:r>
             <a:endParaRPr lang="en-US" sz="1600" dirty="0">
               <a:latin typeface="黑体" panose="02010609060101010101" pitchFamily="49" charset="-122"/>
@@ -10167,131 +11265,10 @@
       </p:pic>
       <p:sp>
         <p:nvSpPr>
-          <p:cNvPr id="11" name="Text 4"/>
-          <p:cNvSpPr/>
-          <p:nvPr/>
-        </p:nvSpPr>
-        <p:spPr>
-          <a:xfrm>
-            <a:off x="717550" y="1398270"/>
-            <a:ext cx="10859135" cy="459740"/>
-          </a:xfrm>
-          <a:prstGeom prst="rect">
-            <a:avLst/>
-          </a:prstGeom>
-          <a:noFill/>
-          <a:ln/>
-        </p:spPr>
-        <p:txBody>
-          <a:bodyPr wrap="square" lIns="91440" tIns="45720" rIns="91440" bIns="45720" rtlCol="0" anchor="t">
-            <a:spAutoFit/>
-          </a:bodyPr>
-          <a:lstStyle/>
-          <a:p>
-            <a:pPr>
-              <a:lnSpc>
-                <a:spcPct val="100000"/>
-              </a:lnSpc>
-            </a:pPr>
-            <a:r>
-              <a:rPr lang="en-US" sz="2400" b="1" dirty="0">
-                <a:solidFill>
-                  <a:srgbClr val="111111"/>
-                </a:solidFill>
-                <a:latin typeface="宋体" panose="02010600030101010101" pitchFamily="2" charset="-122"/>
-                <a:ea typeface="宋体" panose="02010600030101010101" pitchFamily="2" charset="-122"/>
-                <a:cs typeface="MiSans" pitchFamily="34" charset="-120"/>
-              </a:rPr>
-              <a:t>数据局限</a:t>
-            </a:r>
-            <a:endParaRPr lang="en-US" sz="1600" dirty="0">
-              <a:latin typeface="宋体" panose="02010600030101010101" pitchFamily="2" charset="-122"/>
-              <a:ea typeface="宋体" panose="02010600030101010101" pitchFamily="2" charset="-122"/>
-            </a:endParaRPr>
-          </a:p>
-        </p:txBody>
-      </p:sp>
-      <p:sp>
-        <p:nvSpPr>
-          <p:cNvPr id="12" name="Text 5"/>
-          <p:cNvSpPr/>
-          <p:nvPr/>
-        </p:nvSpPr>
-        <p:spPr>
-          <a:xfrm>
-            <a:off x="718854" y="1837055"/>
-            <a:ext cx="6119035" cy="687111"/>
-          </a:xfrm>
-          <a:prstGeom prst="rect">
-            <a:avLst/>
-          </a:prstGeom>
-          <a:noFill/>
-          <a:ln/>
-        </p:spPr>
-        <p:txBody>
-          <a:bodyPr wrap="square" lIns="91440" tIns="45720" rIns="91440" bIns="45720" rtlCol="0" anchor="t">
-            <a:spAutoFit/>
-          </a:bodyPr>
-          <a:lstStyle/>
-          <a:p>
-            <a:pPr algn="just">
-              <a:lnSpc>
-                <a:spcPct val="130000"/>
-              </a:lnSpc>
-            </a:pPr>
-            <a:r>
-              <a:rPr lang="zh-CN" altLang="en-US" sz="1600" dirty="0">
-                <a:solidFill>
-                  <a:srgbClr val="111111"/>
-                </a:solidFill>
-                <a:latin typeface="宋体" panose="02010600030101010101" pitchFamily="2" charset="-122"/>
-                <a:ea typeface="宋体" panose="02010600030101010101" pitchFamily="2" charset="-122"/>
-                <a:cs typeface="MiSans" pitchFamily="34" charset="-120"/>
-              </a:rPr>
-              <a:t>由于仅使用</a:t>
-            </a:r>
-            <a:r>
-              <a:rPr lang="en-US" sz="1600" dirty="0">
-                <a:solidFill>
-                  <a:srgbClr val="111111"/>
-                </a:solidFill>
-                <a:latin typeface="宋体" panose="02010600030101010101" pitchFamily="2" charset="-122"/>
-                <a:ea typeface="宋体" panose="02010600030101010101" pitchFamily="2" charset="-122"/>
-                <a:cs typeface="MiSans" pitchFamily="34" charset="-120"/>
-              </a:rPr>
-              <a:t>披露前10大重仓股，导致HHI分散度指标系统性偏低</a:t>
-            </a:r>
-          </a:p>
-          <a:p>
-            <a:pPr algn="just">
-              <a:lnSpc>
-                <a:spcPct val="130000"/>
-              </a:lnSpc>
-            </a:pPr>
-            <a:r>
-              <a:rPr lang="zh-CN" altLang="en-US" sz="1600" dirty="0">
-                <a:solidFill>
-                  <a:srgbClr val="111111"/>
-                </a:solidFill>
-                <a:latin typeface="宋体" panose="02010600030101010101" pitchFamily="2" charset="-122"/>
-                <a:ea typeface="宋体" panose="02010600030101010101" pitchFamily="2" charset="-122"/>
-                <a:cs typeface="MiSans" pitchFamily="34" charset="-120"/>
-              </a:rPr>
-              <a:t>，难以准确的进行聚类分类。</a:t>
-            </a:r>
-            <a:endParaRPr lang="en-US" sz="1600" dirty="0">
-              <a:latin typeface="宋体" panose="02010600030101010101" pitchFamily="2" charset="-122"/>
-              <a:ea typeface="宋体" panose="02010600030101010101" pitchFamily="2" charset="-122"/>
-            </a:endParaRPr>
-          </a:p>
-        </p:txBody>
-      </p:sp>
-      <p:sp>
-        <p:nvSpPr>
-          <p:cNvPr id="17" name="Text 3">
+          <p:cNvPr id="2" name="AutoShape 7">
             <a:extLst>
               <a:ext uri="{FF2B5EF4-FFF2-40B4-BE49-F238E27FC236}">
-                <a16:creationId xmlns:a16="http://schemas.microsoft.com/office/drawing/2014/main" id="{1C286C8A-F94F-1E22-1807-A84DDA5957C3}"/>
+                <a16:creationId xmlns:a16="http://schemas.microsoft.com/office/drawing/2014/main" id="{449BCFC5-51C9-4575-CBD4-5D017711EBAE}"/>
               </a:ext>
             </a:extLst>
           </p:cNvPr>
@@ -10300,82 +11277,52 @@
         </p:nvSpPr>
         <p:spPr>
           <a:xfrm>
-            <a:off x="6837889" y="3847021"/>
-            <a:ext cx="4249644" cy="861774"/>
+            <a:off x="381000" y="1397000"/>
+            <a:ext cx="3556000" cy="3937000"/>
           </a:xfrm>
-          <a:prstGeom prst="rect">
-            <a:avLst/>
+          <a:prstGeom prst="roundRect">
+            <a:avLst>
+              <a:gd name="adj" fmla="val 4285"/>
+            </a:avLst>
           </a:prstGeom>
-          <a:noFill/>
-          <a:ln/>
+          <a:solidFill>
+            <a:srgbClr val="F3F4F6">
+              <a:alpha val="100000"/>
+            </a:srgbClr>
+          </a:solidFill>
+          <a:ln w="25400" cap="flat" cmpd="sng">
+            <a:noFill/>
+            <a:prstDash val="solid"/>
+            <a:round/>
+          </a:ln>
+          <a:effectLst>
+            <a:outerShdw blurRad="127000" dist="50800" dir="2700000" algn="tl" rotWithShape="0">
+              <a:srgbClr val="000000">
+                <a:alpha val="8000"/>
+              </a:srgbClr>
+            </a:outerShdw>
+          </a:effectLst>
         </p:spPr>
         <p:txBody>
-          <a:bodyPr wrap="square" lIns="91440" tIns="45720" rIns="91440" bIns="45720" rtlCol="0" anchor="t">
-            <a:spAutoFit/>
-          </a:bodyPr>
-          <a:lstStyle/>
-          <a:p>
-            <a:pPr>
-              <a:lnSpc>
-                <a:spcPct val="100000"/>
-              </a:lnSpc>
+          <a:bodyPr vert="horz" wrap="square" lIns="63500" tIns="63500" rIns="63500" bIns="63500" rtlCol="0" anchor="ctr"/>
+          <a:lstStyle/>
+          <a:p>
+            <a:pPr algn="ctr">
+              <a:defRPr/>
             </a:pPr>
-            <a:r>
-              <a:rPr lang="zh-CN" altLang="en-US" b="1" dirty="0">
-                <a:latin typeface="宋体" panose="02010600030101010101" pitchFamily="2" charset="-122"/>
-                <a:ea typeface="宋体" panose="02010600030101010101" pitchFamily="2" charset="-122"/>
-              </a:rPr>
-              <a:t>指标二：</a:t>
-            </a:r>
-            <a:r>
-              <a:rPr lang="en-US" b="1" dirty="0" err="1">
-                <a:latin typeface="宋体" panose="02010600030101010101" pitchFamily="2" charset="-122"/>
-                <a:ea typeface="宋体" panose="02010600030101010101" pitchFamily="2" charset="-122"/>
-              </a:rPr>
-              <a:t>换手</a:t>
-            </a:r>
-            <a:r>
-              <a:rPr lang="zh-CN" altLang="en-US" b="1" dirty="0">
-                <a:latin typeface="宋体" panose="02010600030101010101" pitchFamily="2" charset="-122"/>
-                <a:ea typeface="宋体" panose="02010600030101010101" pitchFamily="2" charset="-122"/>
-              </a:rPr>
-              <a:t>率</a:t>
-            </a:r>
-            <a:r>
-              <a:rPr lang="en-US" b="1" dirty="0">
-                <a:latin typeface="宋体" panose="02010600030101010101" pitchFamily="2" charset="-122"/>
-                <a:ea typeface="宋体" panose="02010600030101010101" pitchFamily="2" charset="-122"/>
-              </a:rPr>
-              <a:t> Turnover</a:t>
-            </a:r>
-          </a:p>
-          <a:p>
-            <a:r>
-              <a:rPr lang="zh-CN" altLang="en-US" sz="1600" dirty="0">
-                <a:latin typeface="宋体" panose="02010600030101010101" pitchFamily="2" charset="-122"/>
-                <a:ea typeface="宋体" panose="02010600030101010101" pitchFamily="2" charset="-122"/>
-              </a:rPr>
-              <a:t>用于衡量持仓变动程度。</a:t>
-            </a:r>
-            <a:endParaRPr lang="en-US" altLang="zh-CN" sz="1600" dirty="0">
-              <a:latin typeface="宋体" panose="02010600030101010101" pitchFamily="2" charset="-122"/>
-              <a:ea typeface="宋体" panose="02010600030101010101" pitchFamily="2" charset="-122"/>
+            <a:endParaRPr>
+              <a:latin typeface="黑体" panose="02010609060101010101" pitchFamily="49" charset="-122"/>
+              <a:ea typeface="黑体" panose="02010609060101010101" pitchFamily="49" charset="-122"/>
             </a:endParaRPr>
           </a:p>
-          <a:p>
-            <a:endParaRPr lang="en-US" sz="1600" dirty="0">
-              <a:latin typeface="宋体" panose="02010600030101010101" pitchFamily="2" charset="-122"/>
-              <a:ea typeface="宋体" panose="02010600030101010101" pitchFamily="2" charset="-122"/>
-            </a:endParaRPr>
-          </a:p>
-        </p:txBody>
-      </p:sp>
-      <p:sp>
-        <p:nvSpPr>
-          <p:cNvPr id="19" name="Text 3">
+        </p:txBody>
+      </p:sp>
+      <p:sp>
+        <p:nvSpPr>
+          <p:cNvPr id="3" name="AutoShape 8">
             <a:extLst>
               <a:ext uri="{FF2B5EF4-FFF2-40B4-BE49-F238E27FC236}">
-                <a16:creationId xmlns:a16="http://schemas.microsoft.com/office/drawing/2014/main" id="{3F52DFD2-EA84-388D-B7FF-5DB0B97B2C02}"/>
+                <a16:creationId xmlns:a16="http://schemas.microsoft.com/office/drawing/2014/main" id="{B6238FB9-D476-2DB7-9A84-176E0736E79C}"/>
               </a:ext>
             </a:extLst>
           </p:cNvPr>
@@ -10384,140 +11331,45 @@
         </p:nvSpPr>
         <p:spPr>
           <a:xfrm>
-            <a:off x="724328" y="3631254"/>
-            <a:ext cx="4516534" cy="338554"/>
+            <a:off x="381000" y="1397000"/>
+            <a:ext cx="3556000" cy="762000"/>
           </a:xfrm>
-          <a:prstGeom prst="rect">
-            <a:avLst/>
+          <a:prstGeom prst="roundRect">
+            <a:avLst>
+              <a:gd name="adj" fmla="val 20000"/>
+            </a:avLst>
           </a:prstGeom>
-          <a:noFill/>
-          <a:ln/>
+          <a:solidFill>
+            <a:srgbClr val="2563EB">
+              <a:alpha val="100000"/>
+            </a:srgbClr>
+          </a:solidFill>
+          <a:ln w="25400" cap="flat" cmpd="sng">
+            <a:noFill/>
+            <a:prstDash val="solid"/>
+            <a:round/>
+          </a:ln>
         </p:spPr>
         <p:txBody>
-          <a:bodyPr wrap="square" lIns="91440" tIns="45720" rIns="91440" bIns="45720" rtlCol="0" anchor="t">
-            <a:spAutoFit/>
-          </a:bodyPr>
-          <a:lstStyle/>
-          <a:p>
-            <a:pPr>
-              <a:lnSpc>
-                <a:spcPct val="100000"/>
-              </a:lnSpc>
+          <a:bodyPr vert="horz" wrap="square" lIns="63500" tIns="63500" rIns="63500" bIns="63500" rtlCol="0" anchor="ctr"/>
+          <a:lstStyle/>
+          <a:p>
+            <a:pPr algn="ctr">
+              <a:defRPr/>
             </a:pPr>
-            <a:endParaRPr lang="en-US" sz="1600" dirty="0">
-              <a:latin typeface="宋体" panose="02010600030101010101" pitchFamily="2" charset="-122"/>
-              <a:ea typeface="宋体" panose="02010600030101010101" pitchFamily="2" charset="-122"/>
+            <a:endParaRPr>
+              <a:latin typeface="黑体" panose="02010609060101010101" pitchFamily="49" charset="-122"/>
+              <a:ea typeface="黑体" panose="02010609060101010101" pitchFamily="49" charset="-122"/>
             </a:endParaRPr>
           </a:p>
         </p:txBody>
       </p:sp>
-      <p:sp>
-        <p:nvSpPr>
-          <p:cNvPr id="21" name="文本框 20">
+      <p:pic>
+        <p:nvPicPr>
+          <p:cNvPr id="4" name="Picture 9">
             <a:extLst>
               <a:ext uri="{FF2B5EF4-FFF2-40B4-BE49-F238E27FC236}">
-                <a16:creationId xmlns:a16="http://schemas.microsoft.com/office/drawing/2014/main" id="{B6A746DD-C4AE-19B4-D49F-FFF381686102}"/>
-              </a:ext>
-            </a:extLst>
-          </p:cNvPr>
-          <p:cNvSpPr txBox="1"/>
-          <p:nvPr/>
-        </p:nvSpPr>
-        <p:spPr>
-          <a:xfrm>
-            <a:off x="861694" y="3550360"/>
-            <a:ext cx="4983293" cy="1384995"/>
-          </a:xfrm>
-          <a:prstGeom prst="rect">
-            <a:avLst/>
-          </a:prstGeom>
-          <a:noFill/>
-        </p:spPr>
-        <p:txBody>
-          <a:bodyPr wrap="square">
-            <a:spAutoFit/>
-          </a:bodyPr>
-          <a:lstStyle/>
-          <a:p>
-            <a:r>
-              <a:rPr lang="zh-CN" altLang="en-US" sz="2000" b="1" dirty="0">
-                <a:latin typeface="宋体" panose="02010600030101010101" pitchFamily="2" charset="-122"/>
-                <a:ea typeface="宋体" panose="02010600030101010101" pitchFamily="2" charset="-122"/>
-              </a:rPr>
-              <a:t>指标一：持仓集中度 </a:t>
-            </a:r>
-            <a:r>
-              <a:rPr lang="en-US" altLang="zh-CN" sz="2000" b="1" dirty="0">
-                <a:latin typeface="宋体" panose="02010600030101010101" pitchFamily="2" charset="-122"/>
-                <a:ea typeface="宋体" panose="02010600030101010101" pitchFamily="2" charset="-122"/>
-              </a:rPr>
-              <a:t>EN</a:t>
-            </a:r>
-          </a:p>
-          <a:p>
-            <a:r>
-              <a:rPr lang="zh-CN" altLang="en-US" sz="1600" dirty="0">
-                <a:latin typeface="宋体" panose="02010600030101010101" pitchFamily="2" charset="-122"/>
-                <a:ea typeface="宋体" panose="02010600030101010101" pitchFamily="2" charset="-122"/>
-              </a:rPr>
-              <a:t>不同于原文使用</a:t>
-            </a:r>
-            <a:r>
-              <a:rPr lang="en-US" altLang="zh-CN" sz="1600" dirty="0">
-                <a:latin typeface="宋体" panose="02010600030101010101" pitchFamily="2" charset="-122"/>
-                <a:ea typeface="宋体" panose="02010600030101010101" pitchFamily="2" charset="-122"/>
-              </a:rPr>
-              <a:t>HHI</a:t>
-            </a:r>
-            <a:r>
-              <a:rPr lang="zh-CN" altLang="en-US" sz="1600" dirty="0">
-                <a:latin typeface="宋体" panose="02010600030101010101" pitchFamily="2" charset="-122"/>
-                <a:ea typeface="宋体" panose="02010600030101010101" pitchFamily="2" charset="-122"/>
-              </a:rPr>
-              <a:t>，即持仓股票占净值比例的平方和来衡量集中度。</a:t>
-            </a:r>
-          </a:p>
-          <a:p>
-            <a:r>
-              <a:rPr lang="zh-CN" altLang="en-US" sz="1600" dirty="0">
-                <a:latin typeface="宋体" panose="02010600030101010101" pitchFamily="2" charset="-122"/>
-                <a:ea typeface="宋体" panose="02010600030101010101" pitchFamily="2" charset="-122"/>
-              </a:rPr>
-              <a:t>选取</a:t>
-            </a:r>
-            <a:r>
-              <a:rPr lang="en-US" altLang="zh-CN" sz="1600" dirty="0">
-                <a:latin typeface="宋体" panose="02010600030101010101" pitchFamily="2" charset="-122"/>
-                <a:ea typeface="宋体" panose="02010600030101010101" pitchFamily="2" charset="-122"/>
-              </a:rPr>
-              <a:t>EN=1/HHI </a:t>
-            </a:r>
-            <a:r>
-              <a:rPr lang="zh-CN" altLang="en-US" sz="1600" dirty="0">
-                <a:latin typeface="宋体" panose="02010600030101010101" pitchFamily="2" charset="-122"/>
-                <a:ea typeface="宋体" panose="02010600030101010101" pitchFamily="2" charset="-122"/>
-              </a:rPr>
-              <a:t>替代传统分散度指标。</a:t>
-            </a:r>
-            <a:endParaRPr lang="en-US" altLang="zh-CN" sz="1600" dirty="0">
-              <a:latin typeface="宋体" panose="02010600030101010101" pitchFamily="2" charset="-122"/>
-              <a:ea typeface="宋体" panose="02010600030101010101" pitchFamily="2" charset="-122"/>
-            </a:endParaRPr>
-          </a:p>
-          <a:p>
-            <a:endParaRPr lang="zh-CN" altLang="en-US" sz="1600" dirty="0">
-              <a:latin typeface="宋体" panose="02010600030101010101" pitchFamily="2" charset="-122"/>
-              <a:ea typeface="宋体" panose="02010600030101010101" pitchFamily="2" charset="-122"/>
-            </a:endParaRPr>
-          </a:p>
-        </p:txBody>
-      </p:sp>
-      <p:pic>
-        <p:nvPicPr>
-          <p:cNvPr id="23" name="图片 22">
-            <a:extLst>
-              <a:ext uri="{FF2B5EF4-FFF2-40B4-BE49-F238E27FC236}">
-                <a16:creationId xmlns:a16="http://schemas.microsoft.com/office/drawing/2014/main" id="{7627EAC2-A2C0-C856-0D24-0E1E4DCE73FF}"/>
+                <a16:creationId xmlns:a16="http://schemas.microsoft.com/office/drawing/2014/main" id="{39C7E930-02F4-A7B6-47A4-97DE7A22F031}"/>
               </a:ext>
             </a:extLst>
           </p:cNvPr>
@@ -10527,55 +11379,1074 @@
           <p:nvPr/>
         </p:nvPicPr>
         <p:blipFill>
-          <a:blip r:embed="rId7"/>
+          <a:blip r:embed="rId7">
+            <a:extLst>
+              <a:ext uri="{28A0092B-C50C-407E-A947-70E740481C1C}">
+                <a14:useLocalDpi xmlns:a14="http://schemas.microsoft.com/office/drawing/2010/main" val="0"/>
+              </a:ext>
+              <a:ext uri="{96DAC541-7B7A-43D3-8B79-37D633B846F1}">
+                <asvg:svgBlip xmlns:asvg="http://schemas.microsoft.com/office/drawing/2016/SVG/main" r:embed="rId8"/>
+              </a:ext>
+            </a:extLst>
+          </a:blip>
           <a:stretch>
             <a:fillRect/>
           </a:stretch>
         </p:blipFill>
         <p:spPr>
           <a:xfrm>
-            <a:off x="1104467" y="4708795"/>
-            <a:ext cx="1648055" cy="704948"/>
+            <a:off x="571500" y="1549400"/>
+            <a:ext cx="457200" cy="457200"/>
           </a:xfrm>
           <a:prstGeom prst="rect">
             <a:avLst/>
           </a:prstGeom>
         </p:spPr>
       </p:pic>
+      <p:sp>
+        <p:nvSpPr>
+          <p:cNvPr id="5" name="AutoShape 10">
+            <a:extLst>
+              <a:ext uri="{FF2B5EF4-FFF2-40B4-BE49-F238E27FC236}">
+                <a16:creationId xmlns:a16="http://schemas.microsoft.com/office/drawing/2014/main" id="{58A92AF8-785A-FC9D-DBA4-3F23CBC0C35B}"/>
+              </a:ext>
+            </a:extLst>
+          </p:cNvPr>
+          <p:cNvSpPr/>
+          <p:nvPr/>
+        </p:nvSpPr>
+        <p:spPr>
+          <a:xfrm>
+            <a:off x="1143000" y="1524000"/>
+            <a:ext cx="2413000" cy="508000"/>
+          </a:xfrm>
+          <a:prstGeom prst="rect">
+            <a:avLst/>
+          </a:prstGeom>
+          <a:noFill/>
+          <a:ln w="12700" cap="flat" cmpd="sng">
+            <a:noFill/>
+            <a:prstDash val="solid"/>
+            <a:round/>
+          </a:ln>
+        </p:spPr>
+        <p:txBody>
+          <a:bodyPr vert="horz" wrap="square" lIns="0" tIns="0" rIns="0" bIns="0" rtlCol="0" anchor="ctr" anchorCtr="0"/>
+          <a:lstStyle/>
+          <a:p>
+            <a:pPr indent="0" algn="l">
+              <a:lnSpc>
+                <a:spcPct val="125000"/>
+              </a:lnSpc>
+              <a:defRPr/>
+            </a:pPr>
+            <a:r>
+              <a:rPr lang="en-US" sz="1800" b="1" i="0" u="none" strike="noStrike">
+                <a:solidFill>
+                  <a:srgbClr val="FFFFFF"/>
+                </a:solidFill>
+                <a:latin typeface="黑体" panose="02010609060101010101" pitchFamily="49" charset="-122"/>
+                <a:ea typeface="黑体" panose="02010609060101010101" pitchFamily="49" charset="-122"/>
+                <a:cs typeface="Noto Sans SC"/>
+                <a:sym typeface="Noto Sans SC"/>
+              </a:rPr>
+              <a:t>持仓集中度</a:t>
+            </a:r>
+            <a:endParaRPr lang="en-US" sz="1100">
+              <a:latin typeface="黑体" panose="02010609060101010101" pitchFamily="49" charset="-122"/>
+              <a:ea typeface="黑体" panose="02010609060101010101" pitchFamily="49" charset="-122"/>
+            </a:endParaRPr>
+          </a:p>
+        </p:txBody>
+      </p:sp>
+      <p:sp>
+        <p:nvSpPr>
+          <p:cNvPr id="11" name="AutoShape 11">
+            <a:extLst>
+              <a:ext uri="{FF2B5EF4-FFF2-40B4-BE49-F238E27FC236}">
+                <a16:creationId xmlns:a16="http://schemas.microsoft.com/office/drawing/2014/main" id="{930F9DFA-D744-C9C9-AFD3-DB6A105F039D}"/>
+              </a:ext>
+            </a:extLst>
+          </p:cNvPr>
+          <p:cNvSpPr/>
+          <p:nvPr/>
+        </p:nvSpPr>
+        <p:spPr>
+          <a:xfrm>
+            <a:off x="381000" y="2286000"/>
+            <a:ext cx="3556000" cy="2921000"/>
+          </a:xfrm>
+          <a:prstGeom prst="roundRect">
+            <a:avLst>
+              <a:gd name="adj" fmla="val 5217"/>
+            </a:avLst>
+          </a:prstGeom>
+          <a:solidFill>
+            <a:srgbClr val="FFFFFF">
+              <a:alpha val="100000"/>
+            </a:srgbClr>
+          </a:solidFill>
+          <a:ln w="25400" cap="flat" cmpd="sng">
+            <a:noFill/>
+            <a:prstDash val="solid"/>
+            <a:round/>
+          </a:ln>
+        </p:spPr>
+        <p:txBody>
+          <a:bodyPr vert="horz" wrap="square" lIns="63500" tIns="63500" rIns="63500" bIns="63500" rtlCol="0" anchor="ctr"/>
+          <a:lstStyle/>
+          <a:p>
+            <a:pPr algn="ctr">
+              <a:defRPr/>
+            </a:pPr>
+            <a:endParaRPr lang="zh-CN" altLang="en-US">
+              <a:latin typeface="黑体" panose="02010609060101010101" pitchFamily="49" charset="-122"/>
+              <a:ea typeface="黑体" panose="02010609060101010101" pitchFamily="49" charset="-122"/>
+            </a:endParaRPr>
+          </a:p>
+        </p:txBody>
+      </p:sp>
+      <p:sp>
+        <p:nvSpPr>
+          <p:cNvPr id="12" name="AutoShape 12">
+            <a:extLst>
+              <a:ext uri="{FF2B5EF4-FFF2-40B4-BE49-F238E27FC236}">
+                <a16:creationId xmlns:a16="http://schemas.microsoft.com/office/drawing/2014/main" id="{79415B57-19E1-879D-F02E-72D85729C002}"/>
+              </a:ext>
+            </a:extLst>
+          </p:cNvPr>
+          <p:cNvSpPr/>
+          <p:nvPr/>
+        </p:nvSpPr>
+        <p:spPr>
+          <a:xfrm>
+            <a:off x="571500" y="2476500"/>
+            <a:ext cx="3175000" cy="381000"/>
+          </a:xfrm>
+          <a:prstGeom prst="rect">
+            <a:avLst/>
+          </a:prstGeom>
+          <a:noFill/>
+          <a:ln w="12700" cap="flat" cmpd="sng">
+            <a:noFill/>
+            <a:prstDash val="solid"/>
+            <a:round/>
+          </a:ln>
+        </p:spPr>
+        <p:txBody>
+          <a:bodyPr vert="horz" wrap="square" lIns="0" tIns="0" rIns="0" bIns="0" rtlCol="0" anchor="ctr" anchorCtr="0"/>
+          <a:lstStyle/>
+          <a:p>
+            <a:pPr indent="0" algn="l">
+              <a:lnSpc>
+                <a:spcPct val="125000"/>
+              </a:lnSpc>
+              <a:defRPr/>
+            </a:pPr>
+            <a:endParaRPr lang="en-US" sz="1100" dirty="0">
+              <a:latin typeface="黑体" panose="02010609060101010101" pitchFamily="49" charset="-122"/>
+              <a:ea typeface="黑体" panose="02010609060101010101" pitchFamily="49" charset="-122"/>
+            </a:endParaRPr>
+          </a:p>
+        </p:txBody>
+      </p:sp>
+      <p:cxnSp>
+        <p:nvCxnSpPr>
+          <p:cNvPr id="13" name="Connector 13">
+            <a:extLst>
+              <a:ext uri="{FF2B5EF4-FFF2-40B4-BE49-F238E27FC236}">
+                <a16:creationId xmlns:a16="http://schemas.microsoft.com/office/drawing/2014/main" id="{0FB0FA51-7404-BBCA-5EDB-40937CBBD73B}"/>
+              </a:ext>
+            </a:extLst>
+          </p:cNvPr>
+          <p:cNvCxnSpPr/>
+          <p:nvPr/>
+        </p:nvCxnSpPr>
+        <p:spPr>
+          <a:xfrm rot="21586250">
+            <a:off x="571513" y="2914650"/>
+            <a:ext cx="3175000" cy="12700"/>
+          </a:xfrm>
+          <a:prstGeom prst="straightConnector1">
+            <a:avLst/>
+          </a:prstGeom>
+          <a:solidFill>
+            <a:srgbClr val="DEE0E3">
+              <a:alpha val="100000"/>
+            </a:srgbClr>
+          </a:solidFill>
+          <a:ln w="12700" cap="flat" cmpd="sng">
+            <a:solidFill>
+              <a:srgbClr val="E5E7EB">
+                <a:alpha val="100000"/>
+              </a:srgbClr>
+            </a:solidFill>
+            <a:prstDash val="solid"/>
+            <a:round/>
+            <a:headEnd type="none" w="med" len="med"/>
+            <a:tailEnd type="none" w="med" len="med"/>
+          </a:ln>
+        </p:spPr>
+      </p:cxnSp>
+      <p:sp>
+        <p:nvSpPr>
+          <p:cNvPr id="14" name="AutoShape 14">
+            <a:extLst>
+              <a:ext uri="{FF2B5EF4-FFF2-40B4-BE49-F238E27FC236}">
+                <a16:creationId xmlns:a16="http://schemas.microsoft.com/office/drawing/2014/main" id="{84DDBD2A-266F-18AE-C773-B0C096F64838}"/>
+              </a:ext>
+            </a:extLst>
+          </p:cNvPr>
+          <p:cNvSpPr/>
+          <p:nvPr/>
+        </p:nvSpPr>
+        <p:spPr>
+          <a:xfrm>
+            <a:off x="571500" y="3111500"/>
+            <a:ext cx="3175000" cy="1397000"/>
+          </a:xfrm>
+          <a:prstGeom prst="rect">
+            <a:avLst/>
+          </a:prstGeom>
+          <a:noFill/>
+          <a:ln w="12700" cap="flat" cmpd="sng">
+            <a:noFill/>
+            <a:prstDash val="solid"/>
+            <a:round/>
+          </a:ln>
+        </p:spPr>
+        <p:txBody>
+          <a:bodyPr vert="horz" wrap="square" lIns="0" tIns="0" rIns="0" bIns="0" rtlCol="0" anchor="t" anchorCtr="0"/>
+          <a:lstStyle/>
+          <a:p>
+            <a:pPr indent="0" algn="l">
+              <a:lnSpc>
+                <a:spcPct val="133333"/>
+              </a:lnSpc>
+            </a:pPr>
+            <a:endParaRPr lang="en-US" sz="1600" b="0" i="0" u="none" strike="noStrike" dirty="0">
+              <a:solidFill>
+                <a:srgbClr val="374151"/>
+              </a:solidFill>
+              <a:latin typeface="黑体" panose="02010609060101010101" pitchFamily="49" charset="-122"/>
+              <a:ea typeface="黑体" panose="02010609060101010101" pitchFamily="49" charset="-122"/>
+              <a:cs typeface="Noto Sans SC"/>
+              <a:sym typeface="Noto Sans SC"/>
+            </a:endParaRPr>
+          </a:p>
+        </p:txBody>
+      </p:sp>
+      <p:sp>
+        <p:nvSpPr>
+          <p:cNvPr id="15" name="AutoShape 15">
+            <a:extLst>
+              <a:ext uri="{FF2B5EF4-FFF2-40B4-BE49-F238E27FC236}">
+                <a16:creationId xmlns:a16="http://schemas.microsoft.com/office/drawing/2014/main" id="{E0486420-DC51-B630-612F-91D8681C7CCE}"/>
+              </a:ext>
+            </a:extLst>
+          </p:cNvPr>
+          <p:cNvSpPr/>
+          <p:nvPr/>
+        </p:nvSpPr>
+        <p:spPr>
+          <a:xfrm>
+            <a:off x="4318000" y="1397000"/>
+            <a:ext cx="3556000" cy="3937000"/>
+          </a:xfrm>
+          <a:prstGeom prst="roundRect">
+            <a:avLst>
+              <a:gd name="adj" fmla="val 4285"/>
+            </a:avLst>
+          </a:prstGeom>
+          <a:solidFill>
+            <a:srgbClr val="F3F4F6">
+              <a:alpha val="100000"/>
+            </a:srgbClr>
+          </a:solidFill>
+          <a:ln w="25400" cap="flat" cmpd="sng">
+            <a:noFill/>
+            <a:prstDash val="solid"/>
+            <a:round/>
+          </a:ln>
+          <a:effectLst>
+            <a:outerShdw blurRad="127000" dist="50800" dir="2700000" algn="tl" rotWithShape="0">
+              <a:srgbClr val="000000">
+                <a:alpha val="8000"/>
+              </a:srgbClr>
+            </a:outerShdw>
+          </a:effectLst>
+        </p:spPr>
+        <p:txBody>
+          <a:bodyPr vert="horz" wrap="square" lIns="63500" tIns="63500" rIns="63500" bIns="63500" rtlCol="0" anchor="ctr"/>
+          <a:lstStyle/>
+          <a:p>
+            <a:pPr algn="ctr">
+              <a:defRPr/>
+            </a:pPr>
+            <a:endParaRPr>
+              <a:latin typeface="黑体" panose="02010609060101010101" pitchFamily="49" charset="-122"/>
+              <a:ea typeface="黑体" panose="02010609060101010101" pitchFamily="49" charset="-122"/>
+            </a:endParaRPr>
+          </a:p>
+        </p:txBody>
+      </p:sp>
+      <p:sp>
+        <p:nvSpPr>
+          <p:cNvPr id="16" name="AutoShape 16">
+            <a:extLst>
+              <a:ext uri="{FF2B5EF4-FFF2-40B4-BE49-F238E27FC236}">
+                <a16:creationId xmlns:a16="http://schemas.microsoft.com/office/drawing/2014/main" id="{D2231092-1E5F-1C51-180E-630C6D135EC2}"/>
+              </a:ext>
+            </a:extLst>
+          </p:cNvPr>
+          <p:cNvSpPr/>
+          <p:nvPr/>
+        </p:nvSpPr>
+        <p:spPr>
+          <a:xfrm>
+            <a:off x="4318000" y="1397000"/>
+            <a:ext cx="3556000" cy="762000"/>
+          </a:xfrm>
+          <a:prstGeom prst="roundRect">
+            <a:avLst>
+              <a:gd name="adj" fmla="val 20000"/>
+            </a:avLst>
+          </a:prstGeom>
+          <a:solidFill>
+            <a:srgbClr val="10B981">
+              <a:alpha val="100000"/>
+            </a:srgbClr>
+          </a:solidFill>
+          <a:ln w="25400" cap="flat" cmpd="sng">
+            <a:noFill/>
+            <a:prstDash val="solid"/>
+            <a:round/>
+          </a:ln>
+        </p:spPr>
+        <p:txBody>
+          <a:bodyPr vert="horz" wrap="square" lIns="63500" tIns="63500" rIns="63500" bIns="63500" rtlCol="0" anchor="ctr"/>
+          <a:lstStyle/>
+          <a:p>
+            <a:pPr algn="ctr">
+              <a:defRPr/>
+            </a:pPr>
+            <a:endParaRPr>
+              <a:latin typeface="黑体" panose="02010609060101010101" pitchFamily="49" charset="-122"/>
+              <a:ea typeface="黑体" panose="02010609060101010101" pitchFamily="49" charset="-122"/>
+            </a:endParaRPr>
+          </a:p>
+        </p:txBody>
+      </p:sp>
       <p:pic>
         <p:nvPicPr>
-          <p:cNvPr id="25" name="图片 24">
+          <p:cNvPr id="17" name="Picture 17">
             <a:extLst>
               <a:ext uri="{FF2B5EF4-FFF2-40B4-BE49-F238E27FC236}">
-                <a16:creationId xmlns:a16="http://schemas.microsoft.com/office/drawing/2014/main" id="{68257459-DE95-615F-C6CD-CC745647096E}"/>
+                <a16:creationId xmlns:a16="http://schemas.microsoft.com/office/drawing/2014/main" id="{9BC6706E-5F60-B8EE-0796-52867CD0F799}"/>
               </a:ext>
             </a:extLst>
           </p:cNvPr>
           <p:cNvPicPr>
-            <a:picLocks/>
+            <a:picLocks noChangeAspect="1"/>
           </p:cNvPicPr>
           <p:nvPr/>
         </p:nvPicPr>
         <p:blipFill>
-          <a:blip r:embed="rId8"/>
-          <a:srcRect t="26851" r="23981"/>
+          <a:blip r:embed="rId9">
+            <a:extLst>
+              <a:ext uri="{28A0092B-C50C-407E-A947-70E740481C1C}">
+                <a14:useLocalDpi xmlns:a14="http://schemas.microsoft.com/office/drawing/2010/main" val="0"/>
+              </a:ext>
+              <a:ext uri="{96DAC541-7B7A-43D3-8B79-37D633B846F1}">
+                <asvg:svgBlip xmlns:asvg="http://schemas.microsoft.com/office/drawing/2016/SVG/main" r:embed="rId10"/>
+              </a:ext>
+            </a:extLst>
+          </a:blip>
           <a:stretch>
             <a:fillRect/>
           </a:stretch>
         </p:blipFill>
         <p:spPr>
           <a:xfrm>
-            <a:off x="695642" y="5413743"/>
-            <a:ext cx="1904607" cy="878022"/>
+            <a:off x="4508500" y="1549400"/>
+            <a:ext cx="457200" cy="457200"/>
           </a:xfrm>
           <a:prstGeom prst="rect">
             <a:avLst/>
           </a:prstGeom>
         </p:spPr>
       </p:pic>
+      <p:sp>
+        <p:nvSpPr>
+          <p:cNvPr id="18" name="AutoShape 18">
+            <a:extLst>
+              <a:ext uri="{FF2B5EF4-FFF2-40B4-BE49-F238E27FC236}">
+                <a16:creationId xmlns:a16="http://schemas.microsoft.com/office/drawing/2014/main" id="{DAA69D08-3C60-386C-001F-77C2F632828D}"/>
+              </a:ext>
+            </a:extLst>
+          </p:cNvPr>
+          <p:cNvSpPr/>
+          <p:nvPr/>
+        </p:nvSpPr>
+        <p:spPr>
+          <a:xfrm>
+            <a:off x="5080000" y="1524000"/>
+            <a:ext cx="2413000" cy="508000"/>
+          </a:xfrm>
+          <a:prstGeom prst="rect">
+            <a:avLst/>
+          </a:prstGeom>
+          <a:noFill/>
+          <a:ln w="12700" cap="flat" cmpd="sng">
+            <a:noFill/>
+            <a:prstDash val="solid"/>
+            <a:round/>
+          </a:ln>
+        </p:spPr>
+        <p:txBody>
+          <a:bodyPr vert="horz" wrap="square" lIns="0" tIns="0" rIns="0" bIns="0" rtlCol="0" anchor="ctr" anchorCtr="0"/>
+          <a:lstStyle/>
+          <a:p>
+            <a:pPr indent="0" algn="l">
+              <a:lnSpc>
+                <a:spcPct val="125000"/>
+              </a:lnSpc>
+              <a:defRPr/>
+            </a:pPr>
+            <a:r>
+              <a:rPr lang="en-US" sz="1800" b="1" i="0" u="none" strike="noStrike">
+                <a:solidFill>
+                  <a:srgbClr val="FFFFFF"/>
+                </a:solidFill>
+                <a:latin typeface="黑体" panose="02010609060101010101" pitchFamily="49" charset="-122"/>
+                <a:ea typeface="黑体" panose="02010609060101010101" pitchFamily="49" charset="-122"/>
+                <a:cs typeface="Noto Sans SC"/>
+                <a:sym typeface="Noto Sans SC"/>
+              </a:rPr>
+              <a:t>组合换手率</a:t>
+            </a:r>
+            <a:endParaRPr lang="en-US" sz="1100">
+              <a:latin typeface="黑体" panose="02010609060101010101" pitchFamily="49" charset="-122"/>
+              <a:ea typeface="黑体" panose="02010609060101010101" pitchFamily="49" charset="-122"/>
+            </a:endParaRPr>
+          </a:p>
+        </p:txBody>
+      </p:sp>
+      <p:sp>
+        <p:nvSpPr>
+          <p:cNvPr id="19" name="AutoShape 19">
+            <a:extLst>
+              <a:ext uri="{FF2B5EF4-FFF2-40B4-BE49-F238E27FC236}">
+                <a16:creationId xmlns:a16="http://schemas.microsoft.com/office/drawing/2014/main" id="{2DF011D4-CD44-5F8F-B8CC-652132670EE0}"/>
+              </a:ext>
+            </a:extLst>
+          </p:cNvPr>
+          <p:cNvSpPr/>
+          <p:nvPr/>
+        </p:nvSpPr>
+        <p:spPr>
+          <a:xfrm>
+            <a:off x="4318000" y="2286000"/>
+            <a:ext cx="3556000" cy="2921000"/>
+          </a:xfrm>
+          <a:prstGeom prst="roundRect">
+            <a:avLst>
+              <a:gd name="adj" fmla="val 5217"/>
+            </a:avLst>
+          </a:prstGeom>
+          <a:solidFill>
+            <a:srgbClr val="FFFFFF">
+              <a:alpha val="100000"/>
+            </a:srgbClr>
+          </a:solidFill>
+          <a:ln w="25400" cap="flat" cmpd="sng">
+            <a:noFill/>
+            <a:prstDash val="solid"/>
+            <a:round/>
+          </a:ln>
+        </p:spPr>
+        <p:txBody>
+          <a:bodyPr vert="horz" wrap="square" lIns="63500" tIns="63500" rIns="63500" bIns="63500" rtlCol="0" anchor="ctr"/>
+          <a:lstStyle/>
+          <a:p>
+            <a:pPr algn="ctr">
+              <a:defRPr/>
+            </a:pPr>
+            <a:endParaRPr>
+              <a:latin typeface="黑体" panose="02010609060101010101" pitchFamily="49" charset="-122"/>
+              <a:ea typeface="黑体" panose="02010609060101010101" pitchFamily="49" charset="-122"/>
+            </a:endParaRPr>
+          </a:p>
+        </p:txBody>
+      </p:sp>
+      <p:sp>
+        <p:nvSpPr>
+          <p:cNvPr id="20" name="AutoShape 20">
+            <a:extLst>
+              <a:ext uri="{FF2B5EF4-FFF2-40B4-BE49-F238E27FC236}">
+                <a16:creationId xmlns:a16="http://schemas.microsoft.com/office/drawing/2014/main" id="{4993DB11-666B-5EF9-539A-3209FA1837E8}"/>
+              </a:ext>
+            </a:extLst>
+          </p:cNvPr>
+          <p:cNvSpPr/>
+          <p:nvPr/>
+        </p:nvSpPr>
+        <p:spPr>
+          <a:xfrm>
+            <a:off x="4508500" y="2476500"/>
+            <a:ext cx="3175000" cy="381000"/>
+          </a:xfrm>
+          <a:prstGeom prst="rect">
+            <a:avLst/>
+          </a:prstGeom>
+          <a:noFill/>
+          <a:ln w="12700" cap="flat" cmpd="sng">
+            <a:noFill/>
+            <a:prstDash val="solid"/>
+            <a:round/>
+          </a:ln>
+        </p:spPr>
+        <p:txBody>
+          <a:bodyPr vert="horz" wrap="square" lIns="0" tIns="0" rIns="0" bIns="0" rtlCol="0" anchor="ctr" anchorCtr="0"/>
+          <a:lstStyle/>
+          <a:p>
+            <a:pPr indent="0" algn="l">
+              <a:lnSpc>
+                <a:spcPct val="125000"/>
+              </a:lnSpc>
+              <a:defRPr/>
+            </a:pPr>
+            <a:endParaRPr lang="en-US" sz="1100" dirty="0">
+              <a:latin typeface="黑体" panose="02010609060101010101" pitchFamily="49" charset="-122"/>
+              <a:ea typeface="黑体" panose="02010609060101010101" pitchFamily="49" charset="-122"/>
+            </a:endParaRPr>
+          </a:p>
+        </p:txBody>
+      </p:sp>
+      <p:cxnSp>
+        <p:nvCxnSpPr>
+          <p:cNvPr id="21" name="Connector 21">
+            <a:extLst>
+              <a:ext uri="{FF2B5EF4-FFF2-40B4-BE49-F238E27FC236}">
+                <a16:creationId xmlns:a16="http://schemas.microsoft.com/office/drawing/2014/main" id="{9263B6B0-BF2D-9816-BC1C-0B29EEBE36AC}"/>
+              </a:ext>
+            </a:extLst>
+          </p:cNvPr>
+          <p:cNvCxnSpPr/>
+          <p:nvPr/>
+        </p:nvCxnSpPr>
+        <p:spPr>
+          <a:xfrm rot="21586250">
+            <a:off x="4508513" y="2914650"/>
+            <a:ext cx="3175000" cy="12700"/>
+          </a:xfrm>
+          <a:prstGeom prst="straightConnector1">
+            <a:avLst/>
+          </a:prstGeom>
+          <a:solidFill>
+            <a:srgbClr val="DEE0E3">
+              <a:alpha val="100000"/>
+            </a:srgbClr>
+          </a:solidFill>
+          <a:ln w="12700" cap="flat" cmpd="sng">
+            <a:solidFill>
+              <a:srgbClr val="E5E7EB">
+                <a:alpha val="100000"/>
+              </a:srgbClr>
+            </a:solidFill>
+            <a:prstDash val="solid"/>
+            <a:round/>
+            <a:headEnd type="none" w="med" len="med"/>
+            <a:tailEnd type="none" w="med" len="med"/>
+          </a:ln>
+        </p:spPr>
+      </p:cxnSp>
+      <p:sp>
+        <p:nvSpPr>
+          <p:cNvPr id="22" name="AutoShape 22">
+            <a:extLst>
+              <a:ext uri="{FF2B5EF4-FFF2-40B4-BE49-F238E27FC236}">
+                <a16:creationId xmlns:a16="http://schemas.microsoft.com/office/drawing/2014/main" id="{1D28B2E5-8862-1975-6406-D39C9245E9A4}"/>
+              </a:ext>
+            </a:extLst>
+          </p:cNvPr>
+          <p:cNvSpPr/>
+          <p:nvPr/>
+        </p:nvSpPr>
+        <p:spPr>
+          <a:xfrm>
+            <a:off x="4508500" y="3111500"/>
+            <a:ext cx="3175000" cy="1270000"/>
+          </a:xfrm>
+          <a:prstGeom prst="rect">
+            <a:avLst/>
+          </a:prstGeom>
+          <a:noFill/>
+          <a:ln w="12700" cap="flat" cmpd="sng">
+            <a:noFill/>
+            <a:prstDash val="solid"/>
+            <a:round/>
+          </a:ln>
+        </p:spPr>
+        <p:txBody>
+          <a:bodyPr vert="horz" wrap="square" lIns="0" tIns="0" rIns="0" bIns="0" rtlCol="0" anchor="t" anchorCtr="0"/>
+          <a:lstStyle/>
+          <a:p>
+            <a:pPr indent="0" algn="l">
+              <a:lnSpc>
+                <a:spcPct val="133333"/>
+              </a:lnSpc>
+              <a:defRPr/>
+            </a:pPr>
+            <a:endParaRPr lang="en-US" sz="1200" b="0" i="0" u="none" strike="noStrike" dirty="0">
+              <a:solidFill>
+                <a:srgbClr val="374151"/>
+              </a:solidFill>
+              <a:latin typeface="黑体" panose="02010609060101010101" pitchFamily="49" charset="-122"/>
+              <a:ea typeface="黑体" panose="02010609060101010101" pitchFamily="49" charset="-122"/>
+              <a:cs typeface="Noto Sans SC"/>
+              <a:sym typeface="Noto Sans SC"/>
+            </a:endParaRPr>
+          </a:p>
+        </p:txBody>
+      </p:sp>
+      <p:sp>
+        <p:nvSpPr>
+          <p:cNvPr id="23" name="AutoShape 23">
+            <a:extLst>
+              <a:ext uri="{FF2B5EF4-FFF2-40B4-BE49-F238E27FC236}">
+                <a16:creationId xmlns:a16="http://schemas.microsoft.com/office/drawing/2014/main" id="{F487843E-DE20-D954-6345-29366EFFDF41}"/>
+              </a:ext>
+            </a:extLst>
+          </p:cNvPr>
+          <p:cNvSpPr/>
+          <p:nvPr/>
+        </p:nvSpPr>
+        <p:spPr>
+          <a:xfrm>
+            <a:off x="8255000" y="1397000"/>
+            <a:ext cx="3556000" cy="3937000"/>
+          </a:xfrm>
+          <a:prstGeom prst="roundRect">
+            <a:avLst>
+              <a:gd name="adj" fmla="val 4285"/>
+            </a:avLst>
+          </a:prstGeom>
+          <a:solidFill>
+            <a:srgbClr val="F3F4F6">
+              <a:alpha val="100000"/>
+            </a:srgbClr>
+          </a:solidFill>
+          <a:ln w="25400" cap="flat" cmpd="sng">
+            <a:noFill/>
+            <a:prstDash val="solid"/>
+            <a:round/>
+          </a:ln>
+          <a:effectLst>
+            <a:outerShdw blurRad="127000" dist="50800" dir="2700000" algn="tl" rotWithShape="0">
+              <a:srgbClr val="000000">
+                <a:alpha val="8000"/>
+              </a:srgbClr>
+            </a:outerShdw>
+          </a:effectLst>
+        </p:spPr>
+        <p:txBody>
+          <a:bodyPr vert="horz" wrap="square" lIns="63500" tIns="63500" rIns="63500" bIns="63500" rtlCol="0" anchor="ctr"/>
+          <a:lstStyle/>
+          <a:p>
+            <a:pPr algn="ctr">
+              <a:defRPr/>
+            </a:pPr>
+            <a:endParaRPr>
+              <a:latin typeface="黑体" panose="02010609060101010101" pitchFamily="49" charset="-122"/>
+              <a:ea typeface="黑体" panose="02010609060101010101" pitchFamily="49" charset="-122"/>
+            </a:endParaRPr>
+          </a:p>
+        </p:txBody>
+      </p:sp>
+      <p:sp>
+        <p:nvSpPr>
+          <p:cNvPr id="24" name="AutoShape 24">
+            <a:extLst>
+              <a:ext uri="{FF2B5EF4-FFF2-40B4-BE49-F238E27FC236}">
+                <a16:creationId xmlns:a16="http://schemas.microsoft.com/office/drawing/2014/main" id="{F09907B3-DB7C-281D-7F2D-2087888ADE46}"/>
+              </a:ext>
+            </a:extLst>
+          </p:cNvPr>
+          <p:cNvSpPr/>
+          <p:nvPr/>
+        </p:nvSpPr>
+        <p:spPr>
+          <a:xfrm>
+            <a:off x="8255000" y="1397000"/>
+            <a:ext cx="3556000" cy="762000"/>
+          </a:xfrm>
+          <a:prstGeom prst="roundRect">
+            <a:avLst>
+              <a:gd name="adj" fmla="val 20000"/>
+            </a:avLst>
+          </a:prstGeom>
+          <a:solidFill>
+            <a:srgbClr val="F59E0B">
+              <a:alpha val="100000"/>
+            </a:srgbClr>
+          </a:solidFill>
+          <a:ln w="25400" cap="flat" cmpd="sng">
+            <a:noFill/>
+            <a:prstDash val="solid"/>
+            <a:round/>
+          </a:ln>
+        </p:spPr>
+        <p:txBody>
+          <a:bodyPr vert="horz" wrap="square" lIns="63500" tIns="63500" rIns="63500" bIns="63500" rtlCol="0" anchor="ctr"/>
+          <a:lstStyle/>
+          <a:p>
+            <a:pPr algn="ctr">
+              <a:defRPr/>
+            </a:pPr>
+            <a:endParaRPr>
+              <a:latin typeface="黑体" panose="02010609060101010101" pitchFamily="49" charset="-122"/>
+              <a:ea typeface="黑体" panose="02010609060101010101" pitchFamily="49" charset="-122"/>
+            </a:endParaRPr>
+          </a:p>
+        </p:txBody>
+      </p:sp>
       <p:pic>
         <p:nvPicPr>
-          <p:cNvPr id="29" name="图片 28">
+          <p:cNvPr id="25" name="Picture 25">
+            <a:extLst>
+              <a:ext uri="{FF2B5EF4-FFF2-40B4-BE49-F238E27FC236}">
+                <a16:creationId xmlns:a16="http://schemas.microsoft.com/office/drawing/2014/main" id="{186A82AC-0972-C738-600C-322FCCFCB507}"/>
+              </a:ext>
+            </a:extLst>
+          </p:cNvPr>
+          <p:cNvPicPr>
+            <a:picLocks noChangeAspect="1"/>
+          </p:cNvPicPr>
+          <p:nvPr/>
+        </p:nvPicPr>
+        <p:blipFill>
+          <a:blip r:embed="rId11">
+            <a:extLst>
+              <a:ext uri="{28A0092B-C50C-407E-A947-70E740481C1C}">
+                <a14:useLocalDpi xmlns:a14="http://schemas.microsoft.com/office/drawing/2010/main" val="0"/>
+              </a:ext>
+              <a:ext uri="{96DAC541-7B7A-43D3-8B79-37D633B846F1}">
+                <asvg:svgBlip xmlns:asvg="http://schemas.microsoft.com/office/drawing/2016/SVG/main" r:embed="rId12"/>
+              </a:ext>
+            </a:extLst>
+          </a:blip>
+          <a:stretch>
+            <a:fillRect/>
+          </a:stretch>
+        </p:blipFill>
+        <p:spPr>
+          <a:xfrm>
+            <a:off x="8445500" y="1549400"/>
+            <a:ext cx="457200" cy="457200"/>
+          </a:xfrm>
+          <a:prstGeom prst="rect">
+            <a:avLst/>
+          </a:prstGeom>
+        </p:spPr>
+      </p:pic>
+      <p:sp>
+        <p:nvSpPr>
+          <p:cNvPr id="26" name="AutoShape 26">
+            <a:extLst>
+              <a:ext uri="{FF2B5EF4-FFF2-40B4-BE49-F238E27FC236}">
+                <a16:creationId xmlns:a16="http://schemas.microsoft.com/office/drawing/2014/main" id="{F99C1233-ED42-1BE7-B88D-24D42594A89A}"/>
+              </a:ext>
+            </a:extLst>
+          </p:cNvPr>
+          <p:cNvSpPr/>
+          <p:nvPr/>
+        </p:nvSpPr>
+        <p:spPr>
+          <a:xfrm>
+            <a:off x="9017000" y="1524000"/>
+            <a:ext cx="2413000" cy="508000"/>
+          </a:xfrm>
+          <a:prstGeom prst="rect">
+            <a:avLst/>
+          </a:prstGeom>
+          <a:noFill/>
+          <a:ln w="12700" cap="flat" cmpd="sng">
+            <a:noFill/>
+            <a:prstDash val="solid"/>
+            <a:round/>
+          </a:ln>
+        </p:spPr>
+        <p:txBody>
+          <a:bodyPr vert="horz" wrap="square" lIns="0" tIns="0" rIns="0" bIns="0" rtlCol="0" anchor="ctr" anchorCtr="0"/>
+          <a:lstStyle/>
+          <a:p>
+            <a:pPr indent="0" algn="l">
+              <a:lnSpc>
+                <a:spcPct val="125000"/>
+              </a:lnSpc>
+              <a:defRPr/>
+            </a:pPr>
+            <a:r>
+              <a:rPr lang="en-US" sz="1800" b="1" i="0" u="none" strike="noStrike">
+                <a:solidFill>
+                  <a:srgbClr val="FFFFFF"/>
+                </a:solidFill>
+                <a:latin typeface="黑体" panose="02010609060101010101" pitchFamily="49" charset="-122"/>
+                <a:ea typeface="黑体" panose="02010609060101010101" pitchFamily="49" charset="-122"/>
+                <a:cs typeface="Noto Sans SC"/>
+                <a:sym typeface="Noto Sans SC"/>
+              </a:rPr>
+              <a:t>盈利动量交易</a:t>
+            </a:r>
+            <a:endParaRPr lang="en-US" sz="1100">
+              <a:latin typeface="黑体" panose="02010609060101010101" pitchFamily="49" charset="-122"/>
+              <a:ea typeface="黑体" panose="02010609060101010101" pitchFamily="49" charset="-122"/>
+            </a:endParaRPr>
+          </a:p>
+        </p:txBody>
+      </p:sp>
+      <p:sp>
+        <p:nvSpPr>
+          <p:cNvPr id="27" name="AutoShape 27">
+            <a:extLst>
+              <a:ext uri="{FF2B5EF4-FFF2-40B4-BE49-F238E27FC236}">
+                <a16:creationId xmlns:a16="http://schemas.microsoft.com/office/drawing/2014/main" id="{19EEFFA5-93D2-C23C-EBDC-2F243BAD7EE6}"/>
+              </a:ext>
+            </a:extLst>
+          </p:cNvPr>
+          <p:cNvSpPr/>
+          <p:nvPr/>
+        </p:nvSpPr>
+        <p:spPr>
+          <a:xfrm>
+            <a:off x="8255000" y="2286000"/>
+            <a:ext cx="3556000" cy="2921000"/>
+          </a:xfrm>
+          <a:prstGeom prst="roundRect">
+            <a:avLst>
+              <a:gd name="adj" fmla="val 5217"/>
+            </a:avLst>
+          </a:prstGeom>
+          <a:solidFill>
+            <a:srgbClr val="FFFFFF">
+              <a:alpha val="100000"/>
+            </a:srgbClr>
+          </a:solidFill>
+          <a:ln w="25400" cap="flat" cmpd="sng">
+            <a:noFill/>
+            <a:prstDash val="solid"/>
+            <a:round/>
+          </a:ln>
+        </p:spPr>
+        <p:txBody>
+          <a:bodyPr vert="horz" wrap="square" lIns="63500" tIns="63500" rIns="63500" bIns="63500" rtlCol="0" anchor="ctr"/>
+          <a:lstStyle/>
+          <a:p>
+            <a:pPr algn="ctr">
+              <a:defRPr/>
+            </a:pPr>
+            <a:endParaRPr>
+              <a:latin typeface="黑体" panose="02010609060101010101" pitchFamily="49" charset="-122"/>
+              <a:ea typeface="黑体" panose="02010609060101010101" pitchFamily="49" charset="-122"/>
+            </a:endParaRPr>
+          </a:p>
+        </p:txBody>
+      </p:sp>
+      <p:sp>
+        <p:nvSpPr>
+          <p:cNvPr id="28" name="AutoShape 28">
+            <a:extLst>
+              <a:ext uri="{FF2B5EF4-FFF2-40B4-BE49-F238E27FC236}">
+                <a16:creationId xmlns:a16="http://schemas.microsoft.com/office/drawing/2014/main" id="{82533B72-B142-B5CB-0567-DA3C3BE4F35F}"/>
+              </a:ext>
+            </a:extLst>
+          </p:cNvPr>
+          <p:cNvSpPr/>
+          <p:nvPr/>
+        </p:nvSpPr>
+        <p:spPr>
+          <a:xfrm>
+            <a:off x="8445500" y="2476500"/>
+            <a:ext cx="3175000" cy="381000"/>
+          </a:xfrm>
+          <a:prstGeom prst="rect">
+            <a:avLst/>
+          </a:prstGeom>
+          <a:noFill/>
+          <a:ln w="12700" cap="flat" cmpd="sng">
+            <a:noFill/>
+            <a:prstDash val="solid"/>
+            <a:round/>
+          </a:ln>
+        </p:spPr>
+        <p:txBody>
+          <a:bodyPr vert="horz" wrap="square" lIns="0" tIns="0" rIns="0" bIns="0" rtlCol="0" anchor="ctr" anchorCtr="0"/>
+          <a:lstStyle/>
+          <a:p>
+            <a:pPr indent="0" algn="l">
+              <a:lnSpc>
+                <a:spcPct val="125000"/>
+              </a:lnSpc>
+              <a:defRPr/>
+            </a:pPr>
+            <a:endParaRPr lang="en-US" sz="1100" dirty="0">
+              <a:latin typeface="黑体" panose="02010609060101010101" pitchFamily="49" charset="-122"/>
+              <a:ea typeface="黑体" panose="02010609060101010101" pitchFamily="49" charset="-122"/>
+            </a:endParaRPr>
+          </a:p>
+        </p:txBody>
+      </p:sp>
+      <p:cxnSp>
+        <p:nvCxnSpPr>
+          <p:cNvPr id="29" name="Connector 29">
+            <a:extLst>
+              <a:ext uri="{FF2B5EF4-FFF2-40B4-BE49-F238E27FC236}">
+                <a16:creationId xmlns:a16="http://schemas.microsoft.com/office/drawing/2014/main" id="{DAFA28FE-1923-688B-5595-44581B044FB5}"/>
+              </a:ext>
+            </a:extLst>
+          </p:cNvPr>
+          <p:cNvCxnSpPr/>
+          <p:nvPr/>
+        </p:nvCxnSpPr>
+        <p:spPr>
+          <a:xfrm rot="21586250">
+            <a:off x="8445513" y="2914650"/>
+            <a:ext cx="3175000" cy="12700"/>
+          </a:xfrm>
+          <a:prstGeom prst="straightConnector1">
+            <a:avLst/>
+          </a:prstGeom>
+          <a:solidFill>
+            <a:srgbClr val="DEE0E3">
+              <a:alpha val="100000"/>
+            </a:srgbClr>
+          </a:solidFill>
+          <a:ln w="12700" cap="flat" cmpd="sng">
+            <a:solidFill>
+              <a:srgbClr val="E5E7EB">
+                <a:alpha val="100000"/>
+              </a:srgbClr>
+            </a:solidFill>
+            <a:prstDash val="solid"/>
+            <a:round/>
+            <a:headEnd type="none" w="med" len="med"/>
+            <a:tailEnd type="none" w="med" len="med"/>
+          </a:ln>
+        </p:spPr>
+      </p:cxnSp>
+      <p:sp>
+        <p:nvSpPr>
+          <p:cNvPr id="34" name="文本框 33">
+            <a:extLst>
+              <a:ext uri="{FF2B5EF4-FFF2-40B4-BE49-F238E27FC236}">
+                <a16:creationId xmlns:a16="http://schemas.microsoft.com/office/drawing/2014/main" id="{AB9BC970-1FF3-B8F1-735C-88E188F95427}"/>
+              </a:ext>
+            </a:extLst>
+          </p:cNvPr>
+          <p:cNvSpPr txBox="1"/>
+          <p:nvPr/>
+        </p:nvSpPr>
+        <p:spPr>
+          <a:xfrm>
+            <a:off x="496047" y="3305719"/>
+            <a:ext cx="3325906" cy="1477328"/>
+          </a:xfrm>
+          <a:prstGeom prst="rect">
+            <a:avLst/>
+          </a:prstGeom>
+          <a:noFill/>
+        </p:spPr>
+        <p:txBody>
+          <a:bodyPr wrap="square">
+            <a:spAutoFit/>
+          </a:bodyPr>
+          <a:lstStyle/>
+          <a:p>
+            <a:r>
+              <a:rPr lang="en-US" altLang="zh-CN" dirty="0"/>
+              <a:t>• </a:t>
+            </a:r>
+            <a:r>
+              <a:rPr lang="zh-CN" altLang="en-US" dirty="0"/>
+              <a:t>平均持股比例 </a:t>
+            </a:r>
+            <a:r>
+              <a:rPr lang="en-US" altLang="zh-CN" dirty="0"/>
+              <a:t>(APH)</a:t>
+            </a:r>
+          </a:p>
+          <a:p>
+            <a:endParaRPr lang="en-US" altLang="zh-CN" dirty="0"/>
+          </a:p>
+          <a:p>
+            <a:endParaRPr lang="en-US" altLang="zh-CN" dirty="0"/>
+          </a:p>
+          <a:p>
+            <a:r>
+              <a:rPr lang="en-US" altLang="zh-CN" dirty="0"/>
+              <a:t>• </a:t>
+            </a:r>
+            <a:r>
+              <a:rPr lang="zh-CN" altLang="en-US" dirty="0"/>
+              <a:t>大额持仓占比 </a:t>
+            </a:r>
+            <a:r>
+              <a:rPr lang="en-US" altLang="zh-CN" dirty="0"/>
+              <a:t>(LBPH)</a:t>
+            </a:r>
+          </a:p>
+          <a:p>
+            <a:endParaRPr lang="en-US" altLang="zh-CN" dirty="0"/>
+          </a:p>
+        </p:txBody>
+      </p:sp>
+      <p:sp>
+        <p:nvSpPr>
+          <p:cNvPr id="36" name="文本框 35">
+            <a:extLst>
+              <a:ext uri="{FF2B5EF4-FFF2-40B4-BE49-F238E27FC236}">
+                <a16:creationId xmlns:a16="http://schemas.microsoft.com/office/drawing/2014/main" id="{28FCAE56-4964-EE4A-8D90-7F60DBC3E3A9}"/>
+              </a:ext>
+            </a:extLst>
+          </p:cNvPr>
+          <p:cNvSpPr txBox="1"/>
+          <p:nvPr/>
+        </p:nvSpPr>
+        <p:spPr>
+          <a:xfrm>
+            <a:off x="4363198" y="3305719"/>
+            <a:ext cx="2837702" cy="369332"/>
+          </a:xfrm>
+          <a:prstGeom prst="rect">
+            <a:avLst/>
+          </a:prstGeom>
+          <a:noFill/>
+        </p:spPr>
+        <p:txBody>
+          <a:bodyPr wrap="square">
+            <a:spAutoFit/>
+          </a:bodyPr>
+          <a:lstStyle/>
+          <a:p>
+            <a:r>
+              <a:rPr lang="en-US" altLang="zh-CN" dirty="0"/>
+              <a:t>• </a:t>
+            </a:r>
+            <a:r>
+              <a:rPr lang="zh-CN" altLang="en-US" dirty="0"/>
+              <a:t>组合换手率 </a:t>
+            </a:r>
+            <a:r>
+              <a:rPr lang="en-US" altLang="zh-CN" dirty="0"/>
+              <a:t>(Turnover)</a:t>
+            </a:r>
+          </a:p>
+        </p:txBody>
+      </p:sp>
+      <p:pic>
+        <p:nvPicPr>
+          <p:cNvPr id="39" name="图片 38">
             <a:extLst>
               <a:ext uri="{FF2B5EF4-FFF2-40B4-BE49-F238E27FC236}">
                 <a16:creationId xmlns:a16="http://schemas.microsoft.com/office/drawing/2014/main" id="{F661DE60-500F-4C58-07AD-50B915262B55}"/>
@@ -10588,14 +12459,14 @@
           <p:nvPr/>
         </p:nvPicPr>
         <p:blipFill>
-          <a:blip r:embed="rId9"/>
+          <a:blip r:embed="rId13"/>
           <a:stretch>
             <a:fillRect/>
           </a:stretch>
         </p:blipFill>
         <p:spPr>
           <a:xfrm>
-            <a:off x="6635731" y="4767297"/>
+            <a:off x="4363198" y="3612985"/>
             <a:ext cx="3258005" cy="1181265"/>
           </a:xfrm>
           <a:prstGeom prst="rect">
@@ -10603,36 +12474,127 @@
           </a:prstGeom>
         </p:spPr>
       </p:pic>
-      <p:graphicFrame>
-        <p:nvGraphicFramePr>
-          <p:cNvPr id="33" name="图表 32">
+      <p:pic>
+        <p:nvPicPr>
+          <p:cNvPr id="47" name="图片 46">
             <a:extLst>
               <a:ext uri="{FF2B5EF4-FFF2-40B4-BE49-F238E27FC236}">
-                <a16:creationId xmlns:a16="http://schemas.microsoft.com/office/drawing/2014/main" id="{5D218867-B31B-383F-278F-E6FBB26CA402}"/>
+                <a16:creationId xmlns:a16="http://schemas.microsoft.com/office/drawing/2014/main" id="{83F609A7-44E5-335C-E6B5-018B8C6DCD4B}"/>
               </a:ext>
             </a:extLst>
           </p:cNvPr>
-          <p:cNvGraphicFramePr>
-            <a:graphicFrameLocks/>
-          </p:cNvGraphicFramePr>
-          <p:nvPr>
-            <p:extLst>
-              <p:ext uri="{D42A27DB-BD31-4B8C-83A1-F6EECF244321}">
-                <p14:modId xmlns:p14="http://schemas.microsoft.com/office/powerpoint/2010/main" val="1807504816"/>
-              </p:ext>
-            </p:extLst>
-          </p:nvPr>
-        </p:nvGraphicFramePr>
-        <p:xfrm>
-          <a:off x="7352759" y="436176"/>
-          <a:ext cx="4249644" cy="3114184"/>
-        </p:xfrm>
-        <a:graphic>
-          <a:graphicData uri="http://schemas.openxmlformats.org/drawingml/2006/chart">
-            <c:chart xmlns:c="http://schemas.openxmlformats.org/drawingml/2006/chart" xmlns:r="http://schemas.openxmlformats.org/officeDocument/2006/relationships" r:id="rId10"/>
-          </a:graphicData>
-        </a:graphic>
-      </p:graphicFrame>
+          <p:cNvPicPr>
+            <a:picLocks noChangeAspect="1"/>
+          </p:cNvPicPr>
+          <p:nvPr/>
+        </p:nvPicPr>
+        <p:blipFill>
+          <a:blip r:embed="rId14"/>
+          <a:stretch>
+            <a:fillRect/>
+          </a:stretch>
+        </p:blipFill>
+        <p:spPr>
+          <a:xfrm>
+            <a:off x="604385" y="2506448"/>
+            <a:ext cx="1554615" cy="377985"/>
+          </a:xfrm>
+          <a:prstGeom prst="rect">
+            <a:avLst/>
+          </a:prstGeom>
+        </p:spPr>
+      </p:pic>
+      <p:pic>
+        <p:nvPicPr>
+          <p:cNvPr id="51" name="图片 50">
+            <a:extLst>
+              <a:ext uri="{FF2B5EF4-FFF2-40B4-BE49-F238E27FC236}">
+                <a16:creationId xmlns:a16="http://schemas.microsoft.com/office/drawing/2014/main" id="{784BD07C-016B-41A9-2213-60F08704B8BB}"/>
+              </a:ext>
+            </a:extLst>
+          </p:cNvPr>
+          <p:cNvPicPr>
+            <a:picLocks noChangeAspect="1"/>
+          </p:cNvPicPr>
+          <p:nvPr/>
+        </p:nvPicPr>
+        <p:blipFill>
+          <a:blip r:embed="rId15"/>
+          <a:stretch>
+            <a:fillRect/>
+          </a:stretch>
+        </p:blipFill>
+        <p:spPr>
+          <a:xfrm>
+            <a:off x="4613842" y="2468130"/>
+            <a:ext cx="1554615" cy="377985"/>
+          </a:xfrm>
+          <a:prstGeom prst="rect">
+            <a:avLst/>
+          </a:prstGeom>
+        </p:spPr>
+      </p:pic>
+      <p:pic>
+        <p:nvPicPr>
+          <p:cNvPr id="55" name="图片 54">
+            <a:extLst>
+              <a:ext uri="{FF2B5EF4-FFF2-40B4-BE49-F238E27FC236}">
+                <a16:creationId xmlns:a16="http://schemas.microsoft.com/office/drawing/2014/main" id="{6B0A053A-C8CB-887E-49AA-B4C74A115C56}"/>
+              </a:ext>
+            </a:extLst>
+          </p:cNvPr>
+          <p:cNvPicPr>
+            <a:picLocks noChangeAspect="1"/>
+          </p:cNvPicPr>
+          <p:nvPr/>
+        </p:nvPicPr>
+        <p:blipFill>
+          <a:blip r:embed="rId16"/>
+          <a:stretch>
+            <a:fillRect/>
+          </a:stretch>
+        </p:blipFill>
+        <p:spPr>
+          <a:xfrm>
+            <a:off x="8478385" y="2460112"/>
+            <a:ext cx="1554615" cy="377985"/>
+          </a:xfrm>
+          <a:prstGeom prst="rect">
+            <a:avLst/>
+          </a:prstGeom>
+        </p:spPr>
+      </p:pic>
+      <p:pic>
+        <p:nvPicPr>
+          <p:cNvPr id="57" name="图片 56">
+            <a:extLst>
+              <a:ext uri="{FF2B5EF4-FFF2-40B4-BE49-F238E27FC236}">
+                <a16:creationId xmlns:a16="http://schemas.microsoft.com/office/drawing/2014/main" id="{4197B384-C94E-0BEE-C75F-6709FA1D548F}"/>
+              </a:ext>
+            </a:extLst>
+          </p:cNvPr>
+          <p:cNvPicPr>
+            <a:picLocks/>
+          </p:cNvPicPr>
+          <p:nvPr/>
+        </p:nvPicPr>
+        <p:blipFill>
+          <a:blip r:embed="rId17"/>
+          <a:srcRect l="18600"/>
+          <a:stretch>
+            <a:fillRect/>
+          </a:stretch>
+        </p:blipFill>
+        <p:spPr>
+          <a:xfrm>
+            <a:off x="8360239" y="3479800"/>
+            <a:ext cx="3500926" cy="849360"/>
+          </a:xfrm>
+          <a:prstGeom prst="rect">
+            <a:avLst/>
+          </a:prstGeom>
+        </p:spPr>
+      </p:pic>
     </p:spTree>
   </p:cSld>
   <p:clrMapOvr>
@@ -10757,18 +12719,7 @@
                 <a:ea typeface="黑体" panose="02010609060101010101" pitchFamily="49" charset="-122"/>
                 <a:cs typeface="MiSans" pitchFamily="34" charset="-120"/>
               </a:rPr>
-              <a:t>基金</a:t>
-            </a:r>
-            <a:r>
-              <a:rPr lang="en-US" sz="3600" b="1" dirty="0" err="1">
-                <a:solidFill>
-                  <a:srgbClr val="FFFFFF"/>
-                </a:solidFill>
-                <a:latin typeface="黑体" panose="02010609060101010101" pitchFamily="49" charset="-122"/>
-                <a:ea typeface="黑体" panose="02010609060101010101" pitchFamily="49" charset="-122"/>
-                <a:cs typeface="MiSans" pitchFamily="34" charset="-120"/>
-              </a:rPr>
-              <a:t>分类结果</a:t>
+              <a:t>基金分类结果</a:t>
             </a:r>
             <a:endParaRPr lang="en-US" sz="1600" dirty="0">
               <a:latin typeface="黑体" panose="02010609060101010101" pitchFamily="49" charset="-122"/>
@@ -11099,7 +13050,7 @@
               </a:lnSpc>
             </a:pPr>
             <a:r>
-              <a:rPr lang="en-US" sz="1600" dirty="0">
+              <a:rPr lang="en-US" sz="1600" b="1" dirty="0">
                 <a:solidFill>
                   <a:srgbClr val="111111"/>
                 </a:solidFill>
@@ -11202,7 +13153,7 @@
               </a:lnSpc>
             </a:pPr>
             <a:r>
-              <a:rPr lang="en-US" sz="1600" dirty="0">
+              <a:rPr lang="en-US" sz="1600" b="1" dirty="0">
                 <a:solidFill>
                   <a:srgbClr val="111111"/>
                 </a:solidFill>
@@ -11305,7 +13256,7 @@
               </a:lnSpc>
             </a:pPr>
             <a:r>
-              <a:rPr lang="en-US" sz="1600" dirty="0">
+              <a:rPr lang="en-US" sz="1600" b="1" dirty="0">
                 <a:solidFill>
                   <a:srgbClr val="111111"/>
                 </a:solidFill>
@@ -11524,66 +13475,6 @@
           </a:p>
         </p:txBody>
       </p:sp>
-      <p:pic>
-        <p:nvPicPr>
-          <p:cNvPr id="12" name="图片 11">
-            <a:extLst>
-              <a:ext uri="{FF2B5EF4-FFF2-40B4-BE49-F238E27FC236}">
-                <a16:creationId xmlns:a16="http://schemas.microsoft.com/office/drawing/2014/main" id="{93932878-A236-BD9F-27A9-3FF75540F5A2}"/>
-              </a:ext>
-            </a:extLst>
-          </p:cNvPr>
-          <p:cNvPicPr>
-            <a:picLocks noChangeAspect="1"/>
-          </p:cNvPicPr>
-          <p:nvPr/>
-        </p:nvPicPr>
-        <p:blipFill>
-          <a:blip r:embed="rId4"/>
-          <a:stretch>
-            <a:fillRect/>
-          </a:stretch>
-        </p:blipFill>
-        <p:spPr>
-          <a:xfrm>
-            <a:off x="233618" y="1996574"/>
-            <a:ext cx="5653242" cy="3397960"/>
-          </a:xfrm>
-          <a:prstGeom prst="rect">
-            <a:avLst/>
-          </a:prstGeom>
-        </p:spPr>
-      </p:pic>
-      <p:pic>
-        <p:nvPicPr>
-          <p:cNvPr id="14" name="图片 13">
-            <a:extLst>
-              <a:ext uri="{FF2B5EF4-FFF2-40B4-BE49-F238E27FC236}">
-                <a16:creationId xmlns:a16="http://schemas.microsoft.com/office/drawing/2014/main" id="{B2233523-F9E9-853C-64FE-73F31E04B3D3}"/>
-              </a:ext>
-            </a:extLst>
-          </p:cNvPr>
-          <p:cNvPicPr>
-            <a:picLocks noChangeAspect="1"/>
-          </p:cNvPicPr>
-          <p:nvPr/>
-        </p:nvPicPr>
-        <p:blipFill>
-          <a:blip r:embed="rId5"/>
-          <a:stretch>
-            <a:fillRect/>
-          </a:stretch>
-        </p:blipFill>
-        <p:spPr>
-          <a:xfrm>
-            <a:off x="6096000" y="1996574"/>
-            <a:ext cx="5665778" cy="3397960"/>
-          </a:xfrm>
-          <a:prstGeom prst="rect">
-            <a:avLst/>
-          </a:prstGeom>
-        </p:spPr>
-      </p:pic>
       <p:sp>
         <p:nvSpPr>
           <p:cNvPr id="19" name="文本框 18">
@@ -11598,8 +13489,8 @@
         </p:nvSpPr>
         <p:spPr>
           <a:xfrm>
-            <a:off x="988060" y="5681322"/>
-            <a:ext cx="9223487" cy="707886"/>
+            <a:off x="589624" y="5681322"/>
+            <a:ext cx="11324555" cy="1015663"/>
           </a:xfrm>
           <a:prstGeom prst="rect">
             <a:avLst/>
@@ -11617,21 +13508,7 @@
                 <a:latin typeface="宋体" panose="02010600030101010101" pitchFamily="2" charset="-122"/>
                 <a:ea typeface="宋体" panose="02010600030101010101" pitchFamily="2" charset="-122"/>
               </a:rPr>
-              <a:t>可以发现，调整数据范围前后，分类结构也依旧稳定，与</a:t>
-            </a:r>
-            <a:r>
-              <a:rPr lang="en-US" altLang="zh-CN" sz="2000" dirty="0">
-                <a:latin typeface="宋体" panose="02010600030101010101" pitchFamily="2" charset="-122"/>
-                <a:ea typeface="宋体" panose="02010600030101010101" pitchFamily="2" charset="-122"/>
-              </a:rPr>
-              <a:t>Bushee</a:t>
-            </a:r>
-            <a:r>
-              <a:rPr lang="zh-CN" altLang="en-US" sz="2000" dirty="0">
-                <a:latin typeface="宋体" panose="02010600030101010101" pitchFamily="2" charset="-122"/>
-                <a:ea typeface="宋体" panose="02010600030101010101" pitchFamily="2" charset="-122"/>
-              </a:rPr>
-              <a:t>经典文献一致，</a:t>
+              <a:t>调整数据范围前后，分类结构保持高度稳定。</a:t>
             </a:r>
             <a:r>
               <a:rPr lang="en-US" altLang="zh-CN" sz="2000" dirty="0">
@@ -11659,7 +13536,21 @@
                 <a:latin typeface="宋体" panose="02010600030101010101" pitchFamily="2" charset="-122"/>
                 <a:ea typeface="宋体" panose="02010600030101010101" pitchFamily="2" charset="-122"/>
               </a:rPr>
-              <a:t>型基金主导市场，</a:t>
+              <a:t>型基金合计占比超</a:t>
+            </a:r>
+            <a:r>
+              <a:rPr lang="en-US" altLang="zh-CN" sz="2000" dirty="0">
+                <a:latin typeface="宋体" panose="02010600030101010101" pitchFamily="2" charset="-122"/>
+                <a:ea typeface="宋体" panose="02010600030101010101" pitchFamily="2" charset="-122"/>
+              </a:rPr>
+              <a:t>90%</a:t>
+            </a:r>
+            <a:r>
+              <a:rPr lang="zh-CN" altLang="en-US" sz="2000" dirty="0">
+                <a:latin typeface="宋体" panose="02010600030101010101" pitchFamily="2" charset="-122"/>
+                <a:ea typeface="宋体" panose="02010600030101010101" pitchFamily="2" charset="-122"/>
+              </a:rPr>
+              <a:t>，主导市场；</a:t>
             </a:r>
             <a:r>
               <a:rPr lang="en-US" altLang="zh-CN" sz="2000" dirty="0">
@@ -11675,9 +13566,96 @@
               </a:rPr>
               <a:t>型占比较低。</a:t>
             </a:r>
-          </a:p>
-        </p:txBody>
-      </p:sp>
+            <a:endParaRPr lang="en-US" altLang="zh-CN" sz="2000" dirty="0">
+              <a:latin typeface="宋体" panose="02010600030101010101" pitchFamily="2" charset="-122"/>
+              <a:ea typeface="宋体" panose="02010600030101010101" pitchFamily="2" charset="-122"/>
+            </a:endParaRPr>
+          </a:p>
+          <a:p>
+            <a:r>
+              <a:rPr lang="zh-CN" altLang="en-US" sz="2000" dirty="0">
+                <a:latin typeface="宋体" panose="02010600030101010101" pitchFamily="2" charset="-122"/>
+                <a:ea typeface="宋体" panose="02010600030101010101" pitchFamily="2" charset="-122"/>
+              </a:rPr>
+              <a:t>该结果与</a:t>
+            </a:r>
+            <a:r>
+              <a:rPr lang="en-US" altLang="zh-CN" sz="2000" dirty="0">
+                <a:latin typeface="宋体" panose="02010600030101010101" pitchFamily="2" charset="-122"/>
+                <a:ea typeface="宋体" panose="02010600030101010101" pitchFamily="2" charset="-122"/>
+              </a:rPr>
+              <a:t>Bushee</a:t>
+            </a:r>
+            <a:r>
+              <a:rPr lang="zh-CN" altLang="en-US" sz="2000" dirty="0">
+                <a:latin typeface="宋体" panose="02010600030101010101" pitchFamily="2" charset="-122"/>
+                <a:ea typeface="宋体" panose="02010600030101010101" pitchFamily="2" charset="-122"/>
+              </a:rPr>
+              <a:t>经典文献结论一致，验证了分类方法的有效性。</a:t>
+            </a:r>
+          </a:p>
+        </p:txBody>
+      </p:sp>
+      <p:graphicFrame>
+        <p:nvGraphicFramePr>
+          <p:cNvPr id="6" name="图表 5">
+            <a:extLst>
+              <a:ext uri="{FF2B5EF4-FFF2-40B4-BE49-F238E27FC236}">
+                <a16:creationId xmlns:a16="http://schemas.microsoft.com/office/drawing/2014/main" id="{0F087C12-75BB-A539-2761-6FB55871C944}"/>
+              </a:ext>
+            </a:extLst>
+          </p:cNvPr>
+          <p:cNvGraphicFramePr>
+            <a:graphicFrameLocks/>
+          </p:cNvGraphicFramePr>
+          <p:nvPr>
+            <p:extLst>
+              <p:ext uri="{D42A27DB-BD31-4B8C-83A1-F6EECF244321}">
+                <p14:modId xmlns:p14="http://schemas.microsoft.com/office/powerpoint/2010/main" val="785846802"/>
+              </p:ext>
+            </p:extLst>
+          </p:nvPr>
+        </p:nvGraphicFramePr>
+        <p:xfrm>
+          <a:off x="6714565" y="2052730"/>
+          <a:ext cx="5199614" cy="3256744"/>
+        </p:xfrm>
+        <a:graphic>
+          <a:graphicData uri="http://schemas.openxmlformats.org/drawingml/2006/chart">
+            <c:chart xmlns:c="http://schemas.openxmlformats.org/drawingml/2006/chart" xmlns:r="http://schemas.openxmlformats.org/officeDocument/2006/relationships" r:id="rId4"/>
+          </a:graphicData>
+        </a:graphic>
+      </p:graphicFrame>
+      <p:graphicFrame>
+        <p:nvGraphicFramePr>
+          <p:cNvPr id="8" name="图表 7">
+            <a:extLst>
+              <a:ext uri="{FF2B5EF4-FFF2-40B4-BE49-F238E27FC236}">
+                <a16:creationId xmlns:a16="http://schemas.microsoft.com/office/drawing/2014/main" id="{41FE154E-1B3E-359D-AE4F-8D5594AA1E34}"/>
+              </a:ext>
+            </a:extLst>
+          </p:cNvPr>
+          <p:cNvGraphicFramePr>
+            <a:graphicFrameLocks/>
+          </p:cNvGraphicFramePr>
+          <p:nvPr>
+            <p:extLst>
+              <p:ext uri="{D42A27DB-BD31-4B8C-83A1-F6EECF244321}">
+                <p14:modId xmlns:p14="http://schemas.microsoft.com/office/powerpoint/2010/main" val="2445122502"/>
+              </p:ext>
+            </p:extLst>
+          </p:nvPr>
+        </p:nvGraphicFramePr>
+        <p:xfrm>
+          <a:off x="589624" y="1996574"/>
+          <a:ext cx="5506376" cy="3312900"/>
+        </p:xfrm>
+        <a:graphic>
+          <a:graphicData uri="http://schemas.openxmlformats.org/drawingml/2006/chart">
+            <c:chart xmlns:c="http://schemas.openxmlformats.org/drawingml/2006/chart" xmlns:r="http://schemas.openxmlformats.org/officeDocument/2006/relationships" r:id="rId5"/>
+          </a:graphicData>
+        </a:graphic>
+      </p:graphicFrame>
     </p:spTree>
     <p:extLst>
       <p:ext uri="{BB962C8B-B14F-4D97-AF65-F5344CB8AC3E}">
